--- a/ppts/irt/Information Retrieval Techniques (IRT) re 3.pptx
+++ b/ppts/irt/Information Retrieval Techniques (IRT) re 3.pptx
@@ -4,6 +4,9 @@
   <p:sldMasterIdLst>
     <p:sldMasterId id="2147483648" r:id="rId1"/>
   </p:sldMasterIdLst>
+  <p:notesMasterIdLst>
+    <p:notesMasterId r:id="rId15"/>
+  </p:notesMasterIdLst>
   <p:sldIdLst>
     <p:sldId id="256" r:id="rId2"/>
     <p:sldId id="257" r:id="rId3"/>
@@ -12,29 +15,126 @@
     <p:sldId id="260" r:id="rId6"/>
     <p:sldId id="261" r:id="rId7"/>
     <p:sldId id="262" r:id="rId8"/>
-    <p:sldId id="263" r:id="rId9"/>
-    <p:sldId id="264" r:id="rId10"/>
-    <p:sldId id="265" r:id="rId11"/>
-    <p:sldId id="266" r:id="rId12"/>
-    <p:sldId id="267" r:id="rId13"/>
-    <p:sldId id="268" r:id="rId14"/>
-    <p:sldId id="269" r:id="rId15"/>
+    <p:sldId id="264" r:id="rId9"/>
+    <p:sldId id="265" r:id="rId10"/>
+    <p:sldId id="266" r:id="rId11"/>
+    <p:sldId id="267" r:id="rId12"/>
+    <p:sldId id="268" r:id="rId13"/>
+    <p:sldId id="269" r:id="rId14"/>
   </p:sldIdLst>
-  <p:notesMasterIdLst>
-    <p:notesMasterId r:id="rId16"/>
-  </p:notesMasterIdLst>
   <p:sldSz cx="12192000" cy="6858000"/>
   <p:notesSz cx="6858000" cy="12192000"/>
   <p:embeddedFontLst>
     <p:embeddedFont>
-      <p:font typeface="Liter" charset="-122" pitchFamily="34"/>
-      <p:regular r:id="rId21"/>
+      <p:font typeface="Liter" panose="020B0604020202020204" charset="0"/>
+      <p:regular r:id="rId16"/>
     </p:embeddedFont>
     <p:embeddedFont>
-      <p:font typeface="Quattrocento Sans" charset="-122" pitchFamily="34"/>
-      <p:regular r:id="rId22"/>
+      <p:font typeface="Quattrocento Sans" panose="020B0502050000020003" pitchFamily="34" charset="0"/>
+      <p:regular r:id="rId17"/>
+      <p:bold r:id="rId18"/>
     </p:embeddedFont>
   </p:embeddedFontLst>
+  <p:defaultTextStyle>
+    <a:defPPr>
+      <a:defRPr lang="en-US"/>
+    </a:defPPr>
+    <a:lvl1pPr marL="0" algn="l" defTabSz="914400" rtl="0" eaLnBrk="1" latinLnBrk="0" hangingPunct="1">
+      <a:defRPr sz="1800" kern="1200">
+        <a:solidFill>
+          <a:schemeClr val="tx1"/>
+        </a:solidFill>
+        <a:latin typeface="+mn-lt"/>
+        <a:ea typeface="+mn-ea"/>
+        <a:cs typeface="+mn-cs"/>
+      </a:defRPr>
+    </a:lvl1pPr>
+    <a:lvl2pPr marL="457200" algn="l" defTabSz="914400" rtl="0" eaLnBrk="1" latinLnBrk="0" hangingPunct="1">
+      <a:defRPr sz="1800" kern="1200">
+        <a:solidFill>
+          <a:schemeClr val="tx1"/>
+        </a:solidFill>
+        <a:latin typeface="+mn-lt"/>
+        <a:ea typeface="+mn-ea"/>
+        <a:cs typeface="+mn-cs"/>
+      </a:defRPr>
+    </a:lvl2pPr>
+    <a:lvl3pPr marL="914400" algn="l" defTabSz="914400" rtl="0" eaLnBrk="1" latinLnBrk="0" hangingPunct="1">
+      <a:defRPr sz="1800" kern="1200">
+        <a:solidFill>
+          <a:schemeClr val="tx1"/>
+        </a:solidFill>
+        <a:latin typeface="+mn-lt"/>
+        <a:ea typeface="+mn-ea"/>
+        <a:cs typeface="+mn-cs"/>
+      </a:defRPr>
+    </a:lvl3pPr>
+    <a:lvl4pPr marL="1371600" algn="l" defTabSz="914400" rtl="0" eaLnBrk="1" latinLnBrk="0" hangingPunct="1">
+      <a:defRPr sz="1800" kern="1200">
+        <a:solidFill>
+          <a:schemeClr val="tx1"/>
+        </a:solidFill>
+        <a:latin typeface="+mn-lt"/>
+        <a:ea typeface="+mn-ea"/>
+        <a:cs typeface="+mn-cs"/>
+      </a:defRPr>
+    </a:lvl4pPr>
+    <a:lvl5pPr marL="1828800" algn="l" defTabSz="914400" rtl="0" eaLnBrk="1" latinLnBrk="0" hangingPunct="1">
+      <a:defRPr sz="1800" kern="1200">
+        <a:solidFill>
+          <a:schemeClr val="tx1"/>
+        </a:solidFill>
+        <a:latin typeface="+mn-lt"/>
+        <a:ea typeface="+mn-ea"/>
+        <a:cs typeface="+mn-cs"/>
+      </a:defRPr>
+    </a:lvl5pPr>
+    <a:lvl6pPr marL="2286000" algn="l" defTabSz="914400" rtl="0" eaLnBrk="1" latinLnBrk="0" hangingPunct="1">
+      <a:defRPr sz="1800" kern="1200">
+        <a:solidFill>
+          <a:schemeClr val="tx1"/>
+        </a:solidFill>
+        <a:latin typeface="+mn-lt"/>
+        <a:ea typeface="+mn-ea"/>
+        <a:cs typeface="+mn-cs"/>
+      </a:defRPr>
+    </a:lvl6pPr>
+    <a:lvl7pPr marL="2743200" algn="l" defTabSz="914400" rtl="0" eaLnBrk="1" latinLnBrk="0" hangingPunct="1">
+      <a:defRPr sz="1800" kern="1200">
+        <a:solidFill>
+          <a:schemeClr val="tx1"/>
+        </a:solidFill>
+        <a:latin typeface="+mn-lt"/>
+        <a:ea typeface="+mn-ea"/>
+        <a:cs typeface="+mn-cs"/>
+      </a:defRPr>
+    </a:lvl7pPr>
+    <a:lvl8pPr marL="3200400" algn="l" defTabSz="914400" rtl="0" eaLnBrk="1" latinLnBrk="0" hangingPunct="1">
+      <a:defRPr sz="1800" kern="1200">
+        <a:solidFill>
+          <a:schemeClr val="tx1"/>
+        </a:solidFill>
+        <a:latin typeface="+mn-lt"/>
+        <a:ea typeface="+mn-ea"/>
+        <a:cs typeface="+mn-cs"/>
+      </a:defRPr>
+    </a:lvl8pPr>
+    <a:lvl9pPr marL="3657600" algn="l" defTabSz="914400" rtl="0" eaLnBrk="1" latinLnBrk="0" hangingPunct="1">
+      <a:defRPr sz="1800" kern="1200">
+        <a:solidFill>
+          <a:schemeClr val="tx1"/>
+        </a:solidFill>
+        <a:latin typeface="+mn-lt"/>
+        <a:ea typeface="+mn-ea"/>
+        <a:cs typeface="+mn-cs"/>
+      </a:defRPr>
+    </a:lvl9pPr>
+  </p:defaultTextStyle>
+  <p:extLst>
+    <p:ext uri="{EFAFB233-063F-42B5-8137-9DF3F51BA10A}">
+      <p15:sldGuideLst xmlns:p15="http://schemas.microsoft.com/office/powerpoint/2012/main"/>
+    </p:ext>
+  </p:extLst>
 </p:presentation>
 </file>
 
@@ -60,234 +160,10 @@
           <a:chExt cx="0" cy="0"/>
         </a:xfrm>
       </p:grpSpPr>
-      <p:sp>
-        <p:nvSpPr>
-          <p:cNvPr id="2" name="Header Placeholder 1"/>
-          <p:cNvSpPr>
-            <a:spLocks noGrp="1"/>
-          </p:cNvSpPr>
-          <p:nvPr>
-            <p:ph type="hdr" sz="quarter"/>
-          </p:nvPr>
-        </p:nvSpPr>
-        <p:spPr>
-          <a:xfrm>
-            <a:off x="0" y="0"/>
-            <a:ext cx="2971800" cy="458788"/>
-          </a:xfrm>
-          <a:prstGeom prst="rect">
-            <a:avLst/>
-          </a:prstGeom>
-        </p:spPr>
-        <p:txBody>
-          <a:bodyPr vert="horz" lIns="91440" tIns="45720" rIns="91440" bIns="45720" rtlCol="0"/>
-          <a:lstStyle>
-            <a:lvl1pPr algn="l">
-              <a:defRPr sz="1200"/>
-            </a:lvl1pPr>
-          </a:lstStyle>
-          <a:p>
-            <a:endParaRPr lang="en-US"/>
-          </a:p>
-        </p:txBody>
-      </p:sp>
-      <p:sp>
-        <p:nvSpPr>
-          <p:cNvPr id="3" name="Date Placeholder 2"/>
-          <p:cNvSpPr>
-            <a:spLocks noGrp="1"/>
-          </p:cNvSpPr>
-          <p:nvPr>
-            <p:ph type="dt" idx="1"/>
-          </p:nvPr>
-        </p:nvSpPr>
-        <p:spPr>
-          <a:xfrm>
-            <a:off x="3884613" y="0"/>
-            <a:ext cx="2971800" cy="458788"/>
-          </a:xfrm>
-          <a:prstGeom prst="rect">
-            <a:avLst/>
-          </a:prstGeom>
-        </p:spPr>
-        <p:txBody>
-          <a:bodyPr vert="horz" lIns="91440" tIns="45720" rIns="91440" bIns="45720" rtlCol="0"/>
-          <a:lstStyle>
-            <a:lvl1pPr algn="r">
-              <a:defRPr sz="1200"/>
-            </a:lvl1pPr>
-          </a:lstStyle>
-          <a:p>
-            <a:fld id="{5282F153-3F37-0F45-9E97-73ACFA13230C}" type="datetimeFigureOut">
-              <a:rPr lang="en-US"/>
-              <a:t>7/23/19</a:t>
-            </a:fld>
-            <a:endParaRPr lang="en-US"/>
-          </a:p>
-        </p:txBody>
-      </p:sp>
-      <p:sp>
-        <p:nvSpPr>
-          <p:cNvPr id="4" name="Slide Image Placeholder 3"/>
-          <p:cNvSpPr>
-            <a:spLocks noGrp="1" noRot="1" noChangeAspect="1"/>
-          </p:cNvSpPr>
-          <p:nvPr>
-            <p:ph type="sldImg" idx="2"/>
-          </p:nvPr>
-        </p:nvSpPr>
-        <p:spPr>
-          <a:xfrm>
-            <a:off x="685800" y="1143000"/>
-            <a:ext cx="5486400" cy="3086100"/>
-          </a:xfrm>
-          <a:prstGeom prst="rect">
-            <a:avLst/>
-          </a:prstGeom>
-          <a:noFill/>
-          <a:ln w="12700">
-            <a:solidFill>
-              <a:prstClr val="black"/>
-            </a:solidFill>
-          </a:ln>
-        </p:spPr>
-        <p:txBody>
-          <a:bodyPr vert="horz" lIns="91440" tIns="45720" rIns="91440" bIns="45720" rtlCol="0" anchor="ctr"/>
-          <a:lstStyle/>
-          <a:p>
-            <a:endParaRPr lang="en-US"/>
-          </a:p>
-        </p:txBody>
-      </p:sp>
-      <p:sp>
-        <p:nvSpPr>
-          <p:cNvPr id="5" name="Notes Placeholder 4"/>
-          <p:cNvSpPr>
-            <a:spLocks noGrp="1"/>
-          </p:cNvSpPr>
-          <p:nvPr>
-            <p:ph type="body" sz="quarter" idx="3"/>
-          </p:nvPr>
-        </p:nvSpPr>
-        <p:spPr>
-          <a:xfrm>
-            <a:off x="685800" y="4400550"/>
-            <a:ext cx="5486400" cy="3600450"/>
-          </a:xfrm>
-          <a:prstGeom prst="rect">
-            <a:avLst/>
-          </a:prstGeom>
-        </p:spPr>
-        <p:txBody>
-          <a:bodyPr vert="horz" lIns="91440" tIns="45720" rIns="91440" bIns="45720" rtlCol="0"/>
-          <a:lstStyle/>
-          <a:p>
-            <a:pPr lvl="0"/>
-            <a:r>
-              <a:rPr lang="en-US"/>
-              <a:t>Click to edit Master text styles</a:t>
-            </a:r>
-          </a:p>
-          <a:p>
-            <a:pPr lvl="1"/>
-            <a:r>
-              <a:rPr lang="en-US"/>
-              <a:t>Second level</a:t>
-            </a:r>
-          </a:p>
-          <a:p>
-            <a:pPr lvl="2"/>
-            <a:r>
-              <a:rPr lang="en-US"/>
-              <a:t>Third level</a:t>
-            </a:r>
-          </a:p>
-          <a:p>
-            <a:pPr lvl="3"/>
-            <a:r>
-              <a:rPr lang="en-US"/>
-              <a:t>Fourth level</a:t>
-            </a:r>
-          </a:p>
-          <a:p>
-            <a:pPr lvl="4"/>
-            <a:r>
-              <a:rPr lang="en-US"/>
-              <a:t>Fifth level</a:t>
-            </a:r>
-          </a:p>
-        </p:txBody>
-      </p:sp>
-      <p:sp>
-        <p:nvSpPr>
-          <p:cNvPr id="6" name="Footer Placeholder 5"/>
-          <p:cNvSpPr>
-            <a:spLocks noGrp="1"/>
-          </p:cNvSpPr>
-          <p:nvPr>
-            <p:ph type="ftr" sz="quarter" idx="4"/>
-          </p:nvPr>
-        </p:nvSpPr>
-        <p:spPr>
-          <a:xfrm>
-            <a:off x="0" y="8685213"/>
-            <a:ext cx="2971800" cy="458787"/>
-          </a:xfrm>
-          <a:prstGeom prst="rect">
-            <a:avLst/>
-          </a:prstGeom>
-        </p:spPr>
-        <p:txBody>
-          <a:bodyPr vert="horz" lIns="91440" tIns="45720" rIns="91440" bIns="45720" rtlCol="0" anchor="b"/>
-          <a:lstStyle>
-            <a:lvl1pPr algn="l">
-              <a:defRPr sz="1200"/>
-            </a:lvl1pPr>
-          </a:lstStyle>
-          <a:p>
-            <a:endParaRPr lang="en-US"/>
-          </a:p>
-        </p:txBody>
-      </p:sp>
-      <p:sp>
-        <p:nvSpPr>
-          <p:cNvPr id="7" name="Slide Number Placeholder 6"/>
-          <p:cNvSpPr>
-            <a:spLocks noGrp="1"/>
-          </p:cNvSpPr>
-          <p:nvPr>
-            <p:ph type="sldNum" sz="quarter" idx="5"/>
-          </p:nvPr>
-        </p:nvSpPr>
-        <p:spPr>
-          <a:xfrm>
-            <a:off x="3884613" y="8685213"/>
-            <a:ext cx="2971800" cy="458787"/>
-          </a:xfrm>
-          <a:prstGeom prst="rect">
-            <a:avLst/>
-          </a:prstGeom>
-        </p:spPr>
-        <p:txBody>
-          <a:bodyPr vert="horz" lIns="91440" tIns="45720" rIns="91440" bIns="45720" rtlCol="0" anchor="b"/>
-          <a:lstStyle>
-            <a:lvl1pPr algn="r">
-              <a:defRPr sz="1200"/>
-            </a:lvl1pPr>
-          </a:lstStyle>
-          <a:p>
-            <a:fld id="{CE5E9CC1-C706-0F49-92D6-E571CC5EEA8F}" type="slidenum">
-              <a:rPr lang="en-US"/>
-              <a:t>‹#›</a:t>
-            </a:fld>
-            <a:endParaRPr lang="en-US"/>
-          </a:p>
-        </p:txBody>
-      </p:sp>
     </p:spTree>
     <p:extLst>
       <p:ext uri="{BB962C8B-B14F-4D97-AF65-F5344CB8AC3E}">
-        <p14:creationId xmlns:p14="http://schemas.microsoft.com/office/powerpoint/2010/main" val="1024086991"/>
+        <p14:creationId xmlns:p14="http://schemas.microsoft.com/office/powerpoint/2010/main" val="349170653"/>
       </p:ext>
     </p:extLst>
   </p:cSld>
@@ -431,10 +307,6 @@
           <a:bodyPr/>
           <a:lstStyle/>
           <a:p>
-            <a:r>
-              <a:rPr lang="en-US" dirty="0"/>
-              <a:t/>
-            </a:r>
             <a:endParaRPr lang="en-US" dirty="0"/>
           </a:p>
         </p:txBody>
@@ -519,10 +391,6 @@
           <a:bodyPr/>
           <a:lstStyle/>
           <a:p>
-            <a:r>
-              <a:rPr lang="en-US" dirty="0"/>
-              <a:t/>
-            </a:r>
             <a:endParaRPr lang="en-US" dirty="0"/>
           </a:p>
         </p:txBody>
@@ -607,10 +475,6 @@
           <a:bodyPr/>
           <a:lstStyle/>
           <a:p>
-            <a:r>
-              <a:rPr lang="en-US" dirty="0"/>
-              <a:t/>
-            </a:r>
             <a:endParaRPr lang="en-US" dirty="0"/>
           </a:p>
         </p:txBody>
@@ -695,10 +559,6 @@
           <a:bodyPr/>
           <a:lstStyle/>
           <a:p>
-            <a:r>
-              <a:rPr lang="en-US" dirty="0"/>
-              <a:t/>
-            </a:r>
             <a:endParaRPr lang="en-US" dirty="0"/>
           </a:p>
         </p:txBody>
@@ -783,10 +643,6 @@
           <a:bodyPr/>
           <a:lstStyle/>
           <a:p>
-            <a:r>
-              <a:rPr lang="en-US" dirty="0"/>
-              <a:t/>
-            </a:r>
             <a:endParaRPr lang="en-US" dirty="0"/>
           </a:p>
         </p:txBody>
@@ -809,94 +665,6 @@
             <a:fld id="{F7021451-1387-4CA6-816F-3879F97B5CBC}" type="slidenum">
               <a:rPr lang="en-US"/>
               <a:t>13</a:t>
-            </a:fld>
-            <a:endParaRPr lang="en-US"/>
-          </a:p>
-        </p:txBody>
-      </p:sp>
-    </p:spTree>
-    <p:extLst>
-      <p:ext uri="{BB962C8B-B14F-4D97-AF65-F5344CB8AC3E}">
-        <p14:creationId xmlns:p14="http://schemas.microsoft.com/office/powerpoint/2010/main" val="1024086991"/>
-      </p:ext>
-    </p:extLst>
-  </p:cSld>
-  <p:clrMapOvr>
-    <a:masterClrMapping/>
-  </p:clrMapOvr>
-</p:notes>
-</file>
-
-<file path=ppt/notesSlides/notesSlide14.xml><?xml version="1.0" encoding="utf-8"?>
-<p:notes xmlns:a="http://schemas.openxmlformats.org/drawingml/2006/main" xmlns:r="http://schemas.openxmlformats.org/officeDocument/2006/relationships" xmlns:p="http://schemas.openxmlformats.org/presentationml/2006/main">
-  <p:cSld>
-    <p:spTree>
-      <p:nvGrpSpPr>
-        <p:cNvPr id="1" name=""/>
-        <p:cNvGrpSpPr/>
-        <p:nvPr/>
-      </p:nvGrpSpPr>
-      <p:grpSpPr>
-        <a:xfrm>
-          <a:off x="0" y="0"/>
-          <a:ext cx="0" cy="0"/>
-          <a:chOff x="0" y="0"/>
-          <a:chExt cx="0" cy="0"/>
-        </a:xfrm>
-      </p:grpSpPr>
-      <p:sp>
-        <p:nvSpPr>
-          <p:cNvPr id="2" name="Slide Image Placeholder 1"/>
-          <p:cNvSpPr>
-            <a:spLocks noGrp="1" noRot="1" noChangeAspect="1"/>
-          </p:cNvSpPr>
-          <p:nvPr>
-            <p:ph type="sldImg"/>
-          </p:nvPr>
-        </p:nvSpPr>
-        <p:spPr/>
-      </p:sp>
-      <p:sp>
-        <p:nvSpPr>
-          <p:cNvPr id="3" name="Notes Placeholder 2"/>
-          <p:cNvSpPr>
-            <a:spLocks noGrp="1"/>
-          </p:cNvSpPr>
-          <p:nvPr>
-            <p:ph type="body" idx="1"/>
-          </p:nvPr>
-        </p:nvSpPr>
-        <p:spPr/>
-        <p:txBody>
-          <a:bodyPr/>
-          <a:lstStyle/>
-          <a:p>
-            <a:r>
-              <a:rPr lang="en-US" dirty="0"/>
-              <a:t/>
-            </a:r>
-            <a:endParaRPr lang="en-US" dirty="0"/>
-          </a:p>
-        </p:txBody>
-      </p:sp>
-      <p:sp>
-        <p:nvSpPr>
-          <p:cNvPr id="4" name="Slide Number Placeholder 3"/>
-          <p:cNvSpPr>
-            <a:spLocks noGrp="1"/>
-          </p:cNvSpPr>
-          <p:nvPr>
-            <p:ph type="sldNum" sz="quarter" idx="10"/>
-          </p:nvPr>
-        </p:nvSpPr>
-        <p:spPr/>
-        <p:txBody>
-          <a:bodyPr/>
-          <a:lstStyle/>
-          <a:p>
-            <a:fld id="{F7021451-1387-4CA6-816F-3879F97B5CBC}" type="slidenum">
-              <a:rPr lang="en-US"/>
-              <a:t>14</a:t>
             </a:fld>
             <a:endParaRPr lang="en-US"/>
           </a:p>
@@ -959,10 +727,6 @@
           <a:bodyPr/>
           <a:lstStyle/>
           <a:p>
-            <a:r>
-              <a:rPr lang="en-US" dirty="0"/>
-              <a:t/>
-            </a:r>
             <a:endParaRPr lang="en-US" dirty="0"/>
           </a:p>
         </p:txBody>
@@ -1047,10 +811,6 @@
           <a:bodyPr/>
           <a:lstStyle/>
           <a:p>
-            <a:r>
-              <a:rPr lang="en-US" dirty="0"/>
-              <a:t/>
-            </a:r>
             <a:endParaRPr lang="en-US" dirty="0"/>
           </a:p>
         </p:txBody>
@@ -1135,10 +895,6 @@
           <a:bodyPr/>
           <a:lstStyle/>
           <a:p>
-            <a:r>
-              <a:rPr lang="en-US" dirty="0"/>
-              <a:t/>
-            </a:r>
             <a:endParaRPr lang="en-US" dirty="0"/>
           </a:p>
         </p:txBody>
@@ -1223,10 +979,6 @@
           <a:bodyPr/>
           <a:lstStyle/>
           <a:p>
-            <a:r>
-              <a:rPr lang="en-US" dirty="0"/>
-              <a:t/>
-            </a:r>
             <a:endParaRPr lang="en-US" dirty="0"/>
           </a:p>
         </p:txBody>
@@ -1311,10 +1063,6 @@
           <a:bodyPr/>
           <a:lstStyle/>
           <a:p>
-            <a:r>
-              <a:rPr lang="en-US" dirty="0"/>
-              <a:t/>
-            </a:r>
             <a:endParaRPr lang="en-US" dirty="0"/>
           </a:p>
         </p:txBody>
@@ -1399,10 +1147,6 @@
           <a:bodyPr/>
           <a:lstStyle/>
           <a:p>
-            <a:r>
-              <a:rPr lang="en-US" dirty="0"/>
-              <a:t/>
-            </a:r>
             <a:endParaRPr lang="en-US" dirty="0"/>
           </a:p>
         </p:txBody>
@@ -1487,10 +1231,6 @@
           <a:bodyPr/>
           <a:lstStyle/>
           <a:p>
-            <a:r>
-              <a:rPr lang="en-US" dirty="0"/>
-              <a:t/>
-            </a:r>
             <a:endParaRPr lang="en-US" dirty="0"/>
           </a:p>
         </p:txBody>
@@ -1575,10 +1315,6 @@
           <a:bodyPr/>
           <a:lstStyle/>
           <a:p>
-            <a:r>
-              <a:rPr lang="en-US" dirty="0"/>
-              <a:t/>
-            </a:r>
             <a:endParaRPr lang="en-US" dirty="0"/>
           </a:p>
         </p:txBody>
@@ -1657,6 +1393,7 @@
         <a:solidFill>
           <a:srgbClr val="FFFFFF"/>
         </a:solidFill>
+        <a:effectLst/>
       </p:bgPr>
     </p:bg>
     <p:spTree>
@@ -1684,6 +1421,11 @@
 <file path=ppt/slideMasters/slideMaster1.xml><?xml version="1.0" encoding="utf-8"?>
 <p:sldMaster xmlns:a="http://schemas.openxmlformats.org/drawingml/2006/main" xmlns:r="http://schemas.openxmlformats.org/officeDocument/2006/relationships" xmlns:p="http://schemas.openxmlformats.org/presentationml/2006/main">
   <p:cSld>
+    <p:bg>
+      <p:bgRef idx="1001">
+        <a:schemeClr val="bg1"/>
+      </p:bgRef>
+    </p:bg>
     <p:spTree>
       <p:nvGrpSpPr>
         <p:cNvPr id="1" name=""/>
@@ -1967,6 +1709,7 @@
         <a:solidFill>
           <a:srgbClr val="1A1D21"/>
         </a:solidFill>
+        <a:effectLst/>
       </p:bgPr>
     </p:bg>
     <p:spTree>
@@ -1985,17 +1728,17 @@
       </p:grpSpPr>
       <p:pic>
         <p:nvPicPr>
-          <p:cNvPr id="2" name="Image 0" descr="https://kimi-img.moonshot.cn/pub/slides/okc/5beqdm23l5qus/images/2_Free_Abstract_Network_Visualization.png">    </p:cNvPr>
+          <p:cNvPr id="2" name="Image 0" descr="https://kimi-img.moonshot.cn/pub/slides/okc/5beqdm23l5qus/images/2_Free_Abstract_Network_Visualization.png"/>
           <p:cNvPicPr>
             <a:picLocks noChangeAspect="1"/>
           </p:cNvPicPr>
           <p:nvPr/>
         </p:nvPicPr>
         <p:blipFill>
-          <a:blip r:embed="rId1">
+          <a:blip r:embed="rId3">
             <a:alphaModFix amt="40000"/>
           </a:blip>
-          <a:srcRect l="0" r="0" t="34238" b="34238"/>
+          <a:srcRect t="34238" b="34238"/>
           <a:stretch/>
         </p:blipFill>
         <p:spPr>
@@ -2026,7 +1769,7 @@
               <a:gd name="adj" fmla="val 0"/>
             </a:avLst>
           </a:prstGeom>
-          <a:gradFill rotWithShape="1" flip="none">
+          <a:gradFill flip="none" rotWithShape="1">
             <a:gsLst>
               <a:gs pos="0">
                 <a:srgbClr val="1A1D21">
@@ -2122,7 +1865,7 @@
               </a:lnSpc>
             </a:pPr>
             <a:r>
-              <a:rPr lang="en-US" sz="1200" b="1" spc="60" kern="0" dirty="0">
+              <a:rPr lang="en-US" sz="1200" b="1" kern="0" spc="60" dirty="0">
                 <a:solidFill>
                   <a:srgbClr val="D4A26A"/>
                 </a:solidFill>
@@ -2206,89 +1949,7 @@
               </a:lnSpc>
             </a:pPr>
             <a:r>
-              <a:rPr lang="en-US" sz="5400" b="1" dirty="0">
-                <a:solidFill>
-                  <a:srgbClr val="E2E8F0"/>
-                </a:solidFill>
-                <a:latin typeface="Liter" pitchFamily="34" charset="0"/>
-                <a:ea typeface="Liter" pitchFamily="34" charset="-122"/>
-                <a:cs typeface="Liter" pitchFamily="34" charset="-120"/>
-              </a:rPr>
-              <a:t>Information Retrieval</a:t>
-            </a:r>
-            <a:endParaRPr lang="en-US" sz="1600" dirty="0"/>
-          </a:p>
-          <a:p>
-            <a:pPr>
-              <a:lnSpc>
-                <a:spcPct val="100000"/>
-              </a:lnSpc>
-            </a:pPr>
-            <a:r>
-              <a:rPr lang="en-US" sz="5400" b="1" dirty="0">
-                <a:solidFill>
-                  <a:srgbClr val="E2E8F0"/>
-                </a:solidFill>
-                <a:latin typeface="Liter" pitchFamily="34" charset="0"/>
-                <a:ea typeface="Liter" pitchFamily="34" charset="-122"/>
-                <a:cs typeface="Liter" pitchFamily="34" charset="-120"/>
-              </a:rPr>
-              <a:t>Techniques</a:t>
-            </a:r>
-            <a:endParaRPr lang="en-US" sz="1600" dirty="0"/>
-          </a:p>
-        </p:txBody>
-      </p:sp>
-      <p:sp>
-        <p:nvSpPr>
-          <p:cNvPr id="9" name="Shape 6"/>
-          <p:cNvSpPr/>
-          <p:nvPr/>
-        </p:nvSpPr>
-        <p:spPr>
-          <a:xfrm>
-            <a:off x="381000" y="3709988"/>
-            <a:ext cx="1219200" cy="38100"/>
-          </a:xfrm>
-          <a:prstGeom prst="roundRect">
-            <a:avLst>
-              <a:gd name="adj" fmla="val 0"/>
-            </a:avLst>
-          </a:prstGeom>
-          <a:solidFill>
-            <a:srgbClr val="D4A26A"/>
-          </a:solidFill>
-          <a:ln/>
-        </p:spPr>
-      </p:sp>
-      <p:sp>
-        <p:nvSpPr>
-          <p:cNvPr id="10" name="Text 7"/>
-          <p:cNvSpPr/>
-          <p:nvPr/>
-        </p:nvSpPr>
-        <p:spPr>
-          <a:xfrm>
-            <a:off x="381000" y="3976687"/>
-            <a:ext cx="7458075" cy="342900"/>
-          </a:xfrm>
-          <a:prstGeom prst="rect">
-            <a:avLst/>
-          </a:prstGeom>
-          <a:noFill/>
-          <a:ln/>
-        </p:spPr>
-        <p:txBody>
-          <a:bodyPr wrap="square" lIns="0" tIns="0" rIns="0" bIns="0" rtlCol="0" anchor="ctr"/>
-          <a:lstStyle/>
-          <a:p>
-            <a:pPr>
-              <a:lnSpc>
-                <a:spcPct val="100000"/>
-              </a:lnSpc>
-            </a:pPr>
-            <a:r>
-              <a:rPr lang="en-US" sz="2250" dirty="0">
+              <a:rPr lang="en-US" sz="5400" dirty="0">
                 <a:solidFill>
                   <a:srgbClr val="6B7A8F"/>
                 </a:solidFill>
@@ -2298,9 +1959,31 @@
               </a:rPr>
               <a:t>Metadata-Driven Intelligent News Article Retrieval System</a:t>
             </a:r>
-            <a:endParaRPr lang="en-US" sz="1600" dirty="0"/>
+            <a:endParaRPr lang="en-US" sz="4000" dirty="0"/>
           </a:p>
         </p:txBody>
+      </p:sp>
+      <p:sp>
+        <p:nvSpPr>
+          <p:cNvPr id="9" name="Shape 6"/>
+          <p:cNvSpPr/>
+          <p:nvPr/>
+        </p:nvSpPr>
+        <p:spPr>
+          <a:xfrm>
+            <a:off x="381000" y="3926681"/>
+            <a:ext cx="1219200" cy="38100"/>
+          </a:xfrm>
+          <a:prstGeom prst="roundRect">
+            <a:avLst>
+              <a:gd name="adj" fmla="val 0"/>
+            </a:avLst>
+          </a:prstGeom>
+          <a:solidFill>
+            <a:srgbClr val="D4A26A"/>
+          </a:solidFill>
+          <a:ln/>
+        </p:spPr>
       </p:sp>
       <p:sp>
         <p:nvSpPr>
@@ -2907,1862 +2590,11 @@
   </p:clrMapOvr>
   <p:transition>
     <p:fade/>
-    <p:spd val="med"/>
   </p:transition>
 </p:sld>
 </file>
 
 <file path=ppt/slides/slide10.xml><?xml version="1.0" encoding="utf-8"?>
-<p:sld xmlns:a="http://schemas.openxmlformats.org/drawingml/2006/main" xmlns:r="http://schemas.openxmlformats.org/officeDocument/2006/relationships" xmlns:p="http://schemas.openxmlformats.org/presentationml/2006/main">
-  <p:cSld name="Slide 10">
-    <p:bg>
-      <p:bgPr>
-        <a:solidFill>
-          <a:srgbClr val="1A1D21"/>
-        </a:solidFill>
-      </p:bgPr>
-    </p:bg>
-    <p:spTree>
-      <p:nvGrpSpPr>
-        <p:cNvPr id="1" name=""/>
-        <p:cNvGrpSpPr/>
-        <p:nvPr/>
-      </p:nvGrpSpPr>
-      <p:grpSpPr>
-        <a:xfrm>
-          <a:off x="0" y="0"/>
-          <a:ext cx="0" cy="0"/>
-          <a:chOff x="0" y="0"/>
-          <a:chExt cx="0" cy="0"/>
-        </a:xfrm>
-      </p:grpSpPr>
-      <p:sp>
-        <p:nvSpPr>
-          <p:cNvPr id="2" name="Text 0"/>
-          <p:cNvSpPr/>
-          <p:nvPr/>
-        </p:nvSpPr>
-        <p:spPr>
-          <a:xfrm>
-            <a:off x="381000" y="381000"/>
-            <a:ext cx="11506200" cy="228600"/>
-          </a:xfrm>
-          <a:prstGeom prst="rect">
-            <a:avLst/>
-          </a:prstGeom>
-          <a:noFill/>
-          <a:ln/>
-        </p:spPr>
-        <p:txBody>
-          <a:bodyPr wrap="square" lIns="0" tIns="0" rIns="0" bIns="0" rtlCol="0" anchor="ctr"/>
-          <a:lstStyle/>
-          <a:p>
-            <a:pPr>
-              <a:lnSpc>
-                <a:spcPct val="130000"/>
-              </a:lnSpc>
-            </a:pPr>
-            <a:r>
-              <a:rPr lang="en-US" sz="1200" b="1" spc="60" kern="0" dirty="0">
-                <a:solidFill>
-                  <a:srgbClr val="D4A26A"/>
-                </a:solidFill>
-                <a:latin typeface="Liter" pitchFamily="34" charset="0"/>
-                <a:ea typeface="Liter" pitchFamily="34" charset="-122"/>
-                <a:cs typeface="Liter" pitchFamily="34" charset="-120"/>
-              </a:rPr>
-              <a:t>CHALLENGES &amp; RESOLUTIONS</a:t>
-            </a:r>
-            <a:endParaRPr lang="en-US" sz="1600" dirty="0"/>
-          </a:p>
-        </p:txBody>
-      </p:sp>
-      <p:sp>
-        <p:nvSpPr>
-          <p:cNvPr id="3" name="Text 1"/>
-          <p:cNvSpPr/>
-          <p:nvPr/>
-        </p:nvSpPr>
-        <p:spPr>
-          <a:xfrm>
-            <a:off x="381000" y="685800"/>
-            <a:ext cx="11601450" cy="381000"/>
-          </a:xfrm>
-          <a:prstGeom prst="rect">
-            <a:avLst/>
-          </a:prstGeom>
-          <a:noFill/>
-          <a:ln/>
-        </p:spPr>
-        <p:txBody>
-          <a:bodyPr wrap="square" lIns="0" tIns="0" rIns="0" bIns="0" rtlCol="0" anchor="ctr"/>
-          <a:lstStyle/>
-          <a:p>
-            <a:pPr>
-              <a:lnSpc>
-                <a:spcPct val="90000"/>
-              </a:lnSpc>
-            </a:pPr>
-            <a:r>
-              <a:rPr lang="en-US" sz="2700" b="1" dirty="0">
-                <a:solidFill>
-                  <a:srgbClr val="E2E8F0"/>
-                </a:solidFill>
-                <a:latin typeface="Liter" pitchFamily="34" charset="0"/>
-                <a:ea typeface="Liter" pitchFamily="34" charset="-122"/>
-                <a:cs typeface="Liter" pitchFamily="34" charset="-120"/>
-              </a:rPr>
-              <a:t>Three Critical Challenges</a:t>
-            </a:r>
-            <a:endParaRPr lang="en-US" sz="1600" dirty="0"/>
-          </a:p>
-        </p:txBody>
-      </p:sp>
-      <p:sp>
-        <p:nvSpPr>
-          <p:cNvPr id="4" name="Shape 2"/>
-          <p:cNvSpPr/>
-          <p:nvPr/>
-        </p:nvSpPr>
-        <p:spPr>
-          <a:xfrm>
-            <a:off x="381000" y="1181100"/>
-            <a:ext cx="914400" cy="38100"/>
-          </a:xfrm>
-          <a:prstGeom prst="roundRect">
-            <a:avLst>
-              <a:gd name="adj" fmla="val 0"/>
-            </a:avLst>
-          </a:prstGeom>
-          <a:solidFill>
-            <a:srgbClr val="D4A26A"/>
-          </a:solidFill>
-          <a:ln/>
-        </p:spPr>
-      </p:sp>
-      <p:sp>
-        <p:nvSpPr>
-          <p:cNvPr id="5" name="Shape 3"/>
-          <p:cNvSpPr/>
-          <p:nvPr/>
-        </p:nvSpPr>
-        <p:spPr>
-          <a:xfrm>
-            <a:off x="400050" y="1371600"/>
-            <a:ext cx="11410950" cy="1628775"/>
-          </a:xfrm>
-          <a:custGeom>
-            <a:avLst/>
-            <a:gdLst/>
-            <a:ahLst/>
-            <a:cxnLst/>
-            <a:rect l="l" t="t" r="r" b="b"/>
-            <a:pathLst>
-              <a:path w="11410950" h="1628775">
-                <a:moveTo>
-                  <a:pt x="0" y="0"/>
-                </a:moveTo>
-                <a:lnTo>
-                  <a:pt x="11334750" y="0"/>
-                </a:lnTo>
-                <a:cubicBezTo>
-                  <a:pt x="11376806" y="0"/>
-                  <a:pt x="11410950" y="34144"/>
-                  <a:pt x="11410950" y="76200"/>
-                </a:cubicBezTo>
-                <a:lnTo>
-                  <a:pt x="11410950" y="1552575"/>
-                </a:lnTo>
-                <a:cubicBezTo>
-                  <a:pt x="11410950" y="1594631"/>
-                  <a:pt x="11376806" y="1628775"/>
-                  <a:pt x="11334750" y="1628775"/>
-                </a:cubicBezTo>
-                <a:lnTo>
-                  <a:pt x="0" y="1628775"/>
-                </a:lnTo>
-                <a:lnTo>
-                  <a:pt x="0" y="0"/>
-                </a:lnTo>
-                <a:close/>
-              </a:path>
-            </a:pathLst>
-          </a:custGeom>
-          <a:solidFill>
-            <a:srgbClr val="4A5568">
-              <a:alpha val="14902"/>
-            </a:srgbClr>
-          </a:solidFill>
-          <a:ln/>
-        </p:spPr>
-      </p:sp>
-      <p:sp>
-        <p:nvSpPr>
-          <p:cNvPr id="6" name="Shape 4"/>
-          <p:cNvSpPr/>
-          <p:nvPr/>
-        </p:nvSpPr>
-        <p:spPr>
-          <a:xfrm>
-            <a:off x="400050" y="1371600"/>
-            <a:ext cx="38100" cy="1628775"/>
-          </a:xfrm>
-          <a:prstGeom prst="roundRect">
-            <a:avLst>
-              <a:gd name="adj" fmla="val 0"/>
-            </a:avLst>
-          </a:prstGeom>
-          <a:solidFill>
-            <a:srgbClr val="D4A26A"/>
-          </a:solidFill>
-          <a:ln/>
-        </p:spPr>
-      </p:sp>
-      <p:sp>
-        <p:nvSpPr>
-          <p:cNvPr id="7" name="Shape 5"/>
-          <p:cNvSpPr/>
-          <p:nvPr/>
-        </p:nvSpPr>
-        <p:spPr>
-          <a:xfrm>
-            <a:off x="571500" y="1555672"/>
-            <a:ext cx="457200" cy="457200"/>
-          </a:xfrm>
-          <a:prstGeom prst="roundRect">
-            <a:avLst>
-              <a:gd name="adj" fmla="val 16667"/>
-            </a:avLst>
-          </a:prstGeom>
-          <a:solidFill>
-            <a:srgbClr val="D4A26A">
-              <a:alpha val="20000"/>
-            </a:srgbClr>
-          </a:solidFill>
-          <a:ln/>
-        </p:spPr>
-      </p:sp>
-      <p:sp>
-        <p:nvSpPr>
-          <p:cNvPr id="8" name="Text 6"/>
-          <p:cNvSpPr/>
-          <p:nvPr/>
-        </p:nvSpPr>
-        <p:spPr>
-          <a:xfrm>
-            <a:off x="681395" y="1631872"/>
-            <a:ext cx="352425" cy="304800"/>
-          </a:xfrm>
-          <a:prstGeom prst="rect">
-            <a:avLst/>
-          </a:prstGeom>
-          <a:noFill/>
-          <a:ln/>
-        </p:spPr>
-        <p:txBody>
-          <a:bodyPr wrap="square" lIns="0" tIns="0" rIns="0" bIns="0" rtlCol="0" anchor="ctr"/>
-          <a:lstStyle/>
-          <a:p>
-            <a:pPr>
-              <a:lnSpc>
-                <a:spcPct val="110000"/>
-              </a:lnSpc>
-            </a:pPr>
-            <a:r>
-              <a:rPr lang="en-US" sz="1800" b="1" dirty="0">
-                <a:solidFill>
-                  <a:srgbClr val="D4A26A"/>
-                </a:solidFill>
-                <a:latin typeface="Liter" pitchFamily="34" charset="0"/>
-                <a:ea typeface="Liter" pitchFamily="34" charset="-122"/>
-                <a:cs typeface="Liter" pitchFamily="34" charset="-120"/>
-              </a:rPr>
-              <a:t>01</a:t>
-            </a:r>
-            <a:endParaRPr lang="en-US" sz="1600" dirty="0"/>
-          </a:p>
-        </p:txBody>
-      </p:sp>
-      <p:sp>
-        <p:nvSpPr>
-          <p:cNvPr id="9" name="Text 7"/>
-          <p:cNvSpPr/>
-          <p:nvPr/>
-        </p:nvSpPr>
-        <p:spPr>
-          <a:xfrm>
-            <a:off x="1181100" y="1555672"/>
-            <a:ext cx="10572750" cy="266700"/>
-          </a:xfrm>
-          <a:prstGeom prst="rect">
-            <a:avLst/>
-          </a:prstGeom>
-          <a:noFill/>
-          <a:ln/>
-        </p:spPr>
-        <p:txBody>
-          <a:bodyPr wrap="square" lIns="0" tIns="0" rIns="0" bIns="0" rtlCol="0" anchor="ctr"/>
-          <a:lstStyle/>
-          <a:p>
-            <a:pPr>
-              <a:lnSpc>
-                <a:spcPct val="120000"/>
-              </a:lnSpc>
-            </a:pPr>
-            <a:r>
-              <a:rPr lang="en-US" sz="1500" b="1" dirty="0">
-                <a:solidFill>
-                  <a:srgbClr val="E2E8F0"/>
-                </a:solidFill>
-                <a:latin typeface="Liter" pitchFamily="34" charset="0"/>
-                <a:ea typeface="Liter" pitchFamily="34" charset="-122"/>
-                <a:cs typeface="Liter" pitchFamily="34" charset="-120"/>
-              </a:rPr>
-              <a:t>Severe RAM Saturation on FAISS Index Generation</a:t>
-            </a:r>
-            <a:endParaRPr lang="en-US" sz="1600" dirty="0"/>
-          </a:p>
-        </p:txBody>
-      </p:sp>
-      <p:sp>
-        <p:nvSpPr>
-          <p:cNvPr id="10" name="Shape 8"/>
-          <p:cNvSpPr/>
-          <p:nvPr/>
-        </p:nvSpPr>
-        <p:spPr>
-          <a:xfrm>
-            <a:off x="1200150" y="1927147"/>
-            <a:ext cx="133350" cy="133350"/>
-          </a:xfrm>
-          <a:custGeom>
-            <a:avLst/>
-            <a:gdLst/>
-            <a:ahLst/>
-            <a:cxnLst/>
-            <a:rect l="l" t="t" r="r" b="b"/>
-            <a:pathLst>
-              <a:path w="133350" h="133350">
-                <a:moveTo>
-                  <a:pt x="66675" y="133350"/>
-                </a:moveTo>
-                <a:cubicBezTo>
-                  <a:pt x="103474" y="133350"/>
-                  <a:pt x="133350" y="103474"/>
-                  <a:pt x="133350" y="66675"/>
-                </a:cubicBezTo>
-                <a:cubicBezTo>
-                  <a:pt x="133350" y="29876"/>
-                  <a:pt x="103474" y="0"/>
-                  <a:pt x="66675" y="0"/>
-                </a:cubicBezTo>
-                <a:cubicBezTo>
-                  <a:pt x="29876" y="0"/>
-                  <a:pt x="0" y="29876"/>
-                  <a:pt x="0" y="66675"/>
-                </a:cubicBezTo>
-                <a:cubicBezTo>
-                  <a:pt x="0" y="103474"/>
-                  <a:pt x="29876" y="133350"/>
-                  <a:pt x="66675" y="133350"/>
-                </a:cubicBezTo>
-                <a:close/>
-                <a:moveTo>
-                  <a:pt x="43495" y="43495"/>
-                </a:moveTo>
-                <a:cubicBezTo>
-                  <a:pt x="45943" y="41047"/>
-                  <a:pt x="49902" y="41047"/>
-                  <a:pt x="52324" y="43495"/>
-                </a:cubicBezTo>
-                <a:lnTo>
-                  <a:pt x="66649" y="57820"/>
-                </a:lnTo>
-                <a:lnTo>
-                  <a:pt x="80974" y="43495"/>
-                </a:lnTo>
-                <a:cubicBezTo>
-                  <a:pt x="83422" y="41047"/>
-                  <a:pt x="87381" y="41047"/>
-                  <a:pt x="89803" y="43495"/>
-                </a:cubicBezTo>
-                <a:cubicBezTo>
-                  <a:pt x="92225" y="45943"/>
-                  <a:pt x="92251" y="49902"/>
-                  <a:pt x="89803" y="52324"/>
-                </a:cubicBezTo>
-                <a:lnTo>
-                  <a:pt x="75478" y="66649"/>
-                </a:lnTo>
-                <a:lnTo>
-                  <a:pt x="89803" y="80974"/>
-                </a:lnTo>
-                <a:cubicBezTo>
-                  <a:pt x="92251" y="83422"/>
-                  <a:pt x="92251" y="87381"/>
-                  <a:pt x="89803" y="89803"/>
-                </a:cubicBezTo>
-                <a:cubicBezTo>
-                  <a:pt x="87355" y="92225"/>
-                  <a:pt x="83396" y="92251"/>
-                  <a:pt x="80974" y="89803"/>
-                </a:cubicBezTo>
-                <a:lnTo>
-                  <a:pt x="66649" y="75478"/>
-                </a:lnTo>
-                <a:lnTo>
-                  <a:pt x="52324" y="89803"/>
-                </a:lnTo>
-                <a:cubicBezTo>
-                  <a:pt x="49876" y="92251"/>
-                  <a:pt x="45917" y="92251"/>
-                  <a:pt x="43495" y="89803"/>
-                </a:cubicBezTo>
-                <a:cubicBezTo>
-                  <a:pt x="41073" y="87355"/>
-                  <a:pt x="41047" y="83396"/>
-                  <a:pt x="43495" y="80974"/>
-                </a:cubicBezTo>
-                <a:lnTo>
-                  <a:pt x="57820" y="66649"/>
-                </a:lnTo>
-                <a:lnTo>
-                  <a:pt x="43495" y="52324"/>
-                </a:lnTo>
-                <a:cubicBezTo>
-                  <a:pt x="41047" y="49876"/>
-                  <a:pt x="41047" y="45917"/>
-                  <a:pt x="43495" y="43495"/>
-                </a:cubicBezTo>
-                <a:close/>
-              </a:path>
-            </a:pathLst>
-          </a:custGeom>
-          <a:solidFill>
-            <a:srgbClr val="FF6467"/>
-          </a:solidFill>
-          <a:ln/>
-        </p:spPr>
-      </p:sp>
-      <p:sp>
-        <p:nvSpPr>
-          <p:cNvPr id="11" name="Text 9"/>
-          <p:cNvSpPr/>
-          <p:nvPr/>
-        </p:nvSpPr>
-        <p:spPr>
-          <a:xfrm>
-            <a:off x="1352550" y="1898572"/>
-            <a:ext cx="5057775" cy="190500"/>
-          </a:xfrm>
-          <a:prstGeom prst="rect">
-            <a:avLst/>
-          </a:prstGeom>
-          <a:noFill/>
-          <a:ln/>
-        </p:spPr>
-        <p:txBody>
-          <a:bodyPr wrap="square" lIns="0" tIns="0" rIns="0" bIns="0" rtlCol="0" anchor="ctr"/>
-          <a:lstStyle/>
-          <a:p>
-            <a:pPr>
-              <a:lnSpc>
-                <a:spcPct val="120000"/>
-              </a:lnSpc>
-            </a:pPr>
-            <a:r>
-              <a:rPr lang="en-US" sz="1050" b="1" dirty="0">
-                <a:solidFill>
-                  <a:srgbClr val="FF6467"/>
-                </a:solidFill>
-                <a:latin typeface="Liter" pitchFamily="34" charset="0"/>
-                <a:ea typeface="Liter" pitchFamily="34" charset="-122"/>
-                <a:cs typeface="Liter" pitchFamily="34" charset="-120"/>
-              </a:rPr>
-              <a:t>The Problem</a:t>
-            </a:r>
-            <a:endParaRPr lang="en-US" sz="1600" dirty="0"/>
-          </a:p>
-        </p:txBody>
-      </p:sp>
-      <p:sp>
-        <p:nvSpPr>
-          <p:cNvPr id="12" name="Text 10"/>
-          <p:cNvSpPr/>
-          <p:nvPr/>
-        </p:nvSpPr>
-        <p:spPr>
-          <a:xfrm>
-            <a:off x="1181100" y="2127172"/>
-            <a:ext cx="5238750" cy="457200"/>
-          </a:xfrm>
-          <a:prstGeom prst="rect">
-            <a:avLst/>
-          </a:prstGeom>
-          <a:noFill/>
-          <a:ln/>
-        </p:spPr>
-        <p:txBody>
-          <a:bodyPr wrap="square" lIns="0" tIns="0" rIns="0" bIns="0" rtlCol="0" anchor="ctr"/>
-          <a:lstStyle/>
-          <a:p>
-            <a:pPr>
-              <a:lnSpc>
-                <a:spcPct val="130000"/>
-              </a:lnSpc>
-            </a:pPr>
-            <a:r>
-              <a:rPr lang="en-US" sz="1200" dirty="0">
-                <a:solidFill>
-                  <a:srgbClr val="E2E8F0">
-                    <a:alpha val="80000"/>
-                  </a:srgbClr>
-                </a:solidFill>
-                <a:latin typeface="Quattrocento Sans" pitchFamily="34" charset="0"/>
-                <a:ea typeface="Quattrocento Sans" pitchFamily="34" charset="-122"/>
-                <a:cs typeface="Quattrocento Sans" pitchFamily="34" charset="-120"/>
-              </a:rPr>
-              <a:t>sentence-transformers embeddings over 120,000 articles instantly saturated System RAM, causing complete Flask server crashes during bulk ingestion</a:t>
-            </a:r>
-            <a:endParaRPr lang="en-US" sz="1600" dirty="0"/>
-          </a:p>
-        </p:txBody>
-      </p:sp>
-      <p:sp>
-        <p:nvSpPr>
-          <p:cNvPr id="13" name="Shape 11"/>
-          <p:cNvSpPr/>
-          <p:nvPr/>
-        </p:nvSpPr>
-        <p:spPr>
-          <a:xfrm>
-            <a:off x="6515100" y="1927147"/>
-            <a:ext cx="133350" cy="133350"/>
-          </a:xfrm>
-          <a:custGeom>
-            <a:avLst/>
-            <a:gdLst/>
-            <a:ahLst/>
-            <a:cxnLst/>
-            <a:rect l="l" t="t" r="r" b="b"/>
-            <a:pathLst>
-              <a:path w="133350" h="133350">
-                <a:moveTo>
-                  <a:pt x="66675" y="133350"/>
-                </a:moveTo>
-                <a:cubicBezTo>
-                  <a:pt x="103474" y="133350"/>
-                  <a:pt x="133350" y="103474"/>
-                  <a:pt x="133350" y="66675"/>
-                </a:cubicBezTo>
-                <a:cubicBezTo>
-                  <a:pt x="133350" y="29876"/>
-                  <a:pt x="103474" y="0"/>
-                  <a:pt x="66675" y="0"/>
-                </a:cubicBezTo>
-                <a:cubicBezTo>
-                  <a:pt x="29876" y="0"/>
-                  <a:pt x="0" y="29876"/>
-                  <a:pt x="0" y="66675"/>
-                </a:cubicBezTo>
-                <a:cubicBezTo>
-                  <a:pt x="0" y="103474"/>
-                  <a:pt x="29876" y="133350"/>
-                  <a:pt x="66675" y="133350"/>
-                </a:cubicBezTo>
-                <a:close/>
-                <a:moveTo>
-                  <a:pt x="88657" y="55398"/>
-                </a:moveTo>
-                <a:lnTo>
-                  <a:pt x="67821" y="88735"/>
-                </a:lnTo>
-                <a:cubicBezTo>
-                  <a:pt x="66727" y="90480"/>
-                  <a:pt x="64852" y="91574"/>
-                  <a:pt x="62794" y="91678"/>
-                </a:cubicBezTo>
-                <a:cubicBezTo>
-                  <a:pt x="60737" y="91782"/>
-                  <a:pt x="58757" y="90845"/>
-                  <a:pt x="57533" y="89178"/>
-                </a:cubicBezTo>
-                <a:lnTo>
-                  <a:pt x="45032" y="72509"/>
-                </a:lnTo>
-                <a:cubicBezTo>
-                  <a:pt x="42948" y="69748"/>
-                  <a:pt x="43521" y="65842"/>
-                  <a:pt x="46282" y="63758"/>
-                </a:cubicBezTo>
-                <a:cubicBezTo>
-                  <a:pt x="49043" y="61674"/>
-                  <a:pt x="52949" y="62247"/>
-                  <a:pt x="55033" y="65008"/>
-                </a:cubicBezTo>
-                <a:lnTo>
-                  <a:pt x="62065" y="74384"/>
-                </a:lnTo>
-                <a:lnTo>
-                  <a:pt x="78057" y="48782"/>
-                </a:lnTo>
-                <a:cubicBezTo>
-                  <a:pt x="79880" y="45865"/>
-                  <a:pt x="83734" y="44954"/>
-                  <a:pt x="86678" y="46803"/>
-                </a:cubicBezTo>
-                <a:cubicBezTo>
-                  <a:pt x="89621" y="48652"/>
-                  <a:pt x="90506" y="52481"/>
-                  <a:pt x="88657" y="55424"/>
-                </a:cubicBezTo>
-                <a:close/>
-              </a:path>
-            </a:pathLst>
-          </a:custGeom>
-          <a:solidFill>
-            <a:srgbClr val="05DF72"/>
-          </a:solidFill>
-          <a:ln/>
-        </p:spPr>
-      </p:sp>
-      <p:sp>
-        <p:nvSpPr>
-          <p:cNvPr id="14" name="Text 12"/>
-          <p:cNvSpPr/>
-          <p:nvPr/>
-        </p:nvSpPr>
-        <p:spPr>
-          <a:xfrm>
-            <a:off x="6667500" y="1898572"/>
-            <a:ext cx="5057775" cy="190500"/>
-          </a:xfrm>
-          <a:prstGeom prst="rect">
-            <a:avLst/>
-          </a:prstGeom>
-          <a:noFill/>
-          <a:ln/>
-        </p:spPr>
-        <p:txBody>
-          <a:bodyPr wrap="square" lIns="0" tIns="0" rIns="0" bIns="0" rtlCol="0" anchor="ctr"/>
-          <a:lstStyle/>
-          <a:p>
-            <a:pPr>
-              <a:lnSpc>
-                <a:spcPct val="120000"/>
-              </a:lnSpc>
-            </a:pPr>
-            <a:r>
-              <a:rPr lang="en-US" sz="1050" b="1" dirty="0">
-                <a:solidFill>
-                  <a:srgbClr val="05DF72"/>
-                </a:solidFill>
-                <a:latin typeface="Liter" pitchFamily="34" charset="0"/>
-                <a:ea typeface="Liter" pitchFamily="34" charset="-122"/>
-                <a:cs typeface="Liter" pitchFamily="34" charset="-120"/>
-              </a:rPr>
-              <a:t>The Resolution</a:t>
-            </a:r>
-            <a:endParaRPr lang="en-US" sz="1600" dirty="0"/>
-          </a:p>
-        </p:txBody>
-      </p:sp>
-      <p:sp>
-        <p:nvSpPr>
-          <p:cNvPr id="15" name="Text 13"/>
-          <p:cNvSpPr/>
-          <p:nvPr/>
-        </p:nvSpPr>
-        <p:spPr>
-          <a:xfrm>
-            <a:off x="6496050" y="2127172"/>
-            <a:ext cx="5238750" cy="685800"/>
-          </a:xfrm>
-          <a:prstGeom prst="rect">
-            <a:avLst/>
-          </a:prstGeom>
-          <a:noFill/>
-          <a:ln/>
-        </p:spPr>
-        <p:txBody>
-          <a:bodyPr wrap="square" lIns="0" tIns="0" rIns="0" bIns="0" rtlCol="0" anchor="ctr"/>
-          <a:lstStyle/>
-          <a:p>
-            <a:pPr>
-              <a:lnSpc>
-                <a:spcPct val="130000"/>
-              </a:lnSpc>
-            </a:pPr>
-            <a:r>
-              <a:rPr lang="en-US" sz="1200" dirty="0">
-                <a:solidFill>
-                  <a:srgbClr val="E2E8F0">
-                    <a:alpha val="80000"/>
-                  </a:srgbClr>
-                </a:solidFill>
-                <a:latin typeface="Quattrocento Sans" pitchFamily="34" charset="0"/>
-                <a:ea typeface="Quattrocento Sans" pitchFamily="34" charset="-122"/>
-                <a:cs typeface="Quattrocento Sans" pitchFamily="34" charset="-120"/>
-              </a:rPr>
-              <a:t>Decoupled index regeneration into offline background script (rebuild_index.py) that builds .faiss and .pkl binaries offline; main API loads into static read-only memory</a:t>
-            </a:r>
-            <a:endParaRPr lang="en-US" sz="1600" dirty="0"/>
-          </a:p>
-        </p:txBody>
-      </p:sp>
-      <p:sp>
-        <p:nvSpPr>
-          <p:cNvPr id="16" name="Shape 14"/>
-          <p:cNvSpPr/>
-          <p:nvPr/>
-        </p:nvSpPr>
-        <p:spPr>
-          <a:xfrm>
-            <a:off x="400050" y="3111461"/>
-            <a:ext cx="11410950" cy="1628775"/>
-          </a:xfrm>
-          <a:custGeom>
-            <a:avLst/>
-            <a:gdLst/>
-            <a:ahLst/>
-            <a:cxnLst/>
-            <a:rect l="l" t="t" r="r" b="b"/>
-            <a:pathLst>
-              <a:path w="11410950" h="1628775">
-                <a:moveTo>
-                  <a:pt x="0" y="0"/>
-                </a:moveTo>
-                <a:lnTo>
-                  <a:pt x="11334750" y="0"/>
-                </a:lnTo>
-                <a:cubicBezTo>
-                  <a:pt x="11376806" y="0"/>
-                  <a:pt x="11410950" y="34144"/>
-                  <a:pt x="11410950" y="76200"/>
-                </a:cubicBezTo>
-                <a:lnTo>
-                  <a:pt x="11410950" y="1552575"/>
-                </a:lnTo>
-                <a:cubicBezTo>
-                  <a:pt x="11410950" y="1594631"/>
-                  <a:pt x="11376806" y="1628775"/>
-                  <a:pt x="11334750" y="1628775"/>
-                </a:cubicBezTo>
-                <a:lnTo>
-                  <a:pt x="0" y="1628775"/>
-                </a:lnTo>
-                <a:lnTo>
-                  <a:pt x="0" y="0"/>
-                </a:lnTo>
-                <a:close/>
-              </a:path>
-            </a:pathLst>
-          </a:custGeom>
-          <a:solidFill>
-            <a:srgbClr val="4A5568">
-              <a:alpha val="14902"/>
-            </a:srgbClr>
-          </a:solidFill>
-          <a:ln/>
-        </p:spPr>
-      </p:sp>
-      <p:sp>
-        <p:nvSpPr>
-          <p:cNvPr id="17" name="Shape 15"/>
-          <p:cNvSpPr/>
-          <p:nvPr/>
-        </p:nvSpPr>
-        <p:spPr>
-          <a:xfrm>
-            <a:off x="400050" y="3111461"/>
-            <a:ext cx="38100" cy="1628775"/>
-          </a:xfrm>
-          <a:prstGeom prst="roundRect">
-            <a:avLst>
-              <a:gd name="adj" fmla="val 0"/>
-            </a:avLst>
-          </a:prstGeom>
-          <a:solidFill>
-            <a:srgbClr val="6B7A8F"/>
-          </a:solidFill>
-          <a:ln/>
-        </p:spPr>
-      </p:sp>
-      <p:sp>
-        <p:nvSpPr>
-          <p:cNvPr id="18" name="Shape 16"/>
-          <p:cNvSpPr/>
-          <p:nvPr/>
-        </p:nvSpPr>
-        <p:spPr>
-          <a:xfrm>
-            <a:off x="571500" y="3409950"/>
-            <a:ext cx="457200" cy="457200"/>
-          </a:xfrm>
-          <a:prstGeom prst="roundRect">
-            <a:avLst>
-              <a:gd name="adj" fmla="val 16667"/>
-            </a:avLst>
-          </a:prstGeom>
-          <a:solidFill>
-            <a:srgbClr val="6B7A8F">
-              <a:alpha val="20000"/>
-            </a:srgbClr>
-          </a:solidFill>
-          <a:ln/>
-        </p:spPr>
-      </p:sp>
-      <p:sp>
-        <p:nvSpPr>
-          <p:cNvPr id="19" name="Text 17"/>
-          <p:cNvSpPr/>
-          <p:nvPr/>
-        </p:nvSpPr>
-        <p:spPr>
-          <a:xfrm>
-            <a:off x="660678" y="3486150"/>
-            <a:ext cx="390525" cy="304800"/>
-          </a:xfrm>
-          <a:prstGeom prst="rect">
-            <a:avLst/>
-          </a:prstGeom>
-          <a:noFill/>
-          <a:ln/>
-        </p:spPr>
-        <p:txBody>
-          <a:bodyPr wrap="square" lIns="0" tIns="0" rIns="0" bIns="0" rtlCol="0" anchor="ctr"/>
-          <a:lstStyle/>
-          <a:p>
-            <a:pPr>
-              <a:lnSpc>
-                <a:spcPct val="110000"/>
-              </a:lnSpc>
-            </a:pPr>
-            <a:r>
-              <a:rPr lang="en-US" sz="1800" b="1" dirty="0">
-                <a:solidFill>
-                  <a:srgbClr val="6B7A8F"/>
-                </a:solidFill>
-                <a:latin typeface="Liter" pitchFamily="34" charset="0"/>
-                <a:ea typeface="Liter" pitchFamily="34" charset="-122"/>
-                <a:cs typeface="Liter" pitchFamily="34" charset="-120"/>
-              </a:rPr>
-              <a:t>02</a:t>
-            </a:r>
-            <a:endParaRPr lang="en-US" sz="1600" dirty="0"/>
-          </a:p>
-        </p:txBody>
-      </p:sp>
-      <p:sp>
-        <p:nvSpPr>
-          <p:cNvPr id="20" name="Text 18"/>
-          <p:cNvSpPr/>
-          <p:nvPr/>
-        </p:nvSpPr>
-        <p:spPr>
-          <a:xfrm>
-            <a:off x="1181100" y="3409950"/>
-            <a:ext cx="10572750" cy="266700"/>
-          </a:xfrm>
-          <a:prstGeom prst="rect">
-            <a:avLst/>
-          </a:prstGeom>
-          <a:noFill/>
-          <a:ln/>
-        </p:spPr>
-        <p:txBody>
-          <a:bodyPr wrap="square" lIns="0" tIns="0" rIns="0" bIns="0" rtlCol="0" anchor="ctr"/>
-          <a:lstStyle/>
-          <a:p>
-            <a:pPr>
-              <a:lnSpc>
-                <a:spcPct val="120000"/>
-              </a:lnSpc>
-            </a:pPr>
-            <a:r>
-              <a:rPr lang="en-US" sz="1500" b="1" dirty="0">
-                <a:solidFill>
-                  <a:srgbClr val="E2E8F0"/>
-                </a:solidFill>
-                <a:latin typeface="Liter" pitchFamily="34" charset="0"/>
-                <a:ea typeface="Liter" pitchFamily="34" charset="-122"/>
-                <a:cs typeface="Liter" pitchFamily="34" charset="-120"/>
-              </a:rPr>
-              <a:t>Poor Ranking of Ambiguous Concepts</a:t>
-            </a:r>
-            <a:endParaRPr lang="en-US" sz="1600" dirty="0"/>
-          </a:p>
-        </p:txBody>
-      </p:sp>
-      <p:sp>
-        <p:nvSpPr>
-          <p:cNvPr id="21" name="Shape 19"/>
-          <p:cNvSpPr/>
-          <p:nvPr/>
-        </p:nvSpPr>
-        <p:spPr>
-          <a:xfrm>
-            <a:off x="1200150" y="3781425"/>
-            <a:ext cx="133350" cy="133350"/>
-          </a:xfrm>
-          <a:custGeom>
-            <a:avLst/>
-            <a:gdLst/>
-            <a:ahLst/>
-            <a:cxnLst/>
-            <a:rect l="l" t="t" r="r" b="b"/>
-            <a:pathLst>
-              <a:path w="133350" h="133350">
-                <a:moveTo>
-                  <a:pt x="66675" y="133350"/>
-                </a:moveTo>
-                <a:cubicBezTo>
-                  <a:pt x="103474" y="133350"/>
-                  <a:pt x="133350" y="103474"/>
-                  <a:pt x="133350" y="66675"/>
-                </a:cubicBezTo>
-                <a:cubicBezTo>
-                  <a:pt x="133350" y="29876"/>
-                  <a:pt x="103474" y="0"/>
-                  <a:pt x="66675" y="0"/>
-                </a:cubicBezTo>
-                <a:cubicBezTo>
-                  <a:pt x="29876" y="0"/>
-                  <a:pt x="0" y="29876"/>
-                  <a:pt x="0" y="66675"/>
-                </a:cubicBezTo>
-                <a:cubicBezTo>
-                  <a:pt x="0" y="103474"/>
-                  <a:pt x="29876" y="133350"/>
-                  <a:pt x="66675" y="133350"/>
-                </a:cubicBezTo>
-                <a:close/>
-                <a:moveTo>
-                  <a:pt x="43495" y="43495"/>
-                </a:moveTo>
-                <a:cubicBezTo>
-                  <a:pt x="45943" y="41047"/>
-                  <a:pt x="49902" y="41047"/>
-                  <a:pt x="52324" y="43495"/>
-                </a:cubicBezTo>
-                <a:lnTo>
-                  <a:pt x="66649" y="57820"/>
-                </a:lnTo>
-                <a:lnTo>
-                  <a:pt x="80974" y="43495"/>
-                </a:lnTo>
-                <a:cubicBezTo>
-                  <a:pt x="83422" y="41047"/>
-                  <a:pt x="87381" y="41047"/>
-                  <a:pt x="89803" y="43495"/>
-                </a:cubicBezTo>
-                <a:cubicBezTo>
-                  <a:pt x="92225" y="45943"/>
-                  <a:pt x="92251" y="49902"/>
-                  <a:pt x="89803" y="52324"/>
-                </a:cubicBezTo>
-                <a:lnTo>
-                  <a:pt x="75478" y="66649"/>
-                </a:lnTo>
-                <a:lnTo>
-                  <a:pt x="89803" y="80974"/>
-                </a:lnTo>
-                <a:cubicBezTo>
-                  <a:pt x="92251" y="83422"/>
-                  <a:pt x="92251" y="87381"/>
-                  <a:pt x="89803" y="89803"/>
-                </a:cubicBezTo>
-                <a:cubicBezTo>
-                  <a:pt x="87355" y="92225"/>
-                  <a:pt x="83396" y="92251"/>
-                  <a:pt x="80974" y="89803"/>
-                </a:cubicBezTo>
-                <a:lnTo>
-                  <a:pt x="66649" y="75478"/>
-                </a:lnTo>
-                <a:lnTo>
-                  <a:pt x="52324" y="89803"/>
-                </a:lnTo>
-                <a:cubicBezTo>
-                  <a:pt x="49876" y="92251"/>
-                  <a:pt x="45917" y="92251"/>
-                  <a:pt x="43495" y="89803"/>
-                </a:cubicBezTo>
-                <a:cubicBezTo>
-                  <a:pt x="41073" y="87355"/>
-                  <a:pt x="41047" y="83396"/>
-                  <a:pt x="43495" y="80974"/>
-                </a:cubicBezTo>
-                <a:lnTo>
-                  <a:pt x="57820" y="66649"/>
-                </a:lnTo>
-                <a:lnTo>
-                  <a:pt x="43495" y="52324"/>
-                </a:lnTo>
-                <a:cubicBezTo>
-                  <a:pt x="41047" y="49876"/>
-                  <a:pt x="41047" y="45917"/>
-                  <a:pt x="43495" y="43495"/>
-                </a:cubicBezTo>
-                <a:close/>
-              </a:path>
-            </a:pathLst>
-          </a:custGeom>
-          <a:solidFill>
-            <a:srgbClr val="FF6467"/>
-          </a:solidFill>
-          <a:ln/>
-        </p:spPr>
-      </p:sp>
-      <p:sp>
-        <p:nvSpPr>
-          <p:cNvPr id="22" name="Text 20"/>
-          <p:cNvSpPr/>
-          <p:nvPr/>
-        </p:nvSpPr>
-        <p:spPr>
-          <a:xfrm>
-            <a:off x="1352550" y="3752850"/>
-            <a:ext cx="5057775" cy="190500"/>
-          </a:xfrm>
-          <a:prstGeom prst="rect">
-            <a:avLst/>
-          </a:prstGeom>
-          <a:noFill/>
-          <a:ln/>
-        </p:spPr>
-        <p:txBody>
-          <a:bodyPr wrap="square" lIns="0" tIns="0" rIns="0" bIns="0" rtlCol="0" anchor="ctr"/>
-          <a:lstStyle/>
-          <a:p>
-            <a:pPr>
-              <a:lnSpc>
-                <a:spcPct val="120000"/>
-              </a:lnSpc>
-            </a:pPr>
-            <a:r>
-              <a:rPr lang="en-US" sz="1050" b="1" dirty="0">
-                <a:solidFill>
-                  <a:srgbClr val="FF6467"/>
-                </a:solidFill>
-                <a:latin typeface="Liter" pitchFamily="34" charset="0"/>
-                <a:ea typeface="Liter" pitchFamily="34" charset="-122"/>
-                <a:cs typeface="Liter" pitchFamily="34" charset="-120"/>
-              </a:rPr>
-              <a:t>The Problem</a:t>
-            </a:r>
-            <a:endParaRPr lang="en-US" sz="1600" dirty="0"/>
-          </a:p>
-        </p:txBody>
-      </p:sp>
-      <p:sp>
-        <p:nvSpPr>
-          <p:cNvPr id="23" name="Text 21"/>
-          <p:cNvSpPr/>
-          <p:nvPr/>
-        </p:nvSpPr>
-        <p:spPr>
-          <a:xfrm>
-            <a:off x="1181100" y="3981450"/>
-            <a:ext cx="5238750" cy="457200"/>
-          </a:xfrm>
-          <a:prstGeom prst="rect">
-            <a:avLst/>
-          </a:prstGeom>
-          <a:noFill/>
-          <a:ln/>
-        </p:spPr>
-        <p:txBody>
-          <a:bodyPr wrap="square" lIns="0" tIns="0" rIns="0" bIns="0" rtlCol="0" anchor="ctr"/>
-          <a:lstStyle/>
-          <a:p>
-            <a:pPr>
-              <a:lnSpc>
-                <a:spcPct val="130000"/>
-              </a:lnSpc>
-            </a:pPr>
-            <a:r>
-              <a:rPr lang="en-US" sz="1200" dirty="0">
-                <a:solidFill>
-                  <a:srgbClr val="E2E8F0">
-                    <a:alpha val="80000"/>
-                  </a:srgbClr>
-                </a:solidFill>
-                <a:latin typeface="Quattrocento Sans" pitchFamily="34" charset="0"/>
-                <a:ea typeface="Quattrocento Sans" pitchFamily="34" charset="-122"/>
-                <a:cs typeface="Quattrocento Sans" pitchFamily="34" charset="-120"/>
-              </a:rPr>
-              <a:t>Query "technology AI" returned articles mentioning "technology" 100 times before nuanced AI infrastructure discussions — pure lexical matching failed</a:t>
-            </a:r>
-            <a:endParaRPr lang="en-US" sz="1600" dirty="0"/>
-          </a:p>
-        </p:txBody>
-      </p:sp>
-      <p:sp>
-        <p:nvSpPr>
-          <p:cNvPr id="24" name="Shape 22"/>
-          <p:cNvSpPr/>
-          <p:nvPr/>
-        </p:nvSpPr>
-        <p:spPr>
-          <a:xfrm>
-            <a:off x="6515100" y="3781425"/>
-            <a:ext cx="133350" cy="133350"/>
-          </a:xfrm>
-          <a:custGeom>
-            <a:avLst/>
-            <a:gdLst/>
-            <a:ahLst/>
-            <a:cxnLst/>
-            <a:rect l="l" t="t" r="r" b="b"/>
-            <a:pathLst>
-              <a:path w="133350" h="133350">
-                <a:moveTo>
-                  <a:pt x="66675" y="133350"/>
-                </a:moveTo>
-                <a:cubicBezTo>
-                  <a:pt x="103474" y="133350"/>
-                  <a:pt x="133350" y="103474"/>
-                  <a:pt x="133350" y="66675"/>
-                </a:cubicBezTo>
-                <a:cubicBezTo>
-                  <a:pt x="133350" y="29876"/>
-                  <a:pt x="103474" y="0"/>
-                  <a:pt x="66675" y="0"/>
-                </a:cubicBezTo>
-                <a:cubicBezTo>
-                  <a:pt x="29876" y="0"/>
-                  <a:pt x="0" y="29876"/>
-                  <a:pt x="0" y="66675"/>
-                </a:cubicBezTo>
-                <a:cubicBezTo>
-                  <a:pt x="0" y="103474"/>
-                  <a:pt x="29876" y="133350"/>
-                  <a:pt x="66675" y="133350"/>
-                </a:cubicBezTo>
-                <a:close/>
-                <a:moveTo>
-                  <a:pt x="88657" y="55398"/>
-                </a:moveTo>
-                <a:lnTo>
-                  <a:pt x="67821" y="88735"/>
-                </a:lnTo>
-                <a:cubicBezTo>
-                  <a:pt x="66727" y="90480"/>
-                  <a:pt x="64852" y="91574"/>
-                  <a:pt x="62794" y="91678"/>
-                </a:cubicBezTo>
-                <a:cubicBezTo>
-                  <a:pt x="60737" y="91782"/>
-                  <a:pt x="58757" y="90845"/>
-                  <a:pt x="57533" y="89178"/>
-                </a:cubicBezTo>
-                <a:lnTo>
-                  <a:pt x="45032" y="72509"/>
-                </a:lnTo>
-                <a:cubicBezTo>
-                  <a:pt x="42948" y="69748"/>
-                  <a:pt x="43521" y="65842"/>
-                  <a:pt x="46282" y="63758"/>
-                </a:cubicBezTo>
-                <a:cubicBezTo>
-                  <a:pt x="49043" y="61674"/>
-                  <a:pt x="52949" y="62247"/>
-                  <a:pt x="55033" y="65008"/>
-                </a:cubicBezTo>
-                <a:lnTo>
-                  <a:pt x="62065" y="74384"/>
-                </a:lnTo>
-                <a:lnTo>
-                  <a:pt x="78057" y="48782"/>
-                </a:lnTo>
-                <a:cubicBezTo>
-                  <a:pt x="79880" y="45865"/>
-                  <a:pt x="83734" y="44954"/>
-                  <a:pt x="86678" y="46803"/>
-                </a:cubicBezTo>
-                <a:cubicBezTo>
-                  <a:pt x="89621" y="48652"/>
-                  <a:pt x="90506" y="52481"/>
-                  <a:pt x="88657" y="55424"/>
-                </a:cubicBezTo>
-                <a:close/>
-              </a:path>
-            </a:pathLst>
-          </a:custGeom>
-          <a:solidFill>
-            <a:srgbClr val="05DF72"/>
-          </a:solidFill>
-          <a:ln/>
-        </p:spPr>
-      </p:sp>
-      <p:sp>
-        <p:nvSpPr>
-          <p:cNvPr id="25" name="Text 23"/>
-          <p:cNvSpPr/>
-          <p:nvPr/>
-        </p:nvSpPr>
-        <p:spPr>
-          <a:xfrm>
-            <a:off x="6667500" y="3752850"/>
-            <a:ext cx="5057775" cy="190500"/>
-          </a:xfrm>
-          <a:prstGeom prst="rect">
-            <a:avLst/>
-          </a:prstGeom>
-          <a:noFill/>
-          <a:ln/>
-        </p:spPr>
-        <p:txBody>
-          <a:bodyPr wrap="square" lIns="0" tIns="0" rIns="0" bIns="0" rtlCol="0" anchor="ctr"/>
-          <a:lstStyle/>
-          <a:p>
-            <a:pPr>
-              <a:lnSpc>
-                <a:spcPct val="120000"/>
-              </a:lnSpc>
-            </a:pPr>
-            <a:r>
-              <a:rPr lang="en-US" sz="1050" b="1" dirty="0">
-                <a:solidFill>
-                  <a:srgbClr val="05DF72"/>
-                </a:solidFill>
-                <a:latin typeface="Liter" pitchFamily="34" charset="0"/>
-                <a:ea typeface="Liter" pitchFamily="34" charset="-122"/>
-                <a:cs typeface="Liter" pitchFamily="34" charset="-120"/>
-              </a:rPr>
-              <a:t>The Resolution</a:t>
-            </a:r>
-            <a:endParaRPr lang="en-US" sz="1600" dirty="0"/>
-          </a:p>
-        </p:txBody>
-      </p:sp>
-      <p:sp>
-        <p:nvSpPr>
-          <p:cNvPr id="26" name="Text 24"/>
-          <p:cNvSpPr/>
-          <p:nvPr/>
-        </p:nvSpPr>
-        <p:spPr>
-          <a:xfrm>
-            <a:off x="6496050" y="3981450"/>
-            <a:ext cx="5238750" cy="457200"/>
-          </a:xfrm>
-          <a:prstGeom prst="rect">
-            <a:avLst/>
-          </a:prstGeom>
-          <a:noFill/>
-          <a:ln/>
-        </p:spPr>
-        <p:txBody>
-          <a:bodyPr wrap="square" lIns="0" tIns="0" rIns="0" bIns="0" rtlCol="0" anchor="ctr"/>
-          <a:lstStyle/>
-          <a:p>
-            <a:pPr>
-              <a:lnSpc>
-                <a:spcPct val="130000"/>
-              </a:lnSpc>
-            </a:pPr>
-            <a:r>
-              <a:rPr lang="en-US" sz="1200" dirty="0">
-                <a:solidFill>
-                  <a:srgbClr val="E2E8F0">
-                    <a:alpha val="80000"/>
-                  </a:srgbClr>
-                </a:solidFill>
-                <a:latin typeface="Quattrocento Sans" pitchFamily="34" charset="0"/>
-                <a:ea typeface="Quattrocento Sans" pitchFamily="34" charset="-122"/>
-                <a:cs typeface="Quattrocento Sans" pitchFamily="34" charset="-120"/>
-              </a:rPr>
-              <a:t>Implemented true Hybrid Fusion — BM25 ensures target words exist, FAISS ensures context aligns. Mathematically forced 50/50 blend in standard model</a:t>
-            </a:r>
-            <a:endParaRPr lang="en-US" sz="1600" dirty="0"/>
-          </a:p>
-        </p:txBody>
-      </p:sp>
-      <p:sp>
-        <p:nvSpPr>
-          <p:cNvPr id="27" name="Shape 25"/>
-          <p:cNvSpPr/>
-          <p:nvPr/>
-        </p:nvSpPr>
-        <p:spPr>
-          <a:xfrm>
-            <a:off x="400050" y="4851439"/>
-            <a:ext cx="11410950" cy="1628775"/>
-          </a:xfrm>
-          <a:custGeom>
-            <a:avLst/>
-            <a:gdLst/>
-            <a:ahLst/>
-            <a:cxnLst/>
-            <a:rect l="l" t="t" r="r" b="b"/>
-            <a:pathLst>
-              <a:path w="11410950" h="1628775">
-                <a:moveTo>
-                  <a:pt x="0" y="0"/>
-                </a:moveTo>
-                <a:lnTo>
-                  <a:pt x="11334750" y="0"/>
-                </a:lnTo>
-                <a:cubicBezTo>
-                  <a:pt x="11376806" y="0"/>
-                  <a:pt x="11410950" y="34144"/>
-                  <a:pt x="11410950" y="76200"/>
-                </a:cubicBezTo>
-                <a:lnTo>
-                  <a:pt x="11410950" y="1552575"/>
-                </a:lnTo>
-                <a:cubicBezTo>
-                  <a:pt x="11410950" y="1594631"/>
-                  <a:pt x="11376806" y="1628775"/>
-                  <a:pt x="11334750" y="1628775"/>
-                </a:cubicBezTo>
-                <a:lnTo>
-                  <a:pt x="0" y="1628775"/>
-                </a:lnTo>
-                <a:lnTo>
-                  <a:pt x="0" y="0"/>
-                </a:lnTo>
-                <a:close/>
-              </a:path>
-            </a:pathLst>
-          </a:custGeom>
-          <a:solidFill>
-            <a:srgbClr val="4A5568">
-              <a:alpha val="14902"/>
-            </a:srgbClr>
-          </a:solidFill>
-          <a:ln/>
-        </p:spPr>
-      </p:sp>
-      <p:sp>
-        <p:nvSpPr>
-          <p:cNvPr id="28" name="Shape 26"/>
-          <p:cNvSpPr/>
-          <p:nvPr/>
-        </p:nvSpPr>
-        <p:spPr>
-          <a:xfrm>
-            <a:off x="400050" y="4851439"/>
-            <a:ext cx="38100" cy="1628775"/>
-          </a:xfrm>
-          <a:prstGeom prst="roundRect">
-            <a:avLst>
-              <a:gd name="adj" fmla="val 0"/>
-            </a:avLst>
-          </a:prstGeom>
-          <a:solidFill>
-            <a:srgbClr val="D4A26A"/>
-          </a:solidFill>
-          <a:ln/>
-        </p:spPr>
-      </p:sp>
-      <p:sp>
-        <p:nvSpPr>
-          <p:cNvPr id="29" name="Shape 27"/>
-          <p:cNvSpPr/>
-          <p:nvPr/>
-        </p:nvSpPr>
-        <p:spPr>
-          <a:xfrm>
-            <a:off x="571500" y="5035511"/>
-            <a:ext cx="457200" cy="457200"/>
-          </a:xfrm>
-          <a:prstGeom prst="roundRect">
-            <a:avLst>
-              <a:gd name="adj" fmla="val 16667"/>
-            </a:avLst>
-          </a:prstGeom>
-          <a:solidFill>
-            <a:srgbClr val="D4A26A">
-              <a:alpha val="20000"/>
-            </a:srgbClr>
-          </a:solidFill>
-          <a:ln/>
-        </p:spPr>
-      </p:sp>
-      <p:sp>
-        <p:nvSpPr>
-          <p:cNvPr id="30" name="Text 28"/>
-          <p:cNvSpPr/>
-          <p:nvPr/>
-        </p:nvSpPr>
-        <p:spPr>
-          <a:xfrm>
-            <a:off x="659725" y="5111711"/>
-            <a:ext cx="390525" cy="304800"/>
-          </a:xfrm>
-          <a:prstGeom prst="rect">
-            <a:avLst/>
-          </a:prstGeom>
-          <a:noFill/>
-          <a:ln/>
-        </p:spPr>
-        <p:txBody>
-          <a:bodyPr wrap="square" lIns="0" tIns="0" rIns="0" bIns="0" rtlCol="0" anchor="ctr"/>
-          <a:lstStyle/>
-          <a:p>
-            <a:pPr>
-              <a:lnSpc>
-                <a:spcPct val="110000"/>
-              </a:lnSpc>
-            </a:pPr>
-            <a:r>
-              <a:rPr lang="en-US" sz="1800" b="1" dirty="0">
-                <a:solidFill>
-                  <a:srgbClr val="D4A26A"/>
-                </a:solidFill>
-                <a:latin typeface="Liter" pitchFamily="34" charset="0"/>
-                <a:ea typeface="Liter" pitchFamily="34" charset="-122"/>
-                <a:cs typeface="Liter" pitchFamily="34" charset="-120"/>
-              </a:rPr>
-              <a:t>03</a:t>
-            </a:r>
-            <a:endParaRPr lang="en-US" sz="1600" dirty="0"/>
-          </a:p>
-        </p:txBody>
-      </p:sp>
-      <p:sp>
-        <p:nvSpPr>
-          <p:cNvPr id="31" name="Text 29"/>
-          <p:cNvSpPr/>
-          <p:nvPr/>
-        </p:nvSpPr>
-        <p:spPr>
-          <a:xfrm>
-            <a:off x="1181100" y="5035511"/>
-            <a:ext cx="10572750" cy="266700"/>
-          </a:xfrm>
-          <a:prstGeom prst="rect">
-            <a:avLst/>
-          </a:prstGeom>
-          <a:noFill/>
-          <a:ln/>
-        </p:spPr>
-        <p:txBody>
-          <a:bodyPr wrap="square" lIns="0" tIns="0" rIns="0" bIns="0" rtlCol="0" anchor="ctr"/>
-          <a:lstStyle/>
-          <a:p>
-            <a:pPr>
-              <a:lnSpc>
-                <a:spcPct val="120000"/>
-              </a:lnSpc>
-            </a:pPr>
-            <a:r>
-              <a:rPr lang="en-US" sz="1500" b="1" dirty="0">
-                <a:solidFill>
-                  <a:srgbClr val="E2E8F0"/>
-                </a:solidFill>
-                <a:latin typeface="Liter" pitchFamily="34" charset="0"/>
-                <a:ea typeface="Liter" pitchFamily="34" charset="-122"/>
-                <a:cs typeface="Liter" pitchFamily="34" charset="-120"/>
-              </a:rPr>
-              <a:t>Local LLM Timeout &amp; Context Window Truncation</a:t>
-            </a:r>
-            <a:endParaRPr lang="en-US" sz="1600" dirty="0"/>
-          </a:p>
-        </p:txBody>
-      </p:sp>
-      <p:sp>
-        <p:nvSpPr>
-          <p:cNvPr id="32" name="Shape 30"/>
-          <p:cNvSpPr/>
-          <p:nvPr/>
-        </p:nvSpPr>
-        <p:spPr>
-          <a:xfrm>
-            <a:off x="1200150" y="5406986"/>
-            <a:ext cx="133350" cy="133350"/>
-          </a:xfrm>
-          <a:custGeom>
-            <a:avLst/>
-            <a:gdLst/>
-            <a:ahLst/>
-            <a:cxnLst/>
-            <a:rect l="l" t="t" r="r" b="b"/>
-            <a:pathLst>
-              <a:path w="133350" h="133350">
-                <a:moveTo>
-                  <a:pt x="66675" y="133350"/>
-                </a:moveTo>
-                <a:cubicBezTo>
-                  <a:pt x="103474" y="133350"/>
-                  <a:pt x="133350" y="103474"/>
-                  <a:pt x="133350" y="66675"/>
-                </a:cubicBezTo>
-                <a:cubicBezTo>
-                  <a:pt x="133350" y="29876"/>
-                  <a:pt x="103474" y="0"/>
-                  <a:pt x="66675" y="0"/>
-                </a:cubicBezTo>
-                <a:cubicBezTo>
-                  <a:pt x="29876" y="0"/>
-                  <a:pt x="0" y="29876"/>
-                  <a:pt x="0" y="66675"/>
-                </a:cubicBezTo>
-                <a:cubicBezTo>
-                  <a:pt x="0" y="103474"/>
-                  <a:pt x="29876" y="133350"/>
-                  <a:pt x="66675" y="133350"/>
-                </a:cubicBezTo>
-                <a:close/>
-                <a:moveTo>
-                  <a:pt x="43495" y="43495"/>
-                </a:moveTo>
-                <a:cubicBezTo>
-                  <a:pt x="45943" y="41047"/>
-                  <a:pt x="49902" y="41047"/>
-                  <a:pt x="52324" y="43495"/>
-                </a:cubicBezTo>
-                <a:lnTo>
-                  <a:pt x="66649" y="57820"/>
-                </a:lnTo>
-                <a:lnTo>
-                  <a:pt x="80974" y="43495"/>
-                </a:lnTo>
-                <a:cubicBezTo>
-                  <a:pt x="83422" y="41047"/>
-                  <a:pt x="87381" y="41047"/>
-                  <a:pt x="89803" y="43495"/>
-                </a:cubicBezTo>
-                <a:cubicBezTo>
-                  <a:pt x="92225" y="45943"/>
-                  <a:pt x="92251" y="49902"/>
-                  <a:pt x="89803" y="52324"/>
-                </a:cubicBezTo>
-                <a:lnTo>
-                  <a:pt x="75478" y="66649"/>
-                </a:lnTo>
-                <a:lnTo>
-                  <a:pt x="89803" y="80974"/>
-                </a:lnTo>
-                <a:cubicBezTo>
-                  <a:pt x="92251" y="83422"/>
-                  <a:pt x="92251" y="87381"/>
-                  <a:pt x="89803" y="89803"/>
-                </a:cubicBezTo>
-                <a:cubicBezTo>
-                  <a:pt x="87355" y="92225"/>
-                  <a:pt x="83396" y="92251"/>
-                  <a:pt x="80974" y="89803"/>
-                </a:cubicBezTo>
-                <a:lnTo>
-                  <a:pt x="66649" y="75478"/>
-                </a:lnTo>
-                <a:lnTo>
-                  <a:pt x="52324" y="89803"/>
-                </a:lnTo>
-                <a:cubicBezTo>
-                  <a:pt x="49876" y="92251"/>
-                  <a:pt x="45917" y="92251"/>
-                  <a:pt x="43495" y="89803"/>
-                </a:cubicBezTo>
-                <a:cubicBezTo>
-                  <a:pt x="41073" y="87355"/>
-                  <a:pt x="41047" y="83396"/>
-                  <a:pt x="43495" y="80974"/>
-                </a:cubicBezTo>
-                <a:lnTo>
-                  <a:pt x="57820" y="66649"/>
-                </a:lnTo>
-                <a:lnTo>
-                  <a:pt x="43495" y="52324"/>
-                </a:lnTo>
-                <a:cubicBezTo>
-                  <a:pt x="41047" y="49876"/>
-                  <a:pt x="41047" y="45917"/>
-                  <a:pt x="43495" y="43495"/>
-                </a:cubicBezTo>
-                <a:close/>
-              </a:path>
-            </a:pathLst>
-          </a:custGeom>
-          <a:solidFill>
-            <a:srgbClr val="FF6467"/>
-          </a:solidFill>
-          <a:ln/>
-        </p:spPr>
-      </p:sp>
-      <p:sp>
-        <p:nvSpPr>
-          <p:cNvPr id="33" name="Text 31"/>
-          <p:cNvSpPr/>
-          <p:nvPr/>
-        </p:nvSpPr>
-        <p:spPr>
-          <a:xfrm>
-            <a:off x="1352550" y="5378411"/>
-            <a:ext cx="5057775" cy="190500"/>
-          </a:xfrm>
-          <a:prstGeom prst="rect">
-            <a:avLst/>
-          </a:prstGeom>
-          <a:noFill/>
-          <a:ln/>
-        </p:spPr>
-        <p:txBody>
-          <a:bodyPr wrap="square" lIns="0" tIns="0" rIns="0" bIns="0" rtlCol="0" anchor="ctr"/>
-          <a:lstStyle/>
-          <a:p>
-            <a:pPr>
-              <a:lnSpc>
-                <a:spcPct val="120000"/>
-              </a:lnSpc>
-            </a:pPr>
-            <a:r>
-              <a:rPr lang="en-US" sz="1050" b="1" dirty="0">
-                <a:solidFill>
-                  <a:srgbClr val="FF6467"/>
-                </a:solidFill>
-                <a:latin typeface="Liter" pitchFamily="34" charset="0"/>
-                <a:ea typeface="Liter" pitchFamily="34" charset="-122"/>
-                <a:cs typeface="Liter" pitchFamily="34" charset="-120"/>
-              </a:rPr>
-              <a:t>The Problem</a:t>
-            </a:r>
-            <a:endParaRPr lang="en-US" sz="1600" dirty="0"/>
-          </a:p>
-        </p:txBody>
-      </p:sp>
-      <p:sp>
-        <p:nvSpPr>
-          <p:cNvPr id="34" name="Text 32"/>
-          <p:cNvSpPr/>
-          <p:nvPr/>
-        </p:nvSpPr>
-        <p:spPr>
-          <a:xfrm>
-            <a:off x="1181100" y="5607011"/>
-            <a:ext cx="5238750" cy="457200"/>
-          </a:xfrm>
-          <a:prstGeom prst="rect">
-            <a:avLst/>
-          </a:prstGeom>
-          <a:noFill/>
-          <a:ln/>
-        </p:spPr>
-        <p:txBody>
-          <a:bodyPr wrap="square" lIns="0" tIns="0" rIns="0" bIns="0" rtlCol="0" anchor="ctr"/>
-          <a:lstStyle/>
-          <a:p>
-            <a:pPr>
-              <a:lnSpc>
-                <a:spcPct val="130000"/>
-              </a:lnSpc>
-            </a:pPr>
-            <a:r>
-              <a:rPr lang="en-US" sz="1200" dirty="0">
-                <a:solidFill>
-                  <a:srgbClr val="E2E8F0">
-                    <a:alpha val="80000"/>
-                  </a:srgbClr>
-                </a:solidFill>
-                <a:latin typeface="Quattrocento Sans" pitchFamily="34" charset="0"/>
-                <a:ea typeface="Quattrocento Sans" pitchFamily="34" charset="-122"/>
-                <a:cs typeface="Quattrocento Sans" pitchFamily="34" charset="-120"/>
-              </a:rPr>
-              <a:t>Summarizing 10 retrieved articles via local Mistral/Llama broke context token limits, halting server execution completely</a:t>
-            </a:r>
-            <a:endParaRPr lang="en-US" sz="1600" dirty="0"/>
-          </a:p>
-        </p:txBody>
-      </p:sp>
-      <p:sp>
-        <p:nvSpPr>
-          <p:cNvPr id="35" name="Shape 33"/>
-          <p:cNvSpPr/>
-          <p:nvPr/>
-        </p:nvSpPr>
-        <p:spPr>
-          <a:xfrm>
-            <a:off x="6515100" y="5406986"/>
-            <a:ext cx="133350" cy="133350"/>
-          </a:xfrm>
-          <a:custGeom>
-            <a:avLst/>
-            <a:gdLst/>
-            <a:ahLst/>
-            <a:cxnLst/>
-            <a:rect l="l" t="t" r="r" b="b"/>
-            <a:pathLst>
-              <a:path w="133350" h="133350">
-                <a:moveTo>
-                  <a:pt x="66675" y="133350"/>
-                </a:moveTo>
-                <a:cubicBezTo>
-                  <a:pt x="103474" y="133350"/>
-                  <a:pt x="133350" y="103474"/>
-                  <a:pt x="133350" y="66675"/>
-                </a:cubicBezTo>
-                <a:cubicBezTo>
-                  <a:pt x="133350" y="29876"/>
-                  <a:pt x="103474" y="0"/>
-                  <a:pt x="66675" y="0"/>
-                </a:cubicBezTo>
-                <a:cubicBezTo>
-                  <a:pt x="29876" y="0"/>
-                  <a:pt x="0" y="29876"/>
-                  <a:pt x="0" y="66675"/>
-                </a:cubicBezTo>
-                <a:cubicBezTo>
-                  <a:pt x="0" y="103474"/>
-                  <a:pt x="29876" y="133350"/>
-                  <a:pt x="66675" y="133350"/>
-                </a:cubicBezTo>
-                <a:close/>
-                <a:moveTo>
-                  <a:pt x="88657" y="55398"/>
-                </a:moveTo>
-                <a:lnTo>
-                  <a:pt x="67821" y="88735"/>
-                </a:lnTo>
-                <a:cubicBezTo>
-                  <a:pt x="66727" y="90480"/>
-                  <a:pt x="64852" y="91574"/>
-                  <a:pt x="62794" y="91678"/>
-                </a:cubicBezTo>
-                <a:cubicBezTo>
-                  <a:pt x="60737" y="91782"/>
-                  <a:pt x="58757" y="90845"/>
-                  <a:pt x="57533" y="89178"/>
-                </a:cubicBezTo>
-                <a:lnTo>
-                  <a:pt x="45032" y="72509"/>
-                </a:lnTo>
-                <a:cubicBezTo>
-                  <a:pt x="42948" y="69748"/>
-                  <a:pt x="43521" y="65842"/>
-                  <a:pt x="46282" y="63758"/>
-                </a:cubicBezTo>
-                <a:cubicBezTo>
-                  <a:pt x="49043" y="61674"/>
-                  <a:pt x="52949" y="62247"/>
-                  <a:pt x="55033" y="65008"/>
-                </a:cubicBezTo>
-                <a:lnTo>
-                  <a:pt x="62065" y="74384"/>
-                </a:lnTo>
-                <a:lnTo>
-                  <a:pt x="78057" y="48782"/>
-                </a:lnTo>
-                <a:cubicBezTo>
-                  <a:pt x="79880" y="45865"/>
-                  <a:pt x="83734" y="44954"/>
-                  <a:pt x="86678" y="46803"/>
-                </a:cubicBezTo>
-                <a:cubicBezTo>
-                  <a:pt x="89621" y="48652"/>
-                  <a:pt x="90506" y="52481"/>
-                  <a:pt x="88657" y="55424"/>
-                </a:cubicBezTo>
-                <a:close/>
-              </a:path>
-            </a:pathLst>
-          </a:custGeom>
-          <a:solidFill>
-            <a:srgbClr val="05DF72"/>
-          </a:solidFill>
-          <a:ln/>
-        </p:spPr>
-      </p:sp>
-      <p:sp>
-        <p:nvSpPr>
-          <p:cNvPr id="36" name="Text 34"/>
-          <p:cNvSpPr/>
-          <p:nvPr/>
-        </p:nvSpPr>
-        <p:spPr>
-          <a:xfrm>
-            <a:off x="6667500" y="5378411"/>
-            <a:ext cx="5057775" cy="190500"/>
-          </a:xfrm>
-          <a:prstGeom prst="rect">
-            <a:avLst/>
-          </a:prstGeom>
-          <a:noFill/>
-          <a:ln/>
-        </p:spPr>
-        <p:txBody>
-          <a:bodyPr wrap="square" lIns="0" tIns="0" rIns="0" bIns="0" rtlCol="0" anchor="ctr"/>
-          <a:lstStyle/>
-          <a:p>
-            <a:pPr>
-              <a:lnSpc>
-                <a:spcPct val="120000"/>
-              </a:lnSpc>
-            </a:pPr>
-            <a:r>
-              <a:rPr lang="en-US" sz="1050" b="1" dirty="0">
-                <a:solidFill>
-                  <a:srgbClr val="05DF72"/>
-                </a:solidFill>
-                <a:latin typeface="Liter" pitchFamily="34" charset="0"/>
-                <a:ea typeface="Liter" pitchFamily="34" charset="-122"/>
-                <a:cs typeface="Liter" pitchFamily="34" charset="-120"/>
-              </a:rPr>
-              <a:t>The Resolution</a:t>
-            </a:r>
-            <a:endParaRPr lang="en-US" sz="1600" dirty="0"/>
-          </a:p>
-        </p:txBody>
-      </p:sp>
-      <p:sp>
-        <p:nvSpPr>
-          <p:cNvPr id="37" name="Text 35"/>
-          <p:cNvSpPr/>
-          <p:nvPr/>
-        </p:nvSpPr>
-        <p:spPr>
-          <a:xfrm>
-            <a:off x="6496050" y="5607011"/>
-            <a:ext cx="5238750" cy="685800"/>
-          </a:xfrm>
-          <a:prstGeom prst="rect">
-            <a:avLst/>
-          </a:prstGeom>
-          <a:noFill/>
-          <a:ln/>
-        </p:spPr>
-        <p:txBody>
-          <a:bodyPr wrap="square" lIns="0" tIns="0" rIns="0" bIns="0" rtlCol="0" anchor="ctr"/>
-          <a:lstStyle/>
-          <a:p>
-            <a:pPr>
-              <a:lnSpc>
-                <a:spcPct val="130000"/>
-              </a:lnSpc>
-            </a:pPr>
-            <a:r>
-              <a:rPr lang="en-US" sz="1200" dirty="0">
-                <a:solidFill>
-                  <a:srgbClr val="E2E8F0">
-                    <a:alpha val="80000"/>
-                  </a:srgbClr>
-                </a:solidFill>
-                <a:latin typeface="Quattrocento Sans" pitchFamily="34" charset="0"/>
-                <a:ea typeface="Quattrocento Sans" pitchFamily="34" charset="-122"/>
-                <a:cs typeface="Quattrocento Sans" pitchFamily="34" charset="-120"/>
-              </a:rPr>
-              <a:t>Truncated AI input to top 5 content_excerpt fragments maximum. Implemented rigorous thread timeout boundaries so LLM failure doesn't prevent standard article population</a:t>
-            </a:r>
-            <a:endParaRPr lang="en-US" sz="1600" dirty="0"/>
-          </a:p>
-        </p:txBody>
-      </p:sp>
-    </p:spTree>
-  </p:cSld>
-  <p:clrMapOvr>
-    <a:masterClrMapping/>
-  </p:clrMapOvr>
-  <p:transition>
-    <p:fade/>
-    <p:spd val="med"/>
-  </p:transition>
-</p:sld>
-</file>
-
-<file path=ppt/slides/slide11.xml><?xml version="1.0" encoding="utf-8"?>
 <p:sld xmlns:a="http://schemas.openxmlformats.org/drawingml/2006/main" xmlns:r="http://schemas.openxmlformats.org/officeDocument/2006/relationships" xmlns:p="http://schemas.openxmlformats.org/presentationml/2006/main">
   <p:cSld name="Slide 11">
     <p:bg>
@@ -4770,6 +2602,7 @@
         <a:solidFill>
           <a:srgbClr val="1A1D21"/>
         </a:solidFill>
+        <a:effectLst/>
       </p:bgPr>
     </p:bg>
     <p:spTree>
@@ -4788,17 +2621,17 @@
       </p:grpSpPr>
       <p:pic>
         <p:nvPicPr>
-          <p:cNvPr id="2" name="Image 0" descr="https://kimi-img.moonshot.cn/pub/slides/okc/5beqdm23l5qus/images/5_Abstract_Dark_Mode_Dashboard_Background.png">    </p:cNvPr>
+          <p:cNvPr id="2" name="Image 0" descr="https://kimi-img.moonshot.cn/pub/slides/okc/5beqdm23l5qus/images/5_Abstract_Dark_Mode_Dashboard_Background.png"/>
           <p:cNvPicPr>
             <a:picLocks noChangeAspect="1"/>
           </p:cNvPicPr>
           <p:nvPr/>
         </p:nvPicPr>
         <p:blipFill>
-          <a:blip r:embed="rId1">
+          <a:blip r:embed="rId3">
             <a:alphaModFix amt="30000"/>
           </a:blip>
-          <a:srcRect l="1444" r="1444" t="0" b="0"/>
+          <a:srcRect l="1444" r="1444"/>
           <a:stretch/>
         </p:blipFill>
         <p:spPr>
@@ -4829,7 +2662,7 @@
               <a:gd name="adj" fmla="val 0"/>
             </a:avLst>
           </a:prstGeom>
-          <a:gradFill rotWithShape="1" flip="none">
+          <a:gradFill flip="none" rotWithShape="1">
             <a:gsLst>
               <a:gs pos="0">
                 <a:srgbClr val="1A1D21">
@@ -4925,7 +2758,7 @@
               </a:lnSpc>
             </a:pPr>
             <a:r>
-              <a:rPr lang="en-US" sz="1200" b="1" spc="60" kern="0" dirty="0">
+              <a:rPr lang="en-US" sz="1200" b="1" kern="0" spc="60" dirty="0">
                 <a:solidFill>
                   <a:srgbClr val="6B7A8F"/>
                 </a:solidFill>
@@ -5071,12 +2904,11 @@
   </p:clrMapOvr>
   <p:transition>
     <p:fade/>
-    <p:spd val="med"/>
   </p:transition>
 </p:sld>
 </file>
 
-<file path=ppt/slides/slide12.xml><?xml version="1.0" encoding="utf-8"?>
+<file path=ppt/slides/slide11.xml><?xml version="1.0" encoding="utf-8"?>
 <p:sld xmlns:a="http://schemas.openxmlformats.org/drawingml/2006/main" xmlns:r="http://schemas.openxmlformats.org/officeDocument/2006/relationships" xmlns:p="http://schemas.openxmlformats.org/presentationml/2006/main">
   <p:cSld name="Slide 12">
     <p:bg>
@@ -5084,6 +2916,7 @@
         <a:solidFill>
           <a:srgbClr val="1A1D21"/>
         </a:solidFill>
+        <a:effectLst/>
       </p:bgPr>
     </p:bg>
     <p:spTree>
@@ -5127,7 +2960,7 @@
               </a:lnSpc>
             </a:pPr>
             <a:r>
-              <a:rPr lang="en-US" sz="1200" b="1" spc="60" kern="0" dirty="0">
+              <a:rPr lang="en-US" sz="1200" b="1" kern="0" spc="60" dirty="0">
                 <a:solidFill>
                   <a:srgbClr val="6B7A8F"/>
                 </a:solidFill>
@@ -5460,7 +3293,7 @@
               <a:gd name="adj" fmla="val 1997"/>
             </a:avLst>
           </a:prstGeom>
-          <a:gradFill rotWithShape="1" flip="none">
+          <a:gradFill flip="none" rotWithShape="1">
             <a:gsLst>
               <a:gs pos="0">
                 <a:srgbClr val="D4A26A">
@@ -6166,11 +3999,6 @@
               </a:rPr>
               <a:t>Dramatically stronger MAP</a:t>
             </a:r>
-            <a:pPr>
-              <a:lnSpc>
-                <a:spcPct val="130000"/>
-              </a:lnSpc>
-            </a:pPr>
             <a:r>
               <a:rPr lang="en-US" sz="1200" dirty="0">
                 <a:solidFill>
@@ -7812,12 +5640,11 @@
   </p:clrMapOvr>
   <p:transition>
     <p:fade/>
-    <p:spd val="med"/>
   </p:transition>
 </p:sld>
 </file>
 
-<file path=ppt/slides/slide13.xml><?xml version="1.0" encoding="utf-8"?>
+<file path=ppt/slides/slide12.xml><?xml version="1.0" encoding="utf-8"?>
 <p:sld xmlns:a="http://schemas.openxmlformats.org/drawingml/2006/main" xmlns:r="http://schemas.openxmlformats.org/officeDocument/2006/relationships" xmlns:p="http://schemas.openxmlformats.org/presentationml/2006/main">
   <p:cSld name="Slide 13">
     <p:bg>
@@ -7825,6 +5652,7 @@
         <a:solidFill>
           <a:srgbClr val="1A1D21"/>
         </a:solidFill>
+        <a:effectLst/>
       </p:bgPr>
     </p:bg>
     <p:spTree>
@@ -7868,7 +5696,7 @@
               </a:lnSpc>
             </a:pPr>
             <a:r>
-              <a:rPr lang="en-US" sz="1089" b="1" spc="54" kern="0" dirty="0">
+              <a:rPr lang="en-US" sz="1089" b="1" kern="0" spc="54" dirty="0">
                 <a:solidFill>
                   <a:srgbClr val="D4A26A"/>
                 </a:solidFill>
@@ -7961,7 +5789,7 @@
               <a:gd name="adj" fmla="val 2212"/>
             </a:avLst>
           </a:prstGeom>
-          <a:gradFill rotWithShape="1" flip="none">
+          <a:gradFill flip="none" rotWithShape="1">
             <a:gsLst>
               <a:gs pos="0">
                 <a:srgbClr val="D4A26A">
@@ -8269,11 +6097,6 @@
               </a:rPr>
               <a:t>Successfully bridged modern enterprise Information Retrieval concepts with </a:t>
             </a:r>
-            <a:pPr>
-              <a:lnSpc>
-                <a:spcPct val="140000"/>
-              </a:lnSpc>
-            </a:pPr>
             <a:r>
               <a:rPr lang="en-US" sz="1089" b="1" dirty="0">
                 <a:solidFill>
@@ -8413,11 +6236,6 @@
               </a:rPr>
               <a:t>Moved beyond Google-style primitive scraping — system fully analyzes </a:t>
             </a:r>
-            <a:pPr>
-              <a:lnSpc>
-                <a:spcPct val="140000"/>
-              </a:lnSpc>
-            </a:pPr>
             <a:r>
               <a:rPr lang="en-US" sz="1089" b="1" dirty="0">
                 <a:solidFill>
@@ -8429,11 +6247,6 @@
               </a:rPr>
               <a:t>semantic density internally</a:t>
             </a:r>
-            <a:pPr>
-              <a:lnSpc>
-                <a:spcPct val="140000"/>
-              </a:lnSpc>
-            </a:pPr>
             <a:r>
               <a:rPr lang="en-US" sz="1089" dirty="0">
                 <a:solidFill>
@@ -8575,11 +6388,6 @@
               </a:rPr>
               <a:t>Proved that </a:t>
             </a:r>
-            <a:pPr>
-              <a:lnSpc>
-                <a:spcPct val="140000"/>
-              </a:lnSpc>
-            </a:pPr>
             <a:r>
               <a:rPr lang="en-US" sz="1089" b="1" dirty="0">
                 <a:solidFill>
@@ -8591,11 +6399,6 @@
               </a:rPr>
               <a:t>semantic hybrid searches yield better relevancy</a:t>
             </a:r>
-            <a:pPr>
-              <a:lnSpc>
-                <a:spcPct val="140000"/>
-              </a:lnSpc>
-            </a:pPr>
             <a:r>
               <a:rPr lang="en-US" sz="1089" dirty="0">
                 <a:solidFill>
@@ -8737,11 +6540,6 @@
               </a:rPr>
               <a:t>Achieved real-time metrics tracking (Precision@20, Recall, Latency) with </a:t>
             </a:r>
-            <a:pPr>
-              <a:lnSpc>
-                <a:spcPct val="140000"/>
-              </a:lnSpc>
-            </a:pPr>
             <a:r>
               <a:rPr lang="en-US" sz="1089" b="1" dirty="0">
                 <a:solidFill>
@@ -10791,11 +8589,6 @@
               </a:rPr>
               <a:t>Transition FAISS build generation to active background synchronization pool using </a:t>
             </a:r>
-            <a:pPr>
-              <a:lnSpc>
-                <a:spcPct val="130000"/>
-              </a:lnSpc>
-            </a:pPr>
             <a:r>
               <a:rPr lang="en-US" sz="1089" b="1" dirty="0">
                 <a:solidFill>
@@ -10807,11 +8600,6 @@
               </a:rPr>
               <a:t>Redis/Celery</a:t>
             </a:r>
-            <a:pPr>
-              <a:lnSpc>
-                <a:spcPct val="130000"/>
-              </a:lnSpc>
-            </a:pPr>
             <a:r>
               <a:rPr lang="en-US" sz="1089" dirty="0">
                 <a:solidFill>
@@ -11695,11 +9483,6 @@
               </a:rPr>
               <a:t>Vision:</a:t>
             </a:r>
-            <a:pPr>
-              <a:lnSpc>
-                <a:spcPct val="130000"/>
-              </a:lnSpc>
-            </a:pPr>
             <a:r>
               <a:rPr lang="en-US" sz="1089" dirty="0">
                 <a:solidFill>
@@ -11724,12 +9507,11 @@
   </p:clrMapOvr>
   <p:transition>
     <p:fade/>
-    <p:spd val="med"/>
   </p:transition>
 </p:sld>
 </file>
 
-<file path=ppt/slides/slide14.xml><?xml version="1.0" encoding="utf-8"?>
+<file path=ppt/slides/slide13.xml><?xml version="1.0" encoding="utf-8"?>
 <p:sld xmlns:a="http://schemas.openxmlformats.org/drawingml/2006/main" xmlns:r="http://schemas.openxmlformats.org/officeDocument/2006/relationships" xmlns:p="http://schemas.openxmlformats.org/presentationml/2006/main">
   <p:cSld name="Slide 14">
     <p:bg>
@@ -11737,6 +9519,7 @@
         <a:solidFill>
           <a:srgbClr val="1A1D21"/>
         </a:solidFill>
+        <a:effectLst/>
       </p:bgPr>
     </p:bg>
     <p:spTree>
@@ -11755,17 +9538,17 @@
       </p:grpSpPr>
       <p:pic>
         <p:nvPicPr>
-          <p:cNvPr id="2" name="Image 0" descr="https://kimi-img.moonshot.cn/pub/slides/okc/5beqdm23l5qus/images/2_Free_Abstract_Network_Visualization.png">    </p:cNvPr>
+          <p:cNvPr id="2" name="Image 0" descr="https://kimi-img.moonshot.cn/pub/slides/okc/5beqdm23l5qus/images/2_Free_Abstract_Network_Visualization.png"/>
           <p:cNvPicPr>
             <a:picLocks noChangeAspect="1"/>
           </p:cNvPicPr>
           <p:nvPr/>
         </p:nvPicPr>
         <p:blipFill>
-          <a:blip r:embed="rId1">
+          <a:blip r:embed="rId3">
             <a:alphaModFix amt="40000"/>
           </a:blip>
-          <a:srcRect l="0" r="0" t="34238" b="34238"/>
+          <a:srcRect t="34238" b="34238"/>
           <a:stretch/>
         </p:blipFill>
         <p:spPr>
@@ -11796,7 +9579,7 @@
               <a:gd name="adj" fmla="val 0"/>
             </a:avLst>
           </a:prstGeom>
-          <a:gradFill rotWithShape="1" flip="none">
+          <a:gradFill flip="none" rotWithShape="1">
             <a:gsLst>
               <a:gs pos="0">
                 <a:srgbClr val="1A1D21">
@@ -12690,7 +10473,6 @@
   </p:clrMapOvr>
   <p:transition>
     <p:fade/>
-    <p:spd val="med"/>
   </p:transition>
 </p:sld>
 </file>
@@ -12703,6 +10485,7 @@
         <a:solidFill>
           <a:srgbClr val="1A1D21"/>
         </a:solidFill>
+        <a:effectLst/>
       </p:bgPr>
     </p:bg>
     <p:spTree>
@@ -12746,7 +10529,7 @@
               </a:lnSpc>
             </a:pPr>
             <a:r>
-              <a:rPr lang="en-US" sz="1200" b="1" spc="60" kern="0" dirty="0">
+              <a:rPr lang="en-US" sz="1200" b="1" kern="0" spc="60" dirty="0">
                 <a:solidFill>
                   <a:srgbClr val="D4A26A"/>
                 </a:solidFill>
@@ -13965,7 +11748,6 @@
   </p:clrMapOvr>
   <p:transition>
     <p:fade/>
-    <p:spd val="med"/>
   </p:transition>
 </p:sld>
 </file>
@@ -13978,6 +11760,7 @@
         <a:solidFill>
           <a:srgbClr val="1A1D21"/>
         </a:solidFill>
+        <a:effectLst/>
       </p:bgPr>
     </p:bg>
     <p:spTree>
@@ -13996,17 +11779,17 @@
       </p:grpSpPr>
       <p:pic>
         <p:nvPicPr>
-          <p:cNvPr id="2" name="Image 0" descr="https://kimi-img.moonshot.cn/pub/slides/okc/5beqdm23l5qus/images/7_Abstract_Ai_Neural_Network_Concept.png">    </p:cNvPr>
+          <p:cNvPr id="2" name="Image 0" descr="https://kimi-img.moonshot.cn/pub/slides/okc/5beqdm23l5qus/images/7_Abstract_Ai_Neural_Network_Concept.png"/>
           <p:cNvPicPr>
             <a:picLocks noChangeAspect="1"/>
           </p:cNvPicPr>
           <p:nvPr/>
         </p:nvPicPr>
         <p:blipFill>
-          <a:blip r:embed="rId1">
+          <a:blip r:embed="rId3">
             <a:alphaModFix amt="30000"/>
           </a:blip>
-          <a:srcRect l="0" r="0" t="0" b="0"/>
+          <a:srcRect/>
           <a:stretch/>
         </p:blipFill>
         <p:spPr>
@@ -14037,7 +11820,7 @@
               <a:gd name="adj" fmla="val 0"/>
             </a:avLst>
           </a:prstGeom>
-          <a:gradFill rotWithShape="1" flip="none">
+          <a:gradFill flip="none" rotWithShape="1">
             <a:gsLst>
               <a:gs pos="0">
                 <a:srgbClr val="1A1D21">
@@ -14133,7 +11916,7 @@
               </a:lnSpc>
             </a:pPr>
             <a:r>
-              <a:rPr lang="en-US" sz="1200" b="1" spc="60" kern="0" dirty="0">
+              <a:rPr lang="en-US" sz="1200" b="1" kern="0" spc="60" dirty="0">
                 <a:solidFill>
                   <a:srgbClr val="D4A26A"/>
                 </a:solidFill>
@@ -14279,7 +12062,6 @@
   </p:clrMapOvr>
   <p:transition>
     <p:fade/>
-    <p:spd val="med"/>
   </p:transition>
 </p:sld>
 </file>
@@ -14292,6 +12074,7 @@
         <a:solidFill>
           <a:srgbClr val="1A1D21"/>
         </a:solidFill>
+        <a:effectLst/>
       </p:bgPr>
     </p:bg>
     <p:spTree>
@@ -14335,7 +12118,7 @@
               </a:lnSpc>
             </a:pPr>
             <a:r>
-              <a:rPr lang="en-US" sz="1200" b="1" spc="60" kern="0" dirty="0">
+              <a:rPr lang="en-US" sz="1200" b="1" kern="0" spc="60" dirty="0">
                 <a:solidFill>
                   <a:srgbClr val="D4A26A"/>
                 </a:solidFill>
@@ -14695,11 +12478,6 @@
               </a:rPr>
               <a:t>Engineer a </a:t>
             </a:r>
-            <a:pPr>
-              <a:lnSpc>
-                <a:spcPct val="140000"/>
-              </a:lnSpc>
-            </a:pPr>
             <a:r>
               <a:rPr lang="en-US" sz="1200" b="1" dirty="0">
                 <a:solidFill>
@@ -14711,11 +12489,6 @@
               </a:rPr>
               <a:t>standalone, offline-capable search engine</a:t>
             </a:r>
-            <a:pPr>
-              <a:lnSpc>
-                <a:spcPct val="140000"/>
-              </a:lnSpc>
-            </a:pPr>
             <a:r>
               <a:rPr lang="en-US" sz="1200" dirty="0">
                 <a:solidFill>
@@ -14729,11 +12502,6 @@
               </a:rPr>
               <a:t> combining Lexical and Semantic retrieval strategies to parse </a:t>
             </a:r>
-            <a:pPr>
-              <a:lnSpc>
-                <a:spcPct val="140000"/>
-              </a:lnSpc>
-            </a:pPr>
             <a:r>
               <a:rPr lang="en-US" sz="1200" b="1" dirty="0">
                 <a:solidFill>
@@ -14745,11 +12513,6 @@
               </a:rPr>
               <a:t>120,000+ digital news articles</a:t>
             </a:r>
-            <a:pPr>
-              <a:lnSpc>
-                <a:spcPct val="140000"/>
-              </a:lnSpc>
-            </a:pPr>
             <a:r>
               <a:rPr lang="en-US" sz="1200" dirty="0">
                 <a:solidFill>
@@ -17529,7 +15292,6 @@
   </p:clrMapOvr>
   <p:transition>
     <p:fade/>
-    <p:spd val="med"/>
   </p:transition>
 </p:sld>
 </file>
@@ -17542,6 +15304,7 @@
         <a:solidFill>
           <a:srgbClr val="1A1D21"/>
         </a:solidFill>
+        <a:effectLst/>
       </p:bgPr>
     </p:bg>
     <p:spTree>
@@ -17560,17 +15323,17 @@
       </p:grpSpPr>
       <p:pic>
         <p:nvPicPr>
-          <p:cNvPr id="2" name="Image 0" descr="https://kimi-img.moonshot.cn/pub/slides/okc/5beqdm23l5qus/images/3_Abstract_Blue_Digital_Data_Analytics.png">    </p:cNvPr>
+          <p:cNvPr id="2" name="Image 0" descr="https://kimi-img.moonshot.cn/pub/slides/okc/5beqdm23l5qus/images/3_Abstract_Blue_Digital_Data_Analytics.png"/>
           <p:cNvPicPr>
             <a:picLocks noChangeAspect="1"/>
           </p:cNvPicPr>
           <p:nvPr/>
         </p:nvPicPr>
         <p:blipFill>
-          <a:blip r:embed="rId1">
+          <a:blip r:embed="rId3">
             <a:alphaModFix amt="30000"/>
           </a:blip>
-          <a:srcRect l="0" r="0" t="34656" b="34656"/>
+          <a:srcRect t="34656" b="34656"/>
           <a:stretch/>
         </p:blipFill>
         <p:spPr>
@@ -17601,7 +15364,7 @@
               <a:gd name="adj" fmla="val 0"/>
             </a:avLst>
           </a:prstGeom>
-          <a:gradFill rotWithShape="1" flip="none">
+          <a:gradFill flip="none" rotWithShape="1">
             <a:gsLst>
               <a:gs pos="0">
                 <a:srgbClr val="1A1D21">
@@ -17697,7 +15460,7 @@
               </a:lnSpc>
             </a:pPr>
             <a:r>
-              <a:rPr lang="en-US" sz="1200" b="1" spc="60" kern="0" dirty="0">
+              <a:rPr lang="en-US" sz="1200" b="1" kern="0" spc="60" dirty="0">
                 <a:solidFill>
                   <a:srgbClr val="6B7A8F"/>
                 </a:solidFill>
@@ -17843,7 +15606,6 @@
   </p:clrMapOvr>
   <p:transition>
     <p:fade/>
-    <p:spd val="med"/>
   </p:transition>
 </p:sld>
 </file>
@@ -17856,6 +15618,7 @@
         <a:solidFill>
           <a:srgbClr val="1A1D21"/>
         </a:solidFill>
+        <a:effectLst/>
       </p:bgPr>
     </p:bg>
     <p:spTree>
@@ -17899,7 +15662,7 @@
               </a:lnSpc>
             </a:pPr>
             <a:r>
-              <a:rPr lang="en-US" sz="1200" b="1" spc="60" kern="0" dirty="0">
+              <a:rPr lang="en-US" sz="1200" b="1" kern="0" spc="60" dirty="0">
                 <a:solidFill>
                   <a:srgbClr val="6B7A8F"/>
                 </a:solidFill>
@@ -17992,7 +15755,7 @@
               <a:gd name="adj" fmla="val 2058"/>
             </a:avLst>
           </a:prstGeom>
-          <a:gradFill rotWithShape="1" flip="none">
+          <a:gradFill flip="none" rotWithShape="1">
             <a:gsLst>
               <a:gs pos="0">
                 <a:srgbClr val="4A5568">
@@ -18333,11 +16096,6 @@
               </a:rPr>
               <a:t>DuckDB</a:t>
             </a:r>
-            <a:pPr>
-              <a:lnSpc>
-                <a:spcPct val="130000"/>
-              </a:lnSpc>
-            </a:pPr>
             <a:r>
               <a:rPr lang="en-US" sz="1200" dirty="0">
                 <a:solidFill>
@@ -18605,7 +16363,7 @@
               <a:gd name="adj" fmla="val 2058"/>
             </a:avLst>
           </a:prstGeom>
-          <a:gradFill rotWithShape="1" flip="none">
+          <a:gradFill flip="none" rotWithShape="1">
             <a:gsLst>
               <a:gs pos="0">
                 <a:srgbClr val="4A5568">
@@ -19633,7 +17391,7 @@
               <a:gd name="adj" fmla="val 2058"/>
             </a:avLst>
           </a:prstGeom>
-          <a:gradFill rotWithShape="1" flip="none">
+          <a:gradFill flip="none" rotWithShape="1">
             <a:gsLst>
               <a:gs pos="0">
                 <a:srgbClr val="4A5568">
@@ -20420,11 +18178,6 @@
               </a:rPr>
               <a:t>Key Innovation:</a:t>
             </a:r>
-            <a:pPr>
-              <a:lnSpc>
-                <a:spcPct val="130000"/>
-              </a:lnSpc>
-            </a:pPr>
             <a:r>
               <a:rPr lang="en-US" sz="1200" dirty="0">
                 <a:solidFill>
@@ -20449,7 +18202,6 @@
   </p:clrMapOvr>
   <p:transition>
     <p:fade/>
-    <p:spd val="med"/>
   </p:transition>
 </p:sld>
 </file>
@@ -20462,6 +18214,7 @@
         <a:solidFill>
           <a:srgbClr val="1A1D21"/>
         </a:solidFill>
+        <a:effectLst/>
       </p:bgPr>
     </p:bg>
     <p:spTree>
@@ -20505,7 +18258,7 @@
               </a:lnSpc>
             </a:pPr>
             <a:r>
-              <a:rPr lang="en-US" sz="1200" b="1" spc="60" kern="0" dirty="0">
+              <a:rPr lang="en-US" sz="1200" b="1" kern="0" spc="60" dirty="0">
                 <a:solidFill>
                   <a:srgbClr val="6B7A8F"/>
                 </a:solidFill>
@@ -21759,7 +19512,7 @@
               <a:gd name="adj" fmla="val 1880"/>
             </a:avLst>
           </a:prstGeom>
-          <a:gradFill rotWithShape="1" flip="none">
+          <a:gradFill flip="none" rotWithShape="1">
             <a:gsLst>
               <a:gs pos="0">
                 <a:srgbClr val="D4A26A">
@@ -22144,11 +19897,6 @@
               </a:rPr>
               <a:t>Mathematically combines rankings from both indices using RRF formula with </a:t>
             </a:r>
-            <a:pPr>
-              <a:lnSpc>
-                <a:spcPct val="130000"/>
-              </a:lnSpc>
-            </a:pPr>
             <a:r>
               <a:rPr lang="en-US" sz="1200" b="1" dirty="0">
                 <a:solidFill>
@@ -23524,2017 +21272,11 @@
   </p:clrMapOvr>
   <p:transition>
     <p:fade/>
-    <p:spd val="med"/>
   </p:transition>
 </p:sld>
 </file>
 
 <file path=ppt/slides/slide8.xml><?xml version="1.0" encoding="utf-8"?>
-<p:sld xmlns:a="http://schemas.openxmlformats.org/drawingml/2006/main" xmlns:r="http://schemas.openxmlformats.org/officeDocument/2006/relationships" xmlns:p="http://schemas.openxmlformats.org/presentationml/2006/main">
-  <p:cSld name="Slide 8">
-    <p:bg>
-      <p:bgPr>
-        <a:solidFill>
-          <a:srgbClr val="1A1D21"/>
-        </a:solidFill>
-      </p:bgPr>
-    </p:bg>
-    <p:spTree>
-      <p:nvGrpSpPr>
-        <p:cNvPr id="1" name=""/>
-        <p:cNvGrpSpPr/>
-        <p:nvPr/>
-      </p:nvGrpSpPr>
-      <p:grpSpPr>
-        <a:xfrm>
-          <a:off x="0" y="0"/>
-          <a:ext cx="0" cy="0"/>
-          <a:chOff x="0" y="0"/>
-          <a:chExt cx="0" cy="0"/>
-        </a:xfrm>
-      </p:grpSpPr>
-      <p:sp>
-        <p:nvSpPr>
-          <p:cNvPr id="2" name="Text 0"/>
-          <p:cNvSpPr/>
-          <p:nvPr/>
-        </p:nvSpPr>
-        <p:spPr>
-          <a:xfrm>
-            <a:off x="381000" y="381000"/>
-            <a:ext cx="11506200" cy="228600"/>
-          </a:xfrm>
-          <a:prstGeom prst="rect">
-            <a:avLst/>
-          </a:prstGeom>
-          <a:noFill/>
-          <a:ln/>
-        </p:spPr>
-        <p:txBody>
-          <a:bodyPr wrap="square" lIns="0" tIns="0" rIns="0" bIns="0" rtlCol="0" anchor="ctr"/>
-          <a:lstStyle/>
-          <a:p>
-            <a:pPr>
-              <a:lnSpc>
-                <a:spcPct val="130000"/>
-              </a:lnSpc>
-            </a:pPr>
-            <a:r>
-              <a:rPr lang="en-US" sz="1200" b="1" spc="60" kern="0" dirty="0">
-                <a:solidFill>
-                  <a:srgbClr val="6B7A8F"/>
-                </a:solidFill>
-                <a:latin typeface="Liter" pitchFamily="34" charset="0"/>
-                <a:ea typeface="Liter" pitchFamily="34" charset="-122"/>
-                <a:cs typeface="Liter" pitchFamily="34" charset="-120"/>
-              </a:rPr>
-              <a:t>SYSTEM ARCHITECTURE</a:t>
-            </a:r>
-            <a:endParaRPr lang="en-US" sz="1600" dirty="0"/>
-          </a:p>
-        </p:txBody>
-      </p:sp>
-      <p:sp>
-        <p:nvSpPr>
-          <p:cNvPr id="3" name="Text 1"/>
-          <p:cNvSpPr/>
-          <p:nvPr/>
-        </p:nvSpPr>
-        <p:spPr>
-          <a:xfrm>
-            <a:off x="381000" y="685800"/>
-            <a:ext cx="11601450" cy="381000"/>
-          </a:xfrm>
-          <a:prstGeom prst="rect">
-            <a:avLst/>
-          </a:prstGeom>
-          <a:noFill/>
-          <a:ln/>
-        </p:spPr>
-        <p:txBody>
-          <a:bodyPr wrap="square" lIns="0" tIns="0" rIns="0" bIns="0" rtlCol="0" anchor="ctr"/>
-          <a:lstStyle/>
-          <a:p>
-            <a:pPr>
-              <a:lnSpc>
-                <a:spcPct val="90000"/>
-              </a:lnSpc>
-            </a:pPr>
-            <a:r>
-              <a:rPr lang="en-US" sz="2700" b="1" dirty="0">
-                <a:solidFill>
-                  <a:srgbClr val="E2E8F0"/>
-                </a:solidFill>
-                <a:latin typeface="Liter" pitchFamily="34" charset="0"/>
-                <a:ea typeface="Liter" pitchFamily="34" charset="-122"/>
-                <a:cs typeface="Liter" pitchFamily="34" charset="-120"/>
-              </a:rPr>
-              <a:t>Generative AI Explainability Integration</a:t>
-            </a:r>
-            <a:endParaRPr lang="en-US" sz="1600" dirty="0"/>
-          </a:p>
-        </p:txBody>
-      </p:sp>
-      <p:sp>
-        <p:nvSpPr>
-          <p:cNvPr id="4" name="Shape 2"/>
-          <p:cNvSpPr/>
-          <p:nvPr/>
-        </p:nvSpPr>
-        <p:spPr>
-          <a:xfrm>
-            <a:off x="381000" y="1181100"/>
-            <a:ext cx="914400" cy="38100"/>
-          </a:xfrm>
-          <a:prstGeom prst="roundRect">
-            <a:avLst>
-              <a:gd name="adj" fmla="val 0"/>
-            </a:avLst>
-          </a:prstGeom>
-          <a:solidFill>
-            <a:srgbClr val="6B7A8F"/>
-          </a:solidFill>
-          <a:ln/>
-        </p:spPr>
-      </p:sp>
-      <p:sp>
-        <p:nvSpPr>
-          <p:cNvPr id="5" name="Shape 3"/>
-          <p:cNvSpPr/>
-          <p:nvPr/>
-        </p:nvSpPr>
-        <p:spPr>
-          <a:xfrm>
-            <a:off x="384810" y="1375410"/>
-            <a:ext cx="6789420" cy="1550670"/>
-          </a:xfrm>
-          <a:prstGeom prst="roundRect">
-            <a:avLst>
-              <a:gd name="adj" fmla="val 4914"/>
-            </a:avLst>
-          </a:prstGeom>
-          <a:solidFill>
-            <a:srgbClr val="4A5568">
-              <a:alpha val="14902"/>
-            </a:srgbClr>
-          </a:solidFill>
-          <a:ln w="10160">
-            <a:solidFill>
-              <a:srgbClr val="D4A26A">
-                <a:alpha val="30196"/>
-              </a:srgbClr>
-            </a:solidFill>
-            <a:prstDash val="solid"/>
-          </a:ln>
-        </p:spPr>
-      </p:sp>
-      <p:sp>
-        <p:nvSpPr>
-          <p:cNvPr id="6" name="Shape 4"/>
-          <p:cNvSpPr/>
-          <p:nvPr/>
-        </p:nvSpPr>
-        <p:spPr>
-          <a:xfrm>
-            <a:off x="541020" y="1531623"/>
-            <a:ext cx="381000" cy="381000"/>
-          </a:xfrm>
-          <a:prstGeom prst="roundRect">
-            <a:avLst>
-              <a:gd name="adj" fmla="val 20000"/>
-            </a:avLst>
-          </a:prstGeom>
-          <a:solidFill>
-            <a:srgbClr val="D4A26A">
-              <a:alpha val="20000"/>
-            </a:srgbClr>
-          </a:solidFill>
-          <a:ln/>
-        </p:spPr>
-      </p:sp>
-      <p:sp>
-        <p:nvSpPr>
-          <p:cNvPr id="7" name="Shape 5"/>
-          <p:cNvSpPr/>
-          <p:nvPr/>
-        </p:nvSpPr>
-        <p:spPr>
-          <a:xfrm>
-            <a:off x="636270" y="1626873"/>
-            <a:ext cx="190500" cy="190500"/>
-          </a:xfrm>
-          <a:custGeom>
-            <a:avLst/>
-            <a:gdLst/>
-            <a:ahLst/>
-            <a:cxnLst/>
-            <a:rect l="l" t="t" r="r" b="b"/>
-            <a:pathLst>
-              <a:path w="190500" h="190500">
-                <a:moveTo>
-                  <a:pt x="95250" y="0"/>
-                </a:moveTo>
-                <a:cubicBezTo>
-                  <a:pt x="100719" y="0"/>
-                  <a:pt x="105742" y="3014"/>
-                  <a:pt x="108347" y="7813"/>
-                </a:cubicBezTo>
-                <a:lnTo>
-                  <a:pt x="188714" y="156642"/>
-                </a:lnTo>
-                <a:cubicBezTo>
-                  <a:pt x="191207" y="161255"/>
-                  <a:pt x="191095" y="166836"/>
-                  <a:pt x="188416" y="171338"/>
-                </a:cubicBezTo>
-                <a:cubicBezTo>
-                  <a:pt x="185737" y="175840"/>
-                  <a:pt x="180863" y="178594"/>
-                  <a:pt x="175617" y="178594"/>
-                </a:cubicBezTo>
-                <a:lnTo>
-                  <a:pt x="14883" y="178594"/>
-                </a:lnTo>
-                <a:cubicBezTo>
-                  <a:pt x="9637" y="178594"/>
-                  <a:pt x="4800" y="175840"/>
-                  <a:pt x="2084" y="171338"/>
-                </a:cubicBezTo>
-                <a:cubicBezTo>
-                  <a:pt x="-633" y="166836"/>
-                  <a:pt x="-707" y="161255"/>
-                  <a:pt x="1786" y="156642"/>
-                </a:cubicBezTo>
-                <a:lnTo>
-                  <a:pt x="82153" y="7813"/>
-                </a:lnTo>
-                <a:cubicBezTo>
-                  <a:pt x="84758" y="3014"/>
-                  <a:pt x="89781" y="0"/>
-                  <a:pt x="95250" y="0"/>
-                </a:cubicBezTo>
-                <a:close/>
-                <a:moveTo>
-                  <a:pt x="95250" y="62508"/>
-                </a:moveTo>
-                <a:cubicBezTo>
-                  <a:pt x="90301" y="62508"/>
-                  <a:pt x="86320" y="66489"/>
-                  <a:pt x="86320" y="71438"/>
-                </a:cubicBezTo>
-                <a:lnTo>
-                  <a:pt x="86320" y="113109"/>
-                </a:lnTo>
-                <a:cubicBezTo>
-                  <a:pt x="86320" y="118058"/>
-                  <a:pt x="90301" y="122039"/>
-                  <a:pt x="95250" y="122039"/>
-                </a:cubicBezTo>
-                <a:cubicBezTo>
-                  <a:pt x="100199" y="122039"/>
-                  <a:pt x="104180" y="118058"/>
-                  <a:pt x="104180" y="113109"/>
-                </a:cubicBezTo>
-                <a:lnTo>
-                  <a:pt x="104180" y="71438"/>
-                </a:lnTo>
-                <a:cubicBezTo>
-                  <a:pt x="104180" y="66489"/>
-                  <a:pt x="100199" y="62508"/>
-                  <a:pt x="95250" y="62508"/>
-                </a:cubicBezTo>
-                <a:close/>
-                <a:moveTo>
-                  <a:pt x="105184" y="142875"/>
-                </a:moveTo>
-                <a:cubicBezTo>
-                  <a:pt x="105410" y="139188"/>
-                  <a:pt x="103571" y="135679"/>
-                  <a:pt x="100410" y="133767"/>
-                </a:cubicBezTo>
-                <a:cubicBezTo>
-                  <a:pt x="97249" y="131855"/>
-                  <a:pt x="93288" y="131855"/>
-                  <a:pt x="90127" y="133767"/>
-                </a:cubicBezTo>
-                <a:cubicBezTo>
-                  <a:pt x="86966" y="135679"/>
-                  <a:pt x="85127" y="139188"/>
-                  <a:pt x="85353" y="142875"/>
-                </a:cubicBezTo>
-                <a:cubicBezTo>
-                  <a:pt x="85127" y="146562"/>
-                  <a:pt x="86966" y="150071"/>
-                  <a:pt x="90127" y="151983"/>
-                </a:cubicBezTo>
-                <a:cubicBezTo>
-                  <a:pt x="93288" y="153895"/>
-                  <a:pt x="97249" y="153895"/>
-                  <a:pt x="100410" y="151983"/>
-                </a:cubicBezTo>
-                <a:cubicBezTo>
-                  <a:pt x="103571" y="150071"/>
-                  <a:pt x="105410" y="146562"/>
-                  <a:pt x="105184" y="142875"/>
-                </a:cubicBezTo>
-                <a:close/>
-              </a:path>
-            </a:pathLst>
-          </a:custGeom>
-          <a:solidFill>
-            <a:srgbClr val="D4A26A"/>
-          </a:solidFill>
-          <a:ln/>
-        </p:spPr>
-      </p:sp>
-      <p:sp>
-        <p:nvSpPr>
-          <p:cNvPr id="8" name="Text 6"/>
-          <p:cNvSpPr/>
-          <p:nvPr/>
-        </p:nvSpPr>
-        <p:spPr>
-          <a:xfrm>
-            <a:off x="1036320" y="1588773"/>
-            <a:ext cx="1162050" cy="266700"/>
-          </a:xfrm>
-          <a:prstGeom prst="rect">
-            <a:avLst/>
-          </a:prstGeom>
-          <a:noFill/>
-          <a:ln/>
-        </p:spPr>
-        <p:txBody>
-          <a:bodyPr wrap="square" lIns="0" tIns="0" rIns="0" bIns="0" rtlCol="0" anchor="ctr"/>
-          <a:lstStyle/>
-          <a:p>
-            <a:pPr>
-              <a:lnSpc>
-                <a:spcPct val="120000"/>
-              </a:lnSpc>
-            </a:pPr>
-            <a:r>
-              <a:rPr lang="en-US" sz="1500" b="1" dirty="0">
-                <a:solidFill>
-                  <a:srgbClr val="E2E8F0"/>
-                </a:solidFill>
-                <a:latin typeface="Liter" pitchFamily="34" charset="0"/>
-                <a:ea typeface="Liter" pitchFamily="34" charset="-122"/>
-                <a:cs typeface="Liter" pitchFamily="34" charset="-120"/>
-              </a:rPr>
-              <a:t>The Problem</a:t>
-            </a:r>
-            <a:endParaRPr lang="en-US" sz="1600" dirty="0"/>
-          </a:p>
-        </p:txBody>
-      </p:sp>
-      <p:sp>
-        <p:nvSpPr>
-          <p:cNvPr id="9" name="Text 7"/>
-          <p:cNvSpPr/>
-          <p:nvPr/>
-        </p:nvSpPr>
-        <p:spPr>
-          <a:xfrm>
-            <a:off x="541020" y="2026923"/>
-            <a:ext cx="6553200" cy="742950"/>
-          </a:xfrm>
-          <a:prstGeom prst="rect">
-            <a:avLst/>
-          </a:prstGeom>
-          <a:noFill/>
-          <a:ln/>
-        </p:spPr>
-        <p:txBody>
-          <a:bodyPr wrap="square" lIns="0" tIns="0" rIns="0" bIns="0" rtlCol="0" anchor="ctr"/>
-          <a:lstStyle/>
-          <a:p>
-            <a:pPr>
-              <a:lnSpc>
-                <a:spcPct val="140000"/>
-              </a:lnSpc>
-            </a:pPr>
-            <a:r>
-              <a:rPr lang="en-US" sz="1200" dirty="0">
-                <a:solidFill>
-                  <a:srgbClr val="E2E8F0">
-                    <a:alpha val="80000"/>
-                  </a:srgbClr>
-                </a:solidFill>
-                <a:latin typeface="Quattrocento Sans" pitchFamily="34" charset="0"/>
-                <a:ea typeface="Quattrocento Sans" pitchFamily="34" charset="-122"/>
-                <a:cs typeface="Quattrocento Sans" pitchFamily="34" charset="-120"/>
-              </a:rPr>
-              <a:t>Standard IR systems return a list of links — </a:t>
-            </a:r>
-            <a:pPr>
-              <a:lnSpc>
-                <a:spcPct val="140000"/>
-              </a:lnSpc>
-            </a:pPr>
-            <a:r>
-              <a:rPr lang="en-US" sz="1200" b="1" dirty="0">
-                <a:solidFill>
-                  <a:srgbClr val="D4A26A"/>
-                </a:solidFill>
-                <a:latin typeface="Quattrocento Sans" pitchFamily="34" charset="0"/>
-                <a:ea typeface="Quattrocento Sans" pitchFamily="34" charset="-122"/>
-                <a:cs typeface="Quattrocento Sans" pitchFamily="34" charset="-120"/>
-              </a:rPr>
-              <a:t>users still have to read through them</a:t>
-            </a:r>
-            <a:pPr>
-              <a:lnSpc>
-                <a:spcPct val="140000"/>
-              </a:lnSpc>
-            </a:pPr>
-            <a:r>
-              <a:rPr lang="en-US" sz="1200" dirty="0">
-                <a:solidFill>
-                  <a:srgbClr val="E2E8F0">
-                    <a:alpha val="80000"/>
-                  </a:srgbClr>
-                </a:solidFill>
-                <a:latin typeface="Quattrocento Sans" pitchFamily="34" charset="0"/>
-                <a:ea typeface="Quattrocento Sans" pitchFamily="34" charset="-122"/>
-                <a:cs typeface="Quattrocento Sans" pitchFamily="34" charset="-120"/>
-              </a:rPr>
-              <a:t>. No contextual explanation of why results match the query, leading to cognitive overload and reduced search efficiency.</a:t>
-            </a:r>
-            <a:endParaRPr lang="en-US" sz="1600" dirty="0"/>
-          </a:p>
-        </p:txBody>
-      </p:sp>
-      <p:sp>
-        <p:nvSpPr>
-          <p:cNvPr id="10" name="Shape 8"/>
-          <p:cNvSpPr/>
-          <p:nvPr/>
-        </p:nvSpPr>
-        <p:spPr>
-          <a:xfrm>
-            <a:off x="388620" y="3089911"/>
-            <a:ext cx="6777990" cy="3444240"/>
-          </a:xfrm>
-          <a:prstGeom prst="roundRect">
-            <a:avLst>
-              <a:gd name="adj" fmla="val 2212"/>
-            </a:avLst>
-          </a:prstGeom>
-          <a:gradFill rotWithShape="1" flip="none">
-            <a:gsLst>
-              <a:gs pos="0">
-                <a:srgbClr val="D4A26A">
-                  <a:alpha val="20000"/>
-                </a:srgbClr>
-              </a:gs>
-              <a:gs pos="100000">
-                <a:srgbClr val="6B7A8F">
-                  <a:alpha val="20000"/>
-                </a:srgbClr>
-              </a:gs>
-            </a:gsLst>
-            <a:lin ang="2700000" scaled="1"/>
-          </a:gradFill>
-          <a:ln w="20320">
-            <a:solidFill>
-              <a:srgbClr val="D4A26A"/>
-            </a:solidFill>
-            <a:prstDash val="solid"/>
-          </a:ln>
-        </p:spPr>
-      </p:sp>
-      <p:sp>
-        <p:nvSpPr>
-          <p:cNvPr id="11" name="Shape 9"/>
-          <p:cNvSpPr/>
-          <p:nvPr/>
-        </p:nvSpPr>
-        <p:spPr>
-          <a:xfrm>
-            <a:off x="548640" y="3249932"/>
-            <a:ext cx="381000" cy="381000"/>
-          </a:xfrm>
-          <a:prstGeom prst="roundRect">
-            <a:avLst>
-              <a:gd name="adj" fmla="val 20000"/>
-            </a:avLst>
-          </a:prstGeom>
-          <a:solidFill>
-            <a:srgbClr val="D4A26A"/>
-          </a:solidFill>
-          <a:ln/>
-        </p:spPr>
-      </p:sp>
-      <p:sp>
-        <p:nvSpPr>
-          <p:cNvPr id="12" name="Shape 10"/>
-          <p:cNvSpPr/>
-          <p:nvPr/>
-        </p:nvSpPr>
-        <p:spPr>
-          <a:xfrm>
-            <a:off x="667702" y="3345182"/>
-            <a:ext cx="142875" cy="190500"/>
-          </a:xfrm>
-          <a:custGeom>
-            <a:avLst/>
-            <a:gdLst/>
-            <a:ahLst/>
-            <a:cxnLst/>
-            <a:rect l="l" t="t" r="r" b="b"/>
-            <a:pathLst>
-              <a:path w="142875" h="190500">
-                <a:moveTo>
-                  <a:pt x="108979" y="142875"/>
-                </a:moveTo>
-                <a:cubicBezTo>
-                  <a:pt x="111696" y="134578"/>
-                  <a:pt x="117128" y="127062"/>
-                  <a:pt x="123267" y="120588"/>
-                </a:cubicBezTo>
-                <a:cubicBezTo>
-                  <a:pt x="135434" y="107789"/>
-                  <a:pt x="142875" y="90488"/>
-                  <a:pt x="142875" y="71438"/>
-                </a:cubicBezTo>
-                <a:cubicBezTo>
-                  <a:pt x="142875" y="31998"/>
-                  <a:pt x="110877" y="0"/>
-                  <a:pt x="71437" y="0"/>
-                </a:cubicBezTo>
-                <a:cubicBezTo>
-                  <a:pt x="31998" y="0"/>
-                  <a:pt x="0" y="31998"/>
-                  <a:pt x="0" y="71438"/>
-                </a:cubicBezTo>
-                <a:cubicBezTo>
-                  <a:pt x="0" y="90488"/>
-                  <a:pt x="7441" y="107789"/>
-                  <a:pt x="19608" y="120588"/>
-                </a:cubicBezTo>
-                <a:cubicBezTo>
-                  <a:pt x="25747" y="127062"/>
-                  <a:pt x="31217" y="134578"/>
-                  <a:pt x="33896" y="142875"/>
-                </a:cubicBezTo>
-                <a:lnTo>
-                  <a:pt x="108942" y="142875"/>
-                </a:lnTo>
-                <a:close/>
-                <a:moveTo>
-                  <a:pt x="107156" y="160734"/>
-                </a:moveTo>
-                <a:lnTo>
-                  <a:pt x="35719" y="160734"/>
-                </a:lnTo>
-                <a:lnTo>
-                  <a:pt x="35719" y="166688"/>
-                </a:lnTo>
-                <a:cubicBezTo>
-                  <a:pt x="35719" y="183133"/>
-                  <a:pt x="49039" y="196453"/>
-                  <a:pt x="65484" y="196453"/>
-                </a:cubicBezTo>
-                <a:lnTo>
-                  <a:pt x="77391" y="196453"/>
-                </a:lnTo>
-                <a:cubicBezTo>
-                  <a:pt x="93836" y="196453"/>
-                  <a:pt x="107156" y="183133"/>
-                  <a:pt x="107156" y="166688"/>
-                </a:cubicBezTo>
-                <a:lnTo>
-                  <a:pt x="107156" y="160734"/>
-                </a:lnTo>
-                <a:close/>
-                <a:moveTo>
-                  <a:pt x="68461" y="41672"/>
-                </a:moveTo>
-                <a:cubicBezTo>
-                  <a:pt x="53653" y="41672"/>
-                  <a:pt x="41672" y="53653"/>
-                  <a:pt x="41672" y="68461"/>
-                </a:cubicBezTo>
-                <a:cubicBezTo>
-                  <a:pt x="41672" y="73409"/>
-                  <a:pt x="37691" y="77391"/>
-                  <a:pt x="32742" y="77391"/>
-                </a:cubicBezTo>
-                <a:cubicBezTo>
-                  <a:pt x="27794" y="77391"/>
-                  <a:pt x="23812" y="73409"/>
-                  <a:pt x="23812" y="68461"/>
-                </a:cubicBezTo>
-                <a:cubicBezTo>
-                  <a:pt x="23812" y="43793"/>
-                  <a:pt x="43793" y="23812"/>
-                  <a:pt x="68461" y="23812"/>
-                </a:cubicBezTo>
-                <a:cubicBezTo>
-                  <a:pt x="73409" y="23812"/>
-                  <a:pt x="77391" y="27794"/>
-                  <a:pt x="77391" y="32742"/>
-                </a:cubicBezTo>
-                <a:cubicBezTo>
-                  <a:pt x="77391" y="37691"/>
-                  <a:pt x="73409" y="41672"/>
-                  <a:pt x="68461" y="41672"/>
-                </a:cubicBezTo>
-                <a:close/>
-              </a:path>
-            </a:pathLst>
-          </a:custGeom>
-          <a:solidFill>
-            <a:srgbClr val="1A1D21"/>
-          </a:solidFill>
-          <a:ln/>
-        </p:spPr>
-      </p:sp>
-      <p:sp>
-        <p:nvSpPr>
-          <p:cNvPr id="13" name="Text 11"/>
-          <p:cNvSpPr/>
-          <p:nvPr/>
-        </p:nvSpPr>
-        <p:spPr>
-          <a:xfrm>
-            <a:off x="1043940" y="3307082"/>
-            <a:ext cx="1133475" cy="266700"/>
-          </a:xfrm>
-          <a:prstGeom prst="rect">
-            <a:avLst/>
-          </a:prstGeom>
-          <a:noFill/>
-          <a:ln/>
-        </p:spPr>
-        <p:txBody>
-          <a:bodyPr wrap="square" lIns="0" tIns="0" rIns="0" bIns="0" rtlCol="0" anchor="ctr"/>
-          <a:lstStyle/>
-          <a:p>
-            <a:pPr>
-              <a:lnSpc>
-                <a:spcPct val="120000"/>
-              </a:lnSpc>
-            </a:pPr>
-            <a:r>
-              <a:rPr lang="en-US" sz="1500" b="1" dirty="0">
-                <a:solidFill>
-                  <a:srgbClr val="D4A26A"/>
-                </a:solidFill>
-                <a:latin typeface="Liter" pitchFamily="34" charset="0"/>
-                <a:ea typeface="Liter" pitchFamily="34" charset="-122"/>
-                <a:cs typeface="Liter" pitchFamily="34" charset="-120"/>
-              </a:rPr>
-              <a:t>Our Solution</a:t>
-            </a:r>
-            <a:endParaRPr lang="en-US" sz="1600" dirty="0"/>
-          </a:p>
-        </p:txBody>
-      </p:sp>
-      <p:sp>
-        <p:nvSpPr>
-          <p:cNvPr id="14" name="Shape 12"/>
-          <p:cNvSpPr/>
-          <p:nvPr/>
-        </p:nvSpPr>
-        <p:spPr>
-          <a:xfrm>
-            <a:off x="548640" y="3783332"/>
-            <a:ext cx="304800" cy="304800"/>
-          </a:xfrm>
-          <a:prstGeom prst="roundRect">
-            <a:avLst>
-              <a:gd name="adj" fmla="val 50000"/>
-            </a:avLst>
-          </a:prstGeom>
-          <a:solidFill>
-            <a:srgbClr val="D4A26A">
-              <a:alpha val="20000"/>
-            </a:srgbClr>
-          </a:solidFill>
-          <a:ln/>
-        </p:spPr>
-      </p:sp>
-      <p:sp>
-        <p:nvSpPr>
-          <p:cNvPr id="15" name="Text 13"/>
-          <p:cNvSpPr/>
-          <p:nvPr/>
-        </p:nvSpPr>
-        <p:spPr>
-          <a:xfrm>
-            <a:off x="674370" y="3840482"/>
-            <a:ext cx="123825" cy="190500"/>
-          </a:xfrm>
-          <a:prstGeom prst="rect">
-            <a:avLst/>
-          </a:prstGeom>
-          <a:noFill/>
-          <a:ln/>
-        </p:spPr>
-        <p:txBody>
-          <a:bodyPr wrap="square" lIns="0" tIns="0" rIns="0" bIns="0" rtlCol="0" anchor="ctr"/>
-          <a:lstStyle/>
-          <a:p>
-            <a:pPr>
-              <a:lnSpc>
-                <a:spcPct val="120000"/>
-              </a:lnSpc>
-            </a:pPr>
-            <a:r>
-              <a:rPr lang="en-US" sz="1050" b="1" dirty="0">
-                <a:solidFill>
-                  <a:srgbClr val="D4A26A"/>
-                </a:solidFill>
-                <a:latin typeface="Liter" pitchFamily="34" charset="0"/>
-                <a:ea typeface="Liter" pitchFamily="34" charset="-122"/>
-                <a:cs typeface="Liter" pitchFamily="34" charset="-120"/>
-              </a:rPr>
-              <a:t>1</a:t>
-            </a:r>
-            <a:endParaRPr lang="en-US" sz="1600" dirty="0"/>
-          </a:p>
-        </p:txBody>
-      </p:sp>
-      <p:sp>
-        <p:nvSpPr>
-          <p:cNvPr id="16" name="Text 14"/>
-          <p:cNvSpPr/>
-          <p:nvPr/>
-        </p:nvSpPr>
-        <p:spPr>
-          <a:xfrm>
-            <a:off x="967740" y="3745232"/>
-            <a:ext cx="4248150" cy="228600"/>
-          </a:xfrm>
-          <a:prstGeom prst="rect">
-            <a:avLst/>
-          </a:prstGeom>
-          <a:noFill/>
-          <a:ln/>
-        </p:spPr>
-        <p:txBody>
-          <a:bodyPr wrap="square" lIns="0" tIns="0" rIns="0" bIns="0" rtlCol="0" anchor="ctr"/>
-          <a:lstStyle/>
-          <a:p>
-            <a:pPr>
-              <a:lnSpc>
-                <a:spcPct val="130000"/>
-              </a:lnSpc>
-            </a:pPr>
-            <a:r>
-              <a:rPr lang="en-US" sz="1200" b="1" dirty="0">
-                <a:solidFill>
-                  <a:srgbClr val="E2E8F0"/>
-                </a:solidFill>
-                <a:latin typeface="Liter" pitchFamily="34" charset="0"/>
-                <a:ea typeface="Liter" pitchFamily="34" charset="-122"/>
-                <a:cs typeface="Liter" pitchFamily="34" charset="-120"/>
-              </a:rPr>
-              <a:t>Intercept Top 5 Results</a:t>
-            </a:r>
-            <a:endParaRPr lang="en-US" sz="1600" dirty="0"/>
-          </a:p>
-        </p:txBody>
-      </p:sp>
-      <p:sp>
-        <p:nvSpPr>
-          <p:cNvPr id="17" name="Text 15"/>
-          <p:cNvSpPr/>
-          <p:nvPr/>
-        </p:nvSpPr>
-        <p:spPr>
-          <a:xfrm>
-            <a:off x="967740" y="4011932"/>
-            <a:ext cx="4248150" cy="228600"/>
-          </a:xfrm>
-          <a:prstGeom prst="rect">
-            <a:avLst/>
-          </a:prstGeom>
-          <a:noFill/>
-          <a:ln/>
-        </p:spPr>
-        <p:txBody>
-          <a:bodyPr wrap="square" lIns="0" tIns="0" rIns="0" bIns="0" rtlCol="0" anchor="ctr"/>
-          <a:lstStyle/>
-          <a:p>
-            <a:pPr>
-              <a:lnSpc>
-                <a:spcPct val="130000"/>
-              </a:lnSpc>
-            </a:pPr>
-            <a:r>
-              <a:rPr lang="en-US" sz="1200" dirty="0">
-                <a:solidFill>
-                  <a:srgbClr val="E2E8F0">
-                    <a:alpha val="70000"/>
-                  </a:srgbClr>
-                </a:solidFill>
-                <a:latin typeface="Quattrocento Sans" pitchFamily="34" charset="0"/>
-                <a:ea typeface="Quattrocento Sans" pitchFamily="34" charset="-122"/>
-                <a:cs typeface="Quattrocento Sans" pitchFamily="34" charset="-120"/>
-              </a:rPr>
-              <a:t>System captures the highest-ranked articles from hybrid search</a:t>
-            </a:r>
-            <a:endParaRPr lang="en-US" sz="1600" dirty="0"/>
-          </a:p>
-        </p:txBody>
-      </p:sp>
-      <p:sp>
-        <p:nvSpPr>
-          <p:cNvPr id="18" name="Shape 16"/>
-          <p:cNvSpPr/>
-          <p:nvPr/>
-        </p:nvSpPr>
-        <p:spPr>
-          <a:xfrm>
-            <a:off x="548640" y="4392932"/>
-            <a:ext cx="304800" cy="304800"/>
-          </a:xfrm>
-          <a:prstGeom prst="roundRect">
-            <a:avLst>
-              <a:gd name="adj" fmla="val 50000"/>
-            </a:avLst>
-          </a:prstGeom>
-          <a:solidFill>
-            <a:srgbClr val="D4A26A">
-              <a:alpha val="20000"/>
-            </a:srgbClr>
-          </a:solidFill>
-          <a:ln/>
-        </p:spPr>
-      </p:sp>
-      <p:sp>
-        <p:nvSpPr>
-          <p:cNvPr id="19" name="Text 17"/>
-          <p:cNvSpPr/>
-          <p:nvPr/>
-        </p:nvSpPr>
-        <p:spPr>
-          <a:xfrm>
-            <a:off x="662226" y="4450082"/>
-            <a:ext cx="142875" cy="190500"/>
-          </a:xfrm>
-          <a:prstGeom prst="rect">
-            <a:avLst/>
-          </a:prstGeom>
-          <a:noFill/>
-          <a:ln/>
-        </p:spPr>
-        <p:txBody>
-          <a:bodyPr wrap="square" lIns="0" tIns="0" rIns="0" bIns="0" rtlCol="0" anchor="ctr"/>
-          <a:lstStyle/>
-          <a:p>
-            <a:pPr>
-              <a:lnSpc>
-                <a:spcPct val="120000"/>
-              </a:lnSpc>
-            </a:pPr>
-            <a:r>
-              <a:rPr lang="en-US" sz="1050" b="1" dirty="0">
-                <a:solidFill>
-                  <a:srgbClr val="D4A26A"/>
-                </a:solidFill>
-                <a:latin typeface="Liter" pitchFamily="34" charset="0"/>
-                <a:ea typeface="Liter" pitchFamily="34" charset="-122"/>
-                <a:cs typeface="Liter" pitchFamily="34" charset="-120"/>
-              </a:rPr>
-              <a:t>2</a:t>
-            </a:r>
-            <a:endParaRPr lang="en-US" sz="1600" dirty="0"/>
-          </a:p>
-        </p:txBody>
-      </p:sp>
-      <p:sp>
-        <p:nvSpPr>
-          <p:cNvPr id="20" name="Text 18"/>
-          <p:cNvSpPr/>
-          <p:nvPr/>
-        </p:nvSpPr>
-        <p:spPr>
-          <a:xfrm>
-            <a:off x="967740" y="4354832"/>
-            <a:ext cx="4305300" cy="228600"/>
-          </a:xfrm>
-          <a:prstGeom prst="rect">
-            <a:avLst/>
-          </a:prstGeom>
-          <a:noFill/>
-          <a:ln/>
-        </p:spPr>
-        <p:txBody>
-          <a:bodyPr wrap="square" lIns="0" tIns="0" rIns="0" bIns="0" rtlCol="0" anchor="ctr"/>
-          <a:lstStyle/>
-          <a:p>
-            <a:pPr>
-              <a:lnSpc>
-                <a:spcPct val="130000"/>
-              </a:lnSpc>
-            </a:pPr>
-            <a:r>
-              <a:rPr lang="en-US" sz="1200" b="1" dirty="0">
-                <a:solidFill>
-                  <a:srgbClr val="E2E8F0"/>
-                </a:solidFill>
-                <a:latin typeface="Liter" pitchFamily="34" charset="0"/>
-                <a:ea typeface="Liter" pitchFamily="34" charset="-122"/>
-                <a:cs typeface="Liter" pitchFamily="34" charset="-120"/>
-              </a:rPr>
-              <a:t>Local LLM Processing</a:t>
-            </a:r>
-            <a:endParaRPr lang="en-US" sz="1600" dirty="0"/>
-          </a:p>
-        </p:txBody>
-      </p:sp>
-      <p:sp>
-        <p:nvSpPr>
-          <p:cNvPr id="21" name="Text 19"/>
-          <p:cNvSpPr/>
-          <p:nvPr/>
-        </p:nvSpPr>
-        <p:spPr>
-          <a:xfrm>
-            <a:off x="967740" y="4621532"/>
-            <a:ext cx="4305300" cy="228600"/>
-          </a:xfrm>
-          <a:prstGeom prst="rect">
-            <a:avLst/>
-          </a:prstGeom>
-          <a:noFill/>
-          <a:ln/>
-        </p:spPr>
-        <p:txBody>
-          <a:bodyPr wrap="square" lIns="0" tIns="0" rIns="0" bIns="0" rtlCol="0" anchor="ctr"/>
-          <a:lstStyle/>
-          <a:p>
-            <a:pPr>
-              <a:lnSpc>
-                <a:spcPct val="130000"/>
-              </a:lnSpc>
-            </a:pPr>
-            <a:r>
-              <a:rPr lang="en-US" sz="1200" dirty="0">
-                <a:solidFill>
-                  <a:srgbClr val="E2E8F0">
-                    <a:alpha val="70000"/>
-                  </a:srgbClr>
-                </a:solidFill>
-                <a:latin typeface="Quattrocento Sans" pitchFamily="34" charset="0"/>
-                <a:ea typeface="Quattrocento Sans" pitchFamily="34" charset="-122"/>
-                <a:cs typeface="Quattrocento Sans" pitchFamily="34" charset="-120"/>
-              </a:rPr>
-              <a:t>Passes through LM Studio (Mistral/Llama) for contextual analysis</a:t>
-            </a:r>
-            <a:endParaRPr lang="en-US" sz="1600" dirty="0"/>
-          </a:p>
-        </p:txBody>
-      </p:sp>
-      <p:sp>
-        <p:nvSpPr>
-          <p:cNvPr id="22" name="Shape 20"/>
-          <p:cNvSpPr/>
-          <p:nvPr/>
-        </p:nvSpPr>
-        <p:spPr>
-          <a:xfrm>
-            <a:off x="548640" y="5002532"/>
-            <a:ext cx="304800" cy="304800"/>
-          </a:xfrm>
-          <a:prstGeom prst="roundRect">
-            <a:avLst>
-              <a:gd name="adj" fmla="val 50000"/>
-            </a:avLst>
-          </a:prstGeom>
-          <a:solidFill>
-            <a:srgbClr val="D4A26A">
-              <a:alpha val="20000"/>
-            </a:srgbClr>
-          </a:solidFill>
-          <a:ln/>
-        </p:spPr>
-      </p:sp>
-      <p:sp>
-        <p:nvSpPr>
-          <p:cNvPr id="23" name="Text 21"/>
-          <p:cNvSpPr/>
-          <p:nvPr/>
-        </p:nvSpPr>
-        <p:spPr>
-          <a:xfrm>
-            <a:off x="661630" y="5059682"/>
-            <a:ext cx="142875" cy="190500"/>
-          </a:xfrm>
-          <a:prstGeom prst="rect">
-            <a:avLst/>
-          </a:prstGeom>
-          <a:noFill/>
-          <a:ln/>
-        </p:spPr>
-        <p:txBody>
-          <a:bodyPr wrap="square" lIns="0" tIns="0" rIns="0" bIns="0" rtlCol="0" anchor="ctr"/>
-          <a:lstStyle/>
-          <a:p>
-            <a:pPr>
-              <a:lnSpc>
-                <a:spcPct val="120000"/>
-              </a:lnSpc>
-            </a:pPr>
-            <a:r>
-              <a:rPr lang="en-US" sz="1050" b="1" dirty="0">
-                <a:solidFill>
-                  <a:srgbClr val="D4A26A"/>
-                </a:solidFill>
-                <a:latin typeface="Liter" pitchFamily="34" charset="0"/>
-                <a:ea typeface="Liter" pitchFamily="34" charset="-122"/>
-                <a:cs typeface="Liter" pitchFamily="34" charset="-120"/>
-              </a:rPr>
-              <a:t>3</a:t>
-            </a:r>
-            <a:endParaRPr lang="en-US" sz="1600" dirty="0"/>
-          </a:p>
-        </p:txBody>
-      </p:sp>
-      <p:sp>
-        <p:nvSpPr>
-          <p:cNvPr id="24" name="Text 22"/>
-          <p:cNvSpPr/>
-          <p:nvPr/>
-        </p:nvSpPr>
-        <p:spPr>
-          <a:xfrm>
-            <a:off x="967740" y="4964432"/>
-            <a:ext cx="4781550" cy="228600"/>
-          </a:xfrm>
-          <a:prstGeom prst="rect">
-            <a:avLst/>
-          </a:prstGeom>
-          <a:noFill/>
-          <a:ln/>
-        </p:spPr>
-        <p:txBody>
-          <a:bodyPr wrap="square" lIns="0" tIns="0" rIns="0" bIns="0" rtlCol="0" anchor="ctr"/>
-          <a:lstStyle/>
-          <a:p>
-            <a:pPr>
-              <a:lnSpc>
-                <a:spcPct val="130000"/>
-              </a:lnSpc>
-            </a:pPr>
-            <a:r>
-              <a:rPr lang="en-US" sz="1200" b="1" dirty="0">
-                <a:solidFill>
-                  <a:srgbClr val="E2E8F0"/>
-                </a:solidFill>
-                <a:latin typeface="Liter" pitchFamily="34" charset="0"/>
-                <a:ea typeface="Liter" pitchFamily="34" charset="-122"/>
-                <a:cs typeface="Liter" pitchFamily="34" charset="-120"/>
-              </a:rPr>
-              <a:t>AI-Generated Summary</a:t>
-            </a:r>
-            <a:endParaRPr lang="en-US" sz="1600" dirty="0"/>
-          </a:p>
-        </p:txBody>
-      </p:sp>
-      <p:sp>
-        <p:nvSpPr>
-          <p:cNvPr id="25" name="Text 23"/>
-          <p:cNvSpPr/>
-          <p:nvPr/>
-        </p:nvSpPr>
-        <p:spPr>
-          <a:xfrm>
-            <a:off x="967740" y="5231132"/>
-            <a:ext cx="4781550" cy="228600"/>
-          </a:xfrm>
-          <a:prstGeom prst="rect">
-            <a:avLst/>
-          </a:prstGeom>
-          <a:noFill/>
-          <a:ln/>
-        </p:spPr>
-        <p:txBody>
-          <a:bodyPr wrap="square" lIns="0" tIns="0" rIns="0" bIns="0" rtlCol="0" anchor="ctr"/>
-          <a:lstStyle/>
-          <a:p>
-            <a:pPr>
-              <a:lnSpc>
-                <a:spcPct val="130000"/>
-              </a:lnSpc>
-            </a:pPr>
-            <a:r>
-              <a:rPr lang="en-US" sz="1200" dirty="0">
-                <a:solidFill>
-                  <a:srgbClr val="E2E8F0">
-                    <a:alpha val="70000"/>
-                  </a:srgbClr>
-                </a:solidFill>
-                <a:latin typeface="Quattrocento Sans" pitchFamily="34" charset="0"/>
-                <a:ea typeface="Quattrocento Sans" pitchFamily="34" charset="-122"/>
-                <a:cs typeface="Quattrocento Sans" pitchFamily="34" charset="-120"/>
-              </a:rPr>
-              <a:t>Automatic summary placed at top explaining query-document matches</a:t>
-            </a:r>
-            <a:endParaRPr lang="en-US" sz="1600" dirty="0"/>
-          </a:p>
-        </p:txBody>
-      </p:sp>
-      <p:sp>
-        <p:nvSpPr>
-          <p:cNvPr id="26" name="Shape 24"/>
-          <p:cNvSpPr/>
-          <p:nvPr/>
-        </p:nvSpPr>
-        <p:spPr>
-          <a:xfrm>
-            <a:off x="7334250" y="1375410"/>
-            <a:ext cx="4474845" cy="3436620"/>
-          </a:xfrm>
-          <a:prstGeom prst="roundRect">
-            <a:avLst>
-              <a:gd name="adj" fmla="val 2217"/>
-            </a:avLst>
-          </a:prstGeom>
-          <a:solidFill>
-            <a:srgbClr val="4A5568">
-              <a:alpha val="14902"/>
-            </a:srgbClr>
-          </a:solidFill>
-          <a:ln w="10160">
-            <a:solidFill>
-              <a:srgbClr val="6B7A8F">
-                <a:alpha val="30196"/>
-              </a:srgbClr>
-            </a:solidFill>
-            <a:prstDash val="solid"/>
-          </a:ln>
-        </p:spPr>
-      </p:sp>
-      <p:sp>
-        <p:nvSpPr>
-          <p:cNvPr id="27" name="Shape 25"/>
-          <p:cNvSpPr/>
-          <p:nvPr/>
-        </p:nvSpPr>
-        <p:spPr>
-          <a:xfrm>
-            <a:off x="7514273" y="1579248"/>
-            <a:ext cx="171450" cy="171450"/>
-          </a:xfrm>
-          <a:custGeom>
-            <a:avLst/>
-            <a:gdLst/>
-            <a:ahLst/>
-            <a:cxnLst/>
-            <a:rect l="l" t="t" r="r" b="b"/>
-            <a:pathLst>
-              <a:path w="171450" h="171450">
-                <a:moveTo>
-                  <a:pt x="85725" y="0"/>
-                </a:moveTo>
-                <a:cubicBezTo>
-                  <a:pt x="87265" y="0"/>
-                  <a:pt x="88806" y="335"/>
-                  <a:pt x="90212" y="971"/>
-                </a:cubicBezTo>
-                <a:lnTo>
-                  <a:pt x="153300" y="27727"/>
-                </a:lnTo>
-                <a:cubicBezTo>
-                  <a:pt x="160667" y="30841"/>
-                  <a:pt x="166159" y="38107"/>
-                  <a:pt x="166126" y="46881"/>
-                </a:cubicBezTo>
-                <a:cubicBezTo>
-                  <a:pt x="165958" y="80099"/>
-                  <a:pt x="152296" y="140877"/>
-                  <a:pt x="94599" y="168503"/>
-                </a:cubicBezTo>
-                <a:cubicBezTo>
-                  <a:pt x="89007" y="171182"/>
-                  <a:pt x="82510" y="171182"/>
-                  <a:pt x="76918" y="168503"/>
-                </a:cubicBezTo>
-                <a:cubicBezTo>
-                  <a:pt x="19188" y="140877"/>
-                  <a:pt x="5559" y="80099"/>
-                  <a:pt x="5391" y="46881"/>
-                </a:cubicBezTo>
-                <a:cubicBezTo>
-                  <a:pt x="5358" y="38107"/>
-                  <a:pt x="10850" y="30841"/>
-                  <a:pt x="18217" y="27727"/>
-                </a:cubicBezTo>
-                <a:lnTo>
-                  <a:pt x="81271" y="971"/>
-                </a:lnTo>
-                <a:cubicBezTo>
-                  <a:pt x="82678" y="335"/>
-                  <a:pt x="84185" y="0"/>
-                  <a:pt x="85725" y="0"/>
-                </a:cubicBezTo>
-                <a:close/>
-                <a:moveTo>
-                  <a:pt x="85725" y="22369"/>
-                </a:moveTo>
-                <a:lnTo>
-                  <a:pt x="85725" y="148981"/>
-                </a:lnTo>
-                <a:cubicBezTo>
-                  <a:pt x="131936" y="126612"/>
-                  <a:pt x="144360" y="77052"/>
-                  <a:pt x="144661" y="47383"/>
-                </a:cubicBezTo>
-                <a:lnTo>
-                  <a:pt x="85725" y="22402"/>
-                </a:lnTo>
-                <a:lnTo>
-                  <a:pt x="85725" y="22402"/>
-                </a:lnTo>
-                <a:close/>
-              </a:path>
-            </a:pathLst>
-          </a:custGeom>
-          <a:solidFill>
-            <a:srgbClr val="6B7A8F"/>
-          </a:solidFill>
-          <a:ln/>
-        </p:spPr>
-      </p:sp>
-      <p:sp>
-        <p:nvSpPr>
-          <p:cNvPr id="28" name="Text 26"/>
-          <p:cNvSpPr/>
-          <p:nvPr/>
-        </p:nvSpPr>
-        <p:spPr>
-          <a:xfrm>
-            <a:off x="7709535" y="1531623"/>
-            <a:ext cx="4029075" cy="266700"/>
-          </a:xfrm>
-          <a:prstGeom prst="rect">
-            <a:avLst/>
-          </a:prstGeom>
-          <a:noFill/>
-          <a:ln/>
-        </p:spPr>
-        <p:txBody>
-          <a:bodyPr wrap="square" lIns="0" tIns="0" rIns="0" bIns="0" rtlCol="0" anchor="ctr"/>
-          <a:lstStyle/>
-          <a:p>
-            <a:pPr>
-              <a:lnSpc>
-                <a:spcPct val="130000"/>
-              </a:lnSpc>
-            </a:pPr>
-            <a:r>
-              <a:rPr lang="en-US" sz="1350" b="1" dirty="0">
-                <a:solidFill>
-                  <a:srgbClr val="E2E8F0"/>
-                </a:solidFill>
-                <a:latin typeface="Liter" pitchFamily="34" charset="0"/>
-                <a:ea typeface="Liter" pitchFamily="34" charset="-122"/>
-                <a:cs typeface="Liter" pitchFamily="34" charset="-120"/>
-              </a:rPr>
-              <a:t>Technical Safeguards</a:t>
-            </a:r>
-            <a:endParaRPr lang="en-US" sz="1600" dirty="0"/>
-          </a:p>
-        </p:txBody>
-      </p:sp>
-      <p:sp>
-        <p:nvSpPr>
-          <p:cNvPr id="29" name="Shape 27"/>
-          <p:cNvSpPr/>
-          <p:nvPr/>
-        </p:nvSpPr>
-        <p:spPr>
-          <a:xfrm>
-            <a:off x="7490460" y="1912623"/>
-            <a:ext cx="4162425" cy="914400"/>
-          </a:xfrm>
-          <a:prstGeom prst="roundRect">
-            <a:avLst>
-              <a:gd name="adj" fmla="val 8333"/>
-            </a:avLst>
-          </a:prstGeom>
-          <a:solidFill>
-            <a:srgbClr val="1A1D21">
-              <a:alpha val="60000"/>
-            </a:srgbClr>
-          </a:solidFill>
-          <a:ln/>
-        </p:spPr>
-      </p:sp>
-      <p:sp>
-        <p:nvSpPr>
-          <p:cNvPr id="30" name="Text 28"/>
-          <p:cNvSpPr/>
-          <p:nvPr/>
-        </p:nvSpPr>
-        <p:spPr>
-          <a:xfrm>
-            <a:off x="7604760" y="2026923"/>
-            <a:ext cx="4000500" cy="190500"/>
-          </a:xfrm>
-          <a:prstGeom prst="rect">
-            <a:avLst/>
-          </a:prstGeom>
-          <a:noFill/>
-          <a:ln/>
-        </p:spPr>
-        <p:txBody>
-          <a:bodyPr wrap="square" lIns="0" tIns="0" rIns="0" bIns="0" rtlCol="0" anchor="ctr"/>
-          <a:lstStyle/>
-          <a:p>
-            <a:pPr>
-              <a:lnSpc>
-                <a:spcPct val="120000"/>
-              </a:lnSpc>
-            </a:pPr>
-            <a:r>
-              <a:rPr lang="en-US" sz="1050" b="1" dirty="0">
-                <a:solidFill>
-                  <a:srgbClr val="6B7A8F"/>
-                </a:solidFill>
-                <a:latin typeface="Liter" pitchFamily="34" charset="0"/>
-                <a:ea typeface="Liter" pitchFamily="34" charset="-122"/>
-                <a:cs typeface="Liter" pitchFamily="34" charset="-120"/>
-              </a:rPr>
-              <a:t>Context Truncation</a:t>
-            </a:r>
-            <a:endParaRPr lang="en-US" sz="1600" dirty="0"/>
-          </a:p>
-        </p:txBody>
-      </p:sp>
-      <p:sp>
-        <p:nvSpPr>
-          <p:cNvPr id="31" name="Text 29"/>
-          <p:cNvSpPr/>
-          <p:nvPr/>
-        </p:nvSpPr>
-        <p:spPr>
-          <a:xfrm>
-            <a:off x="7604760" y="2255523"/>
-            <a:ext cx="4010025" cy="457200"/>
-          </a:xfrm>
-          <a:prstGeom prst="rect">
-            <a:avLst/>
-          </a:prstGeom>
-          <a:noFill/>
-          <a:ln/>
-        </p:spPr>
-        <p:txBody>
-          <a:bodyPr wrap="square" lIns="0" tIns="0" rIns="0" bIns="0" rtlCol="0" anchor="ctr"/>
-          <a:lstStyle/>
-          <a:p>
-            <a:pPr>
-              <a:lnSpc>
-                <a:spcPct val="130000"/>
-              </a:lnSpc>
-            </a:pPr>
-            <a:r>
-              <a:rPr lang="en-US" sz="1200" dirty="0">
-                <a:solidFill>
-                  <a:srgbClr val="E2E8F0">
-                    <a:alpha val="80000"/>
-                  </a:srgbClr>
-                </a:solidFill>
-                <a:latin typeface="Quattrocento Sans" pitchFamily="34" charset="0"/>
-                <a:ea typeface="Quattrocento Sans" pitchFamily="34" charset="-122"/>
-                <a:cs typeface="Quattrocento Sans" pitchFamily="34" charset="-120"/>
-              </a:rPr>
-              <a:t>Strictly limited to top 5 content_excerpt fragments maximum</a:t>
-            </a:r>
-            <a:endParaRPr lang="en-US" sz="1600" dirty="0"/>
-          </a:p>
-        </p:txBody>
-      </p:sp>
-      <p:sp>
-        <p:nvSpPr>
-          <p:cNvPr id="32" name="Shape 30"/>
-          <p:cNvSpPr/>
-          <p:nvPr/>
-        </p:nvSpPr>
-        <p:spPr>
-          <a:xfrm>
-            <a:off x="7490460" y="2941323"/>
-            <a:ext cx="4162425" cy="914400"/>
-          </a:xfrm>
-          <a:prstGeom prst="roundRect">
-            <a:avLst>
-              <a:gd name="adj" fmla="val 8333"/>
-            </a:avLst>
-          </a:prstGeom>
-          <a:solidFill>
-            <a:srgbClr val="1A1D21">
-              <a:alpha val="60000"/>
-            </a:srgbClr>
-          </a:solidFill>
-          <a:ln/>
-        </p:spPr>
-      </p:sp>
-      <p:sp>
-        <p:nvSpPr>
-          <p:cNvPr id="33" name="Text 31"/>
-          <p:cNvSpPr/>
-          <p:nvPr/>
-        </p:nvSpPr>
-        <p:spPr>
-          <a:xfrm>
-            <a:off x="7604760" y="3055623"/>
-            <a:ext cx="4000500" cy="190500"/>
-          </a:xfrm>
-          <a:prstGeom prst="rect">
-            <a:avLst/>
-          </a:prstGeom>
-          <a:noFill/>
-          <a:ln/>
-        </p:spPr>
-        <p:txBody>
-          <a:bodyPr wrap="square" lIns="0" tIns="0" rIns="0" bIns="0" rtlCol="0" anchor="ctr"/>
-          <a:lstStyle/>
-          <a:p>
-            <a:pPr>
-              <a:lnSpc>
-                <a:spcPct val="120000"/>
-              </a:lnSpc>
-            </a:pPr>
-            <a:r>
-              <a:rPr lang="en-US" sz="1050" b="1" dirty="0">
-                <a:solidFill>
-                  <a:srgbClr val="6B7A8F"/>
-                </a:solidFill>
-                <a:latin typeface="Liter" pitchFamily="34" charset="0"/>
-                <a:ea typeface="Liter" pitchFamily="34" charset="-122"/>
-                <a:cs typeface="Liter" pitchFamily="34" charset="-120"/>
-              </a:rPr>
-              <a:t>Timeout Boundaries</a:t>
-            </a:r>
-            <a:endParaRPr lang="en-US" sz="1600" dirty="0"/>
-          </a:p>
-        </p:txBody>
-      </p:sp>
-      <p:sp>
-        <p:nvSpPr>
-          <p:cNvPr id="34" name="Text 32"/>
-          <p:cNvSpPr/>
-          <p:nvPr/>
-        </p:nvSpPr>
-        <p:spPr>
-          <a:xfrm>
-            <a:off x="7604760" y="3284223"/>
-            <a:ext cx="4010025" cy="457200"/>
-          </a:xfrm>
-          <a:prstGeom prst="rect">
-            <a:avLst/>
-          </a:prstGeom>
-          <a:noFill/>
-          <a:ln/>
-        </p:spPr>
-        <p:txBody>
-          <a:bodyPr wrap="square" lIns="0" tIns="0" rIns="0" bIns="0" rtlCol="0" anchor="ctr"/>
-          <a:lstStyle/>
-          <a:p>
-            <a:pPr>
-              <a:lnSpc>
-                <a:spcPct val="130000"/>
-              </a:lnSpc>
-            </a:pPr>
-            <a:r>
-              <a:rPr lang="en-US" sz="1200" dirty="0">
-                <a:solidFill>
-                  <a:srgbClr val="E2E8F0">
-                    <a:alpha val="80000"/>
-                  </a:srgbClr>
-                </a:solidFill>
-                <a:latin typeface="Quattrocento Sans" pitchFamily="34" charset="0"/>
-                <a:ea typeface="Quattrocento Sans" pitchFamily="34" charset="-122"/>
-                <a:cs typeface="Quattrocento Sans" pitchFamily="34" charset="-120"/>
-              </a:rPr>
-              <a:t>Rigorous thread timeouts prevent AI failure from blocking UI</a:t>
-            </a:r>
-            <a:endParaRPr lang="en-US" sz="1600" dirty="0"/>
-          </a:p>
-        </p:txBody>
-      </p:sp>
-      <p:sp>
-        <p:nvSpPr>
-          <p:cNvPr id="35" name="Shape 33"/>
-          <p:cNvSpPr/>
-          <p:nvPr/>
-        </p:nvSpPr>
-        <p:spPr>
-          <a:xfrm>
-            <a:off x="7490460" y="3970023"/>
-            <a:ext cx="4162425" cy="685800"/>
-          </a:xfrm>
-          <a:prstGeom prst="roundRect">
-            <a:avLst>
-              <a:gd name="adj" fmla="val 11111"/>
-            </a:avLst>
-          </a:prstGeom>
-          <a:solidFill>
-            <a:srgbClr val="1A1D21">
-              <a:alpha val="60000"/>
-            </a:srgbClr>
-          </a:solidFill>
-          <a:ln/>
-        </p:spPr>
-      </p:sp>
-      <p:sp>
-        <p:nvSpPr>
-          <p:cNvPr id="36" name="Text 34"/>
-          <p:cNvSpPr/>
-          <p:nvPr/>
-        </p:nvSpPr>
-        <p:spPr>
-          <a:xfrm>
-            <a:off x="7604760" y="4084323"/>
-            <a:ext cx="4000500" cy="190500"/>
-          </a:xfrm>
-          <a:prstGeom prst="rect">
-            <a:avLst/>
-          </a:prstGeom>
-          <a:noFill/>
-          <a:ln/>
-        </p:spPr>
-        <p:txBody>
-          <a:bodyPr wrap="square" lIns="0" tIns="0" rIns="0" bIns="0" rtlCol="0" anchor="ctr"/>
-          <a:lstStyle/>
-          <a:p>
-            <a:pPr>
-              <a:lnSpc>
-                <a:spcPct val="120000"/>
-              </a:lnSpc>
-            </a:pPr>
-            <a:r>
-              <a:rPr lang="en-US" sz="1050" b="1" dirty="0">
-                <a:solidFill>
-                  <a:srgbClr val="6B7A8F"/>
-                </a:solidFill>
-                <a:latin typeface="Liter" pitchFamily="34" charset="0"/>
-                <a:ea typeface="Liter" pitchFamily="34" charset="-122"/>
-                <a:cs typeface="Liter" pitchFamily="34" charset="-120"/>
-              </a:rPr>
-              <a:t>Graceful Degradation</a:t>
-            </a:r>
-            <a:endParaRPr lang="en-US" sz="1600" dirty="0"/>
-          </a:p>
-        </p:txBody>
-      </p:sp>
-      <p:sp>
-        <p:nvSpPr>
-          <p:cNvPr id="37" name="Text 35"/>
-          <p:cNvSpPr/>
-          <p:nvPr/>
-        </p:nvSpPr>
-        <p:spPr>
-          <a:xfrm>
-            <a:off x="7604760" y="4312923"/>
-            <a:ext cx="4010025" cy="228600"/>
-          </a:xfrm>
-          <a:prstGeom prst="rect">
-            <a:avLst/>
-          </a:prstGeom>
-          <a:noFill/>
-          <a:ln/>
-        </p:spPr>
-        <p:txBody>
-          <a:bodyPr wrap="square" lIns="0" tIns="0" rIns="0" bIns="0" rtlCol="0" anchor="ctr"/>
-          <a:lstStyle/>
-          <a:p>
-            <a:pPr>
-              <a:lnSpc>
-                <a:spcPct val="130000"/>
-              </a:lnSpc>
-            </a:pPr>
-            <a:r>
-              <a:rPr lang="en-US" sz="1200" dirty="0">
-                <a:solidFill>
-                  <a:srgbClr val="E2E8F0">
-                    <a:alpha val="80000"/>
-                  </a:srgbClr>
-                </a:solidFill>
-                <a:latin typeface="Quattrocento Sans" pitchFamily="34" charset="0"/>
-                <a:ea typeface="Quattrocento Sans" pitchFamily="34" charset="-122"/>
-                <a:cs typeface="Quattrocento Sans" pitchFamily="34" charset="-120"/>
-              </a:rPr>
-              <a:t>Standard article population continues even if LLM fails</a:t>
-            </a:r>
-            <a:endParaRPr lang="en-US" sz="1600" dirty="0"/>
-          </a:p>
-        </p:txBody>
-      </p:sp>
-      <p:sp>
-        <p:nvSpPr>
-          <p:cNvPr id="38" name="Shape 36"/>
-          <p:cNvSpPr/>
-          <p:nvPr/>
-        </p:nvSpPr>
-        <p:spPr>
-          <a:xfrm>
-            <a:off x="7334250" y="4972051"/>
-            <a:ext cx="4474845" cy="1569720"/>
-          </a:xfrm>
-          <a:prstGeom prst="roundRect">
-            <a:avLst>
-              <a:gd name="adj" fmla="val 4854"/>
-            </a:avLst>
-          </a:prstGeom>
-          <a:solidFill>
-            <a:srgbClr val="D4A26A">
-              <a:alpha val="10196"/>
-            </a:srgbClr>
-          </a:solidFill>
-          <a:ln w="10160">
-            <a:solidFill>
-              <a:srgbClr val="D4A26A">
-                <a:alpha val="30196"/>
-              </a:srgbClr>
-            </a:solidFill>
-            <a:prstDash val="solid"/>
-          </a:ln>
-        </p:spPr>
-      </p:sp>
-      <p:sp>
-        <p:nvSpPr>
-          <p:cNvPr id="39" name="Shape 37"/>
-          <p:cNvSpPr/>
-          <p:nvPr/>
-        </p:nvSpPr>
-        <p:spPr>
-          <a:xfrm>
-            <a:off x="9356407" y="5128259"/>
-            <a:ext cx="428625" cy="342900"/>
-          </a:xfrm>
-          <a:custGeom>
-            <a:avLst/>
-            <a:gdLst/>
-            <a:ahLst/>
-            <a:cxnLst/>
-            <a:rect l="l" t="t" r="r" b="b"/>
-            <a:pathLst>
-              <a:path w="428625" h="342900">
-                <a:moveTo>
-                  <a:pt x="235744" y="0"/>
-                </a:moveTo>
-                <a:cubicBezTo>
-                  <a:pt x="235744" y="-11854"/>
-                  <a:pt x="226167" y="-21431"/>
-                  <a:pt x="214313" y="-21431"/>
-                </a:cubicBezTo>
-                <a:cubicBezTo>
-                  <a:pt x="202458" y="-21431"/>
-                  <a:pt x="192881" y="-11854"/>
-                  <a:pt x="192881" y="0"/>
-                </a:cubicBezTo>
-                <a:lnTo>
-                  <a:pt x="192881" y="42863"/>
-                </a:lnTo>
-                <a:lnTo>
-                  <a:pt x="128588" y="42863"/>
-                </a:lnTo>
-                <a:cubicBezTo>
-                  <a:pt x="93092" y="42863"/>
-                  <a:pt x="64294" y="71661"/>
-                  <a:pt x="64294" y="107156"/>
-                </a:cubicBezTo>
-                <a:lnTo>
-                  <a:pt x="64294" y="257175"/>
-                </a:lnTo>
-                <a:cubicBezTo>
-                  <a:pt x="64294" y="292671"/>
-                  <a:pt x="93092" y="321469"/>
-                  <a:pt x="128588" y="321469"/>
-                </a:cubicBezTo>
-                <a:lnTo>
-                  <a:pt x="300038" y="321469"/>
-                </a:lnTo>
-                <a:cubicBezTo>
-                  <a:pt x="335533" y="321469"/>
-                  <a:pt x="364331" y="292671"/>
-                  <a:pt x="364331" y="257175"/>
-                </a:cubicBezTo>
-                <a:lnTo>
-                  <a:pt x="364331" y="107156"/>
-                </a:lnTo>
-                <a:cubicBezTo>
-                  <a:pt x="364331" y="71661"/>
-                  <a:pt x="335533" y="42863"/>
-                  <a:pt x="300038" y="42863"/>
-                </a:cubicBezTo>
-                <a:lnTo>
-                  <a:pt x="235744" y="42863"/>
-                </a:lnTo>
-                <a:lnTo>
-                  <a:pt x="235744" y="0"/>
-                </a:lnTo>
-                <a:close/>
-                <a:moveTo>
-                  <a:pt x="107156" y="246459"/>
-                </a:moveTo>
-                <a:cubicBezTo>
-                  <a:pt x="107156" y="237552"/>
-                  <a:pt x="114322" y="230386"/>
-                  <a:pt x="123230" y="230386"/>
-                </a:cubicBezTo>
-                <a:lnTo>
-                  <a:pt x="144661" y="230386"/>
-                </a:lnTo>
-                <a:cubicBezTo>
-                  <a:pt x="153568" y="230386"/>
-                  <a:pt x="160734" y="237552"/>
-                  <a:pt x="160734" y="246459"/>
-                </a:cubicBezTo>
-                <a:cubicBezTo>
-                  <a:pt x="160734" y="255367"/>
-                  <a:pt x="153568" y="262533"/>
-                  <a:pt x="144661" y="262533"/>
-                </a:cubicBezTo>
-                <a:lnTo>
-                  <a:pt x="123230" y="262533"/>
-                </a:lnTo>
-                <a:cubicBezTo>
-                  <a:pt x="114322" y="262533"/>
-                  <a:pt x="107156" y="255367"/>
-                  <a:pt x="107156" y="246459"/>
-                </a:cubicBezTo>
-                <a:close/>
-                <a:moveTo>
-                  <a:pt x="187523" y="246459"/>
-                </a:moveTo>
-                <a:cubicBezTo>
-                  <a:pt x="187523" y="237552"/>
-                  <a:pt x="194690" y="230386"/>
-                  <a:pt x="203597" y="230386"/>
-                </a:cubicBezTo>
-                <a:lnTo>
-                  <a:pt x="225028" y="230386"/>
-                </a:lnTo>
-                <a:cubicBezTo>
-                  <a:pt x="233935" y="230386"/>
-                  <a:pt x="241102" y="237552"/>
-                  <a:pt x="241102" y="246459"/>
-                </a:cubicBezTo>
-                <a:cubicBezTo>
-                  <a:pt x="241102" y="255367"/>
-                  <a:pt x="233935" y="262533"/>
-                  <a:pt x="225028" y="262533"/>
-                </a:cubicBezTo>
-                <a:lnTo>
-                  <a:pt x="203597" y="262533"/>
-                </a:lnTo>
-                <a:cubicBezTo>
-                  <a:pt x="194690" y="262533"/>
-                  <a:pt x="187523" y="255367"/>
-                  <a:pt x="187523" y="246459"/>
-                </a:cubicBezTo>
-                <a:close/>
-                <a:moveTo>
-                  <a:pt x="267891" y="246459"/>
-                </a:moveTo>
-                <a:cubicBezTo>
-                  <a:pt x="267891" y="237552"/>
-                  <a:pt x="275057" y="230386"/>
-                  <a:pt x="283964" y="230386"/>
-                </a:cubicBezTo>
-                <a:lnTo>
-                  <a:pt x="305395" y="230386"/>
-                </a:lnTo>
-                <a:cubicBezTo>
-                  <a:pt x="314303" y="230386"/>
-                  <a:pt x="321469" y="237552"/>
-                  <a:pt x="321469" y="246459"/>
-                </a:cubicBezTo>
-                <a:cubicBezTo>
-                  <a:pt x="321469" y="255367"/>
-                  <a:pt x="314303" y="262533"/>
-                  <a:pt x="305395" y="262533"/>
-                </a:cubicBezTo>
-                <a:lnTo>
-                  <a:pt x="283964" y="262533"/>
-                </a:lnTo>
-                <a:cubicBezTo>
-                  <a:pt x="275057" y="262533"/>
-                  <a:pt x="267891" y="255367"/>
-                  <a:pt x="267891" y="246459"/>
-                </a:cubicBezTo>
-                <a:close/>
-                <a:moveTo>
-                  <a:pt x="150019" y="117872"/>
-                </a:moveTo>
-                <a:cubicBezTo>
-                  <a:pt x="167761" y="117872"/>
-                  <a:pt x="182166" y="132276"/>
-                  <a:pt x="182166" y="150019"/>
-                </a:cubicBezTo>
-                <a:cubicBezTo>
-                  <a:pt x="182166" y="167761"/>
-                  <a:pt x="167761" y="182166"/>
-                  <a:pt x="150019" y="182166"/>
-                </a:cubicBezTo>
-                <a:cubicBezTo>
-                  <a:pt x="132276" y="182166"/>
-                  <a:pt x="117872" y="167761"/>
-                  <a:pt x="117872" y="150019"/>
-                </a:cubicBezTo>
-                <a:cubicBezTo>
-                  <a:pt x="117872" y="132276"/>
-                  <a:pt x="132276" y="117872"/>
-                  <a:pt x="150019" y="117872"/>
-                </a:cubicBezTo>
-                <a:close/>
-                <a:moveTo>
-                  <a:pt x="246459" y="150019"/>
-                </a:moveTo>
-                <a:cubicBezTo>
-                  <a:pt x="246459" y="132276"/>
-                  <a:pt x="260864" y="117872"/>
-                  <a:pt x="278606" y="117872"/>
-                </a:cubicBezTo>
-                <a:cubicBezTo>
-                  <a:pt x="296349" y="117872"/>
-                  <a:pt x="310753" y="132276"/>
-                  <a:pt x="310753" y="150019"/>
-                </a:cubicBezTo>
-                <a:cubicBezTo>
-                  <a:pt x="310753" y="167761"/>
-                  <a:pt x="296349" y="182166"/>
-                  <a:pt x="278606" y="182166"/>
-                </a:cubicBezTo>
-                <a:cubicBezTo>
-                  <a:pt x="260864" y="182166"/>
-                  <a:pt x="246459" y="167761"/>
-                  <a:pt x="246459" y="150019"/>
-                </a:cubicBezTo>
-                <a:close/>
-                <a:moveTo>
-                  <a:pt x="42863" y="150019"/>
-                </a:moveTo>
-                <a:cubicBezTo>
-                  <a:pt x="42863" y="138165"/>
-                  <a:pt x="33285" y="128588"/>
-                  <a:pt x="21431" y="128588"/>
-                </a:cubicBezTo>
-                <a:cubicBezTo>
-                  <a:pt x="9577" y="128588"/>
-                  <a:pt x="0" y="138165"/>
-                  <a:pt x="0" y="150019"/>
-                </a:cubicBezTo>
-                <a:lnTo>
-                  <a:pt x="0" y="214313"/>
-                </a:lnTo>
-                <a:cubicBezTo>
-                  <a:pt x="0" y="226167"/>
-                  <a:pt x="9577" y="235744"/>
-                  <a:pt x="21431" y="235744"/>
-                </a:cubicBezTo>
-                <a:cubicBezTo>
-                  <a:pt x="33285" y="235744"/>
-                  <a:pt x="42863" y="226167"/>
-                  <a:pt x="42863" y="214313"/>
-                </a:cubicBezTo>
-                <a:lnTo>
-                  <a:pt x="42863" y="150019"/>
-                </a:lnTo>
-                <a:close/>
-                <a:moveTo>
-                  <a:pt x="407194" y="128588"/>
-                </a:moveTo>
-                <a:cubicBezTo>
-                  <a:pt x="395340" y="128588"/>
-                  <a:pt x="385763" y="138165"/>
-                  <a:pt x="385763" y="150019"/>
-                </a:cubicBezTo>
-                <a:lnTo>
-                  <a:pt x="385763" y="214313"/>
-                </a:lnTo>
-                <a:cubicBezTo>
-                  <a:pt x="385763" y="226167"/>
-                  <a:pt x="395340" y="235744"/>
-                  <a:pt x="407194" y="235744"/>
-                </a:cubicBezTo>
-                <a:cubicBezTo>
-                  <a:pt x="419048" y="235744"/>
-                  <a:pt x="428625" y="226167"/>
-                  <a:pt x="428625" y="214313"/>
-                </a:cubicBezTo>
-                <a:lnTo>
-                  <a:pt x="428625" y="150019"/>
-                </a:lnTo>
-                <a:cubicBezTo>
-                  <a:pt x="428625" y="138165"/>
-                  <a:pt x="419048" y="128588"/>
-                  <a:pt x="407194" y="128588"/>
-                </a:cubicBezTo>
-                <a:close/>
-              </a:path>
-            </a:pathLst>
-          </a:custGeom>
-          <a:solidFill>
-            <a:srgbClr val="D4A26A"/>
-          </a:solidFill>
-          <a:ln/>
-        </p:spPr>
-      </p:sp>
-      <p:sp>
-        <p:nvSpPr>
-          <p:cNvPr id="40" name="Text 38"/>
-          <p:cNvSpPr/>
-          <p:nvPr/>
-        </p:nvSpPr>
-        <p:spPr>
-          <a:xfrm>
-            <a:off x="7447598" y="5585459"/>
-            <a:ext cx="4248150" cy="266700"/>
-          </a:xfrm>
-          <a:prstGeom prst="rect">
-            <a:avLst/>
-          </a:prstGeom>
-          <a:noFill/>
-          <a:ln/>
-        </p:spPr>
-        <p:txBody>
-          <a:bodyPr wrap="square" lIns="0" tIns="0" rIns="0" bIns="0" rtlCol="0" anchor="ctr"/>
-          <a:lstStyle/>
-          <a:p>
-            <a:pPr algn="ctr">
-              <a:lnSpc>
-                <a:spcPct val="130000"/>
-              </a:lnSpc>
-            </a:pPr>
-            <a:r>
-              <a:rPr lang="en-US" sz="1350" b="1" dirty="0">
-                <a:solidFill>
-                  <a:srgbClr val="D4A26A"/>
-                </a:solidFill>
-                <a:latin typeface="Liter" pitchFamily="34" charset="0"/>
-                <a:ea typeface="Liter" pitchFamily="34" charset="-122"/>
-                <a:cs typeface="Liter" pitchFamily="34" charset="-120"/>
-              </a:rPr>
-              <a:t>Local LLM Bridge</a:t>
-            </a:r>
-            <a:endParaRPr lang="en-US" sz="1600" dirty="0"/>
-          </a:p>
-        </p:txBody>
-      </p:sp>
-      <p:sp>
-        <p:nvSpPr>
-          <p:cNvPr id="41" name="Text 39"/>
-          <p:cNvSpPr/>
-          <p:nvPr/>
-        </p:nvSpPr>
-        <p:spPr>
-          <a:xfrm>
-            <a:off x="7452360" y="5928359"/>
-            <a:ext cx="4238625" cy="457200"/>
-          </a:xfrm>
-          <a:prstGeom prst="rect">
-            <a:avLst/>
-          </a:prstGeom>
-          <a:noFill/>
-          <a:ln/>
-        </p:spPr>
-        <p:txBody>
-          <a:bodyPr wrap="square" lIns="0" tIns="0" rIns="0" bIns="0" rtlCol="0" anchor="ctr"/>
-          <a:lstStyle/>
-          <a:p>
-            <a:pPr algn="ctr">
-              <a:lnSpc>
-                <a:spcPct val="130000"/>
-              </a:lnSpc>
-            </a:pPr>
-            <a:r>
-              <a:rPr lang="en-US" sz="1200" dirty="0">
-                <a:solidFill>
-                  <a:srgbClr val="E2E8F0">
-                    <a:alpha val="70000"/>
-                  </a:srgbClr>
-                </a:solidFill>
-                <a:latin typeface="Quattrocento Sans" pitchFamily="34" charset="0"/>
-                <a:ea typeface="Quattrocento Sans" pitchFamily="34" charset="-122"/>
-                <a:cs typeface="Quattrocento Sans" pitchFamily="34" charset="-120"/>
-              </a:rPr>
-              <a:t>No cloud dependency — all processing happens on consumer hardware via LM Studio</a:t>
-            </a:r>
-            <a:endParaRPr lang="en-US" sz="1600" dirty="0"/>
-          </a:p>
-        </p:txBody>
-      </p:sp>
-    </p:spTree>
-  </p:cSld>
-  <p:clrMapOvr>
-    <a:masterClrMapping/>
-  </p:clrMapOvr>
-  <p:transition>
-    <p:fade/>
-    <p:spd val="med"/>
-  </p:transition>
-</p:sld>
-</file>
-
-<file path=ppt/slides/slide9.xml><?xml version="1.0" encoding="utf-8"?>
 <p:sld xmlns:a="http://schemas.openxmlformats.org/drawingml/2006/main" xmlns:r="http://schemas.openxmlformats.org/officeDocument/2006/relationships" xmlns:p="http://schemas.openxmlformats.org/presentationml/2006/main">
   <p:cSld name="Slide 9">
     <p:bg>
@@ -25542,6 +21284,7 @@
         <a:solidFill>
           <a:srgbClr val="1A1D21"/>
         </a:solidFill>
+        <a:effectLst/>
       </p:bgPr>
     </p:bg>
     <p:spTree>
@@ -25560,17 +21303,17 @@
       </p:grpSpPr>
       <p:pic>
         <p:nvPicPr>
-          <p:cNvPr id="2" name="Image 0" descr="https://kimi-img.moonshot.cn/pub/slides/okc/5beqdm23l5qus/images/9_High_tech_Blue_Data_Analytics_Interface.png">    </p:cNvPr>
+          <p:cNvPr id="2" name="Image 0" descr="https://kimi-img.moonshot.cn/pub/slides/okc/5beqdm23l5qus/images/9_High_tech_Blue_Data_Analytics_Interface.png"/>
           <p:cNvPicPr>
             <a:picLocks noChangeAspect="1"/>
           </p:cNvPicPr>
           <p:nvPr/>
         </p:nvPicPr>
         <p:blipFill>
-          <a:blip r:embed="rId1">
+          <a:blip r:embed="rId3">
             <a:alphaModFix amt="30000"/>
           </a:blip>
-          <a:srcRect l="0" r="0" t="0" b="0"/>
+          <a:srcRect/>
           <a:stretch/>
         </p:blipFill>
         <p:spPr>
@@ -25601,7 +21344,7 @@
               <a:gd name="adj" fmla="val 0"/>
             </a:avLst>
           </a:prstGeom>
-          <a:gradFill rotWithShape="1" flip="none">
+          <a:gradFill flip="none" rotWithShape="1">
             <a:gsLst>
               <a:gs pos="0">
                 <a:srgbClr val="1A1D21">
@@ -25697,7 +21440,7 @@
               </a:lnSpc>
             </a:pPr>
             <a:r>
-              <a:rPr lang="en-US" sz="1200" b="1" spc="60" kern="0" dirty="0">
+              <a:rPr lang="en-US" sz="1200" b="1" kern="0" spc="60" dirty="0">
                 <a:solidFill>
                   <a:srgbClr val="D4A26A"/>
                 </a:solidFill>
@@ -25843,7 +21586,1856 @@
   </p:clrMapOvr>
   <p:transition>
     <p:fade/>
-    <p:spd val="med"/>
+  </p:transition>
+</p:sld>
+</file>
+
+<file path=ppt/slides/slide9.xml><?xml version="1.0" encoding="utf-8"?>
+<p:sld xmlns:a="http://schemas.openxmlformats.org/drawingml/2006/main" xmlns:r="http://schemas.openxmlformats.org/officeDocument/2006/relationships" xmlns:p="http://schemas.openxmlformats.org/presentationml/2006/main">
+  <p:cSld name="Slide 10">
+    <p:bg>
+      <p:bgPr>
+        <a:solidFill>
+          <a:srgbClr val="1A1D21"/>
+        </a:solidFill>
+        <a:effectLst/>
+      </p:bgPr>
+    </p:bg>
+    <p:spTree>
+      <p:nvGrpSpPr>
+        <p:cNvPr id="1" name=""/>
+        <p:cNvGrpSpPr/>
+        <p:nvPr/>
+      </p:nvGrpSpPr>
+      <p:grpSpPr>
+        <a:xfrm>
+          <a:off x="0" y="0"/>
+          <a:ext cx="0" cy="0"/>
+          <a:chOff x="0" y="0"/>
+          <a:chExt cx="0" cy="0"/>
+        </a:xfrm>
+      </p:grpSpPr>
+      <p:sp>
+        <p:nvSpPr>
+          <p:cNvPr id="2" name="Text 0"/>
+          <p:cNvSpPr/>
+          <p:nvPr/>
+        </p:nvSpPr>
+        <p:spPr>
+          <a:xfrm>
+            <a:off x="381000" y="381000"/>
+            <a:ext cx="11506200" cy="228600"/>
+          </a:xfrm>
+          <a:prstGeom prst="rect">
+            <a:avLst/>
+          </a:prstGeom>
+          <a:noFill/>
+          <a:ln/>
+        </p:spPr>
+        <p:txBody>
+          <a:bodyPr wrap="square" lIns="0" tIns="0" rIns="0" bIns="0" rtlCol="0" anchor="ctr"/>
+          <a:lstStyle/>
+          <a:p>
+            <a:pPr>
+              <a:lnSpc>
+                <a:spcPct val="130000"/>
+              </a:lnSpc>
+            </a:pPr>
+            <a:r>
+              <a:rPr lang="en-US" sz="1200" b="1" kern="0" spc="60" dirty="0">
+                <a:solidFill>
+                  <a:srgbClr val="D4A26A"/>
+                </a:solidFill>
+                <a:latin typeface="Liter" pitchFamily="34" charset="0"/>
+                <a:ea typeface="Liter" pitchFamily="34" charset="-122"/>
+                <a:cs typeface="Liter" pitchFamily="34" charset="-120"/>
+              </a:rPr>
+              <a:t>CHALLENGES &amp; RESOLUTIONS</a:t>
+            </a:r>
+            <a:endParaRPr lang="en-US" sz="1600" dirty="0"/>
+          </a:p>
+        </p:txBody>
+      </p:sp>
+      <p:sp>
+        <p:nvSpPr>
+          <p:cNvPr id="3" name="Text 1"/>
+          <p:cNvSpPr/>
+          <p:nvPr/>
+        </p:nvSpPr>
+        <p:spPr>
+          <a:xfrm>
+            <a:off x="381000" y="685800"/>
+            <a:ext cx="11601450" cy="381000"/>
+          </a:xfrm>
+          <a:prstGeom prst="rect">
+            <a:avLst/>
+          </a:prstGeom>
+          <a:noFill/>
+          <a:ln/>
+        </p:spPr>
+        <p:txBody>
+          <a:bodyPr wrap="square" lIns="0" tIns="0" rIns="0" bIns="0" rtlCol="0" anchor="ctr"/>
+          <a:lstStyle/>
+          <a:p>
+            <a:pPr>
+              <a:lnSpc>
+                <a:spcPct val="90000"/>
+              </a:lnSpc>
+            </a:pPr>
+            <a:r>
+              <a:rPr lang="en-US" sz="2700" b="1" dirty="0">
+                <a:solidFill>
+                  <a:srgbClr val="E2E8F0"/>
+                </a:solidFill>
+                <a:latin typeface="Liter" pitchFamily="34" charset="0"/>
+                <a:ea typeface="Liter" pitchFamily="34" charset="-122"/>
+                <a:cs typeface="Liter" pitchFamily="34" charset="-120"/>
+              </a:rPr>
+              <a:t>Three Critical Challenges</a:t>
+            </a:r>
+            <a:endParaRPr lang="en-US" sz="1600" dirty="0"/>
+          </a:p>
+        </p:txBody>
+      </p:sp>
+      <p:sp>
+        <p:nvSpPr>
+          <p:cNvPr id="4" name="Shape 2"/>
+          <p:cNvSpPr/>
+          <p:nvPr/>
+        </p:nvSpPr>
+        <p:spPr>
+          <a:xfrm>
+            <a:off x="381000" y="1181100"/>
+            <a:ext cx="914400" cy="38100"/>
+          </a:xfrm>
+          <a:prstGeom prst="roundRect">
+            <a:avLst>
+              <a:gd name="adj" fmla="val 0"/>
+            </a:avLst>
+          </a:prstGeom>
+          <a:solidFill>
+            <a:srgbClr val="D4A26A"/>
+          </a:solidFill>
+          <a:ln/>
+        </p:spPr>
+      </p:sp>
+      <p:sp>
+        <p:nvSpPr>
+          <p:cNvPr id="5" name="Shape 3"/>
+          <p:cNvSpPr/>
+          <p:nvPr/>
+        </p:nvSpPr>
+        <p:spPr>
+          <a:xfrm>
+            <a:off x="400050" y="1371600"/>
+            <a:ext cx="11410950" cy="1628775"/>
+          </a:xfrm>
+          <a:custGeom>
+            <a:avLst/>
+            <a:gdLst/>
+            <a:ahLst/>
+            <a:cxnLst/>
+            <a:rect l="l" t="t" r="r" b="b"/>
+            <a:pathLst>
+              <a:path w="11410950" h="1628775">
+                <a:moveTo>
+                  <a:pt x="0" y="0"/>
+                </a:moveTo>
+                <a:lnTo>
+                  <a:pt x="11334750" y="0"/>
+                </a:lnTo>
+                <a:cubicBezTo>
+                  <a:pt x="11376806" y="0"/>
+                  <a:pt x="11410950" y="34144"/>
+                  <a:pt x="11410950" y="76200"/>
+                </a:cubicBezTo>
+                <a:lnTo>
+                  <a:pt x="11410950" y="1552575"/>
+                </a:lnTo>
+                <a:cubicBezTo>
+                  <a:pt x="11410950" y="1594631"/>
+                  <a:pt x="11376806" y="1628775"/>
+                  <a:pt x="11334750" y="1628775"/>
+                </a:cubicBezTo>
+                <a:lnTo>
+                  <a:pt x="0" y="1628775"/>
+                </a:lnTo>
+                <a:lnTo>
+                  <a:pt x="0" y="0"/>
+                </a:lnTo>
+                <a:close/>
+              </a:path>
+            </a:pathLst>
+          </a:custGeom>
+          <a:solidFill>
+            <a:srgbClr val="4A5568">
+              <a:alpha val="14902"/>
+            </a:srgbClr>
+          </a:solidFill>
+          <a:ln/>
+        </p:spPr>
+      </p:sp>
+      <p:sp>
+        <p:nvSpPr>
+          <p:cNvPr id="6" name="Shape 4"/>
+          <p:cNvSpPr/>
+          <p:nvPr/>
+        </p:nvSpPr>
+        <p:spPr>
+          <a:xfrm>
+            <a:off x="400050" y="1371600"/>
+            <a:ext cx="38100" cy="1628775"/>
+          </a:xfrm>
+          <a:prstGeom prst="roundRect">
+            <a:avLst>
+              <a:gd name="adj" fmla="val 0"/>
+            </a:avLst>
+          </a:prstGeom>
+          <a:solidFill>
+            <a:srgbClr val="D4A26A"/>
+          </a:solidFill>
+          <a:ln/>
+        </p:spPr>
+      </p:sp>
+      <p:sp>
+        <p:nvSpPr>
+          <p:cNvPr id="7" name="Shape 5"/>
+          <p:cNvSpPr/>
+          <p:nvPr/>
+        </p:nvSpPr>
+        <p:spPr>
+          <a:xfrm>
+            <a:off x="571500" y="1555672"/>
+            <a:ext cx="457200" cy="457200"/>
+          </a:xfrm>
+          <a:prstGeom prst="roundRect">
+            <a:avLst>
+              <a:gd name="adj" fmla="val 16667"/>
+            </a:avLst>
+          </a:prstGeom>
+          <a:solidFill>
+            <a:srgbClr val="D4A26A">
+              <a:alpha val="20000"/>
+            </a:srgbClr>
+          </a:solidFill>
+          <a:ln/>
+        </p:spPr>
+      </p:sp>
+      <p:sp>
+        <p:nvSpPr>
+          <p:cNvPr id="8" name="Text 6"/>
+          <p:cNvSpPr/>
+          <p:nvPr/>
+        </p:nvSpPr>
+        <p:spPr>
+          <a:xfrm>
+            <a:off x="681395" y="1631872"/>
+            <a:ext cx="352425" cy="304800"/>
+          </a:xfrm>
+          <a:prstGeom prst="rect">
+            <a:avLst/>
+          </a:prstGeom>
+          <a:noFill/>
+          <a:ln/>
+        </p:spPr>
+        <p:txBody>
+          <a:bodyPr wrap="square" lIns="0" tIns="0" rIns="0" bIns="0" rtlCol="0" anchor="ctr"/>
+          <a:lstStyle/>
+          <a:p>
+            <a:pPr>
+              <a:lnSpc>
+                <a:spcPct val="110000"/>
+              </a:lnSpc>
+            </a:pPr>
+            <a:r>
+              <a:rPr lang="en-US" sz="1800" b="1" dirty="0">
+                <a:solidFill>
+                  <a:srgbClr val="D4A26A"/>
+                </a:solidFill>
+                <a:latin typeface="Liter" pitchFamily="34" charset="0"/>
+                <a:ea typeface="Liter" pitchFamily="34" charset="-122"/>
+                <a:cs typeface="Liter" pitchFamily="34" charset="-120"/>
+              </a:rPr>
+              <a:t>01</a:t>
+            </a:r>
+            <a:endParaRPr lang="en-US" sz="1600" dirty="0"/>
+          </a:p>
+        </p:txBody>
+      </p:sp>
+      <p:sp>
+        <p:nvSpPr>
+          <p:cNvPr id="9" name="Text 7"/>
+          <p:cNvSpPr/>
+          <p:nvPr/>
+        </p:nvSpPr>
+        <p:spPr>
+          <a:xfrm>
+            <a:off x="1181100" y="1555672"/>
+            <a:ext cx="10572750" cy="266700"/>
+          </a:xfrm>
+          <a:prstGeom prst="rect">
+            <a:avLst/>
+          </a:prstGeom>
+          <a:noFill/>
+          <a:ln/>
+        </p:spPr>
+        <p:txBody>
+          <a:bodyPr wrap="square" lIns="0" tIns="0" rIns="0" bIns="0" rtlCol="0" anchor="ctr"/>
+          <a:lstStyle/>
+          <a:p>
+            <a:pPr>
+              <a:lnSpc>
+                <a:spcPct val="120000"/>
+              </a:lnSpc>
+            </a:pPr>
+            <a:r>
+              <a:rPr lang="en-US" sz="1500" b="1" dirty="0">
+                <a:solidFill>
+                  <a:srgbClr val="E2E8F0"/>
+                </a:solidFill>
+                <a:latin typeface="Liter" pitchFamily="34" charset="0"/>
+                <a:ea typeface="Liter" pitchFamily="34" charset="-122"/>
+                <a:cs typeface="Liter" pitchFamily="34" charset="-120"/>
+              </a:rPr>
+              <a:t>Severe RAM Saturation on FAISS Index Generation</a:t>
+            </a:r>
+            <a:endParaRPr lang="en-US" sz="1600" dirty="0"/>
+          </a:p>
+        </p:txBody>
+      </p:sp>
+      <p:sp>
+        <p:nvSpPr>
+          <p:cNvPr id="10" name="Shape 8"/>
+          <p:cNvSpPr/>
+          <p:nvPr/>
+        </p:nvSpPr>
+        <p:spPr>
+          <a:xfrm>
+            <a:off x="1200150" y="1927147"/>
+            <a:ext cx="133350" cy="133350"/>
+          </a:xfrm>
+          <a:custGeom>
+            <a:avLst/>
+            <a:gdLst/>
+            <a:ahLst/>
+            <a:cxnLst/>
+            <a:rect l="l" t="t" r="r" b="b"/>
+            <a:pathLst>
+              <a:path w="133350" h="133350">
+                <a:moveTo>
+                  <a:pt x="66675" y="133350"/>
+                </a:moveTo>
+                <a:cubicBezTo>
+                  <a:pt x="103474" y="133350"/>
+                  <a:pt x="133350" y="103474"/>
+                  <a:pt x="133350" y="66675"/>
+                </a:cubicBezTo>
+                <a:cubicBezTo>
+                  <a:pt x="133350" y="29876"/>
+                  <a:pt x="103474" y="0"/>
+                  <a:pt x="66675" y="0"/>
+                </a:cubicBezTo>
+                <a:cubicBezTo>
+                  <a:pt x="29876" y="0"/>
+                  <a:pt x="0" y="29876"/>
+                  <a:pt x="0" y="66675"/>
+                </a:cubicBezTo>
+                <a:cubicBezTo>
+                  <a:pt x="0" y="103474"/>
+                  <a:pt x="29876" y="133350"/>
+                  <a:pt x="66675" y="133350"/>
+                </a:cubicBezTo>
+                <a:close/>
+                <a:moveTo>
+                  <a:pt x="43495" y="43495"/>
+                </a:moveTo>
+                <a:cubicBezTo>
+                  <a:pt x="45943" y="41047"/>
+                  <a:pt x="49902" y="41047"/>
+                  <a:pt x="52324" y="43495"/>
+                </a:cubicBezTo>
+                <a:lnTo>
+                  <a:pt x="66649" y="57820"/>
+                </a:lnTo>
+                <a:lnTo>
+                  <a:pt x="80974" y="43495"/>
+                </a:lnTo>
+                <a:cubicBezTo>
+                  <a:pt x="83422" y="41047"/>
+                  <a:pt x="87381" y="41047"/>
+                  <a:pt x="89803" y="43495"/>
+                </a:cubicBezTo>
+                <a:cubicBezTo>
+                  <a:pt x="92225" y="45943"/>
+                  <a:pt x="92251" y="49902"/>
+                  <a:pt x="89803" y="52324"/>
+                </a:cubicBezTo>
+                <a:lnTo>
+                  <a:pt x="75478" y="66649"/>
+                </a:lnTo>
+                <a:lnTo>
+                  <a:pt x="89803" y="80974"/>
+                </a:lnTo>
+                <a:cubicBezTo>
+                  <a:pt x="92251" y="83422"/>
+                  <a:pt x="92251" y="87381"/>
+                  <a:pt x="89803" y="89803"/>
+                </a:cubicBezTo>
+                <a:cubicBezTo>
+                  <a:pt x="87355" y="92225"/>
+                  <a:pt x="83396" y="92251"/>
+                  <a:pt x="80974" y="89803"/>
+                </a:cubicBezTo>
+                <a:lnTo>
+                  <a:pt x="66649" y="75478"/>
+                </a:lnTo>
+                <a:lnTo>
+                  <a:pt x="52324" y="89803"/>
+                </a:lnTo>
+                <a:cubicBezTo>
+                  <a:pt x="49876" y="92251"/>
+                  <a:pt x="45917" y="92251"/>
+                  <a:pt x="43495" y="89803"/>
+                </a:cubicBezTo>
+                <a:cubicBezTo>
+                  <a:pt x="41073" y="87355"/>
+                  <a:pt x="41047" y="83396"/>
+                  <a:pt x="43495" y="80974"/>
+                </a:cubicBezTo>
+                <a:lnTo>
+                  <a:pt x="57820" y="66649"/>
+                </a:lnTo>
+                <a:lnTo>
+                  <a:pt x="43495" y="52324"/>
+                </a:lnTo>
+                <a:cubicBezTo>
+                  <a:pt x="41047" y="49876"/>
+                  <a:pt x="41047" y="45917"/>
+                  <a:pt x="43495" y="43495"/>
+                </a:cubicBezTo>
+                <a:close/>
+              </a:path>
+            </a:pathLst>
+          </a:custGeom>
+          <a:solidFill>
+            <a:srgbClr val="FF6467"/>
+          </a:solidFill>
+          <a:ln/>
+        </p:spPr>
+      </p:sp>
+      <p:sp>
+        <p:nvSpPr>
+          <p:cNvPr id="11" name="Text 9"/>
+          <p:cNvSpPr/>
+          <p:nvPr/>
+        </p:nvSpPr>
+        <p:spPr>
+          <a:xfrm>
+            <a:off x="1352550" y="1898572"/>
+            <a:ext cx="5057775" cy="190500"/>
+          </a:xfrm>
+          <a:prstGeom prst="rect">
+            <a:avLst/>
+          </a:prstGeom>
+          <a:noFill/>
+          <a:ln/>
+        </p:spPr>
+        <p:txBody>
+          <a:bodyPr wrap="square" lIns="0" tIns="0" rIns="0" bIns="0" rtlCol="0" anchor="ctr"/>
+          <a:lstStyle/>
+          <a:p>
+            <a:pPr>
+              <a:lnSpc>
+                <a:spcPct val="120000"/>
+              </a:lnSpc>
+            </a:pPr>
+            <a:r>
+              <a:rPr lang="en-US" sz="1050" b="1" dirty="0">
+                <a:solidFill>
+                  <a:srgbClr val="FF6467"/>
+                </a:solidFill>
+                <a:latin typeface="Liter" pitchFamily="34" charset="0"/>
+                <a:ea typeface="Liter" pitchFamily="34" charset="-122"/>
+                <a:cs typeface="Liter" pitchFamily="34" charset="-120"/>
+              </a:rPr>
+              <a:t>The Problem</a:t>
+            </a:r>
+            <a:endParaRPr lang="en-US" sz="1600" dirty="0"/>
+          </a:p>
+        </p:txBody>
+      </p:sp>
+      <p:sp>
+        <p:nvSpPr>
+          <p:cNvPr id="12" name="Text 10"/>
+          <p:cNvSpPr/>
+          <p:nvPr/>
+        </p:nvSpPr>
+        <p:spPr>
+          <a:xfrm>
+            <a:off x="1181100" y="2127172"/>
+            <a:ext cx="5238750" cy="457200"/>
+          </a:xfrm>
+          <a:prstGeom prst="rect">
+            <a:avLst/>
+          </a:prstGeom>
+          <a:noFill/>
+          <a:ln/>
+        </p:spPr>
+        <p:txBody>
+          <a:bodyPr wrap="square" lIns="0" tIns="0" rIns="0" bIns="0" rtlCol="0" anchor="ctr"/>
+          <a:lstStyle/>
+          <a:p>
+            <a:pPr>
+              <a:lnSpc>
+                <a:spcPct val="130000"/>
+              </a:lnSpc>
+            </a:pPr>
+            <a:r>
+              <a:rPr lang="en-US" sz="1200" dirty="0">
+                <a:solidFill>
+                  <a:srgbClr val="E2E8F0">
+                    <a:alpha val="80000"/>
+                  </a:srgbClr>
+                </a:solidFill>
+                <a:latin typeface="Quattrocento Sans" pitchFamily="34" charset="0"/>
+                <a:ea typeface="Quattrocento Sans" pitchFamily="34" charset="-122"/>
+                <a:cs typeface="Quattrocento Sans" pitchFamily="34" charset="-120"/>
+              </a:rPr>
+              <a:t>sentence-transformers embeddings over 120,000 articles instantly saturated System RAM, causing complete Flask server crashes during bulk ingestion</a:t>
+            </a:r>
+            <a:endParaRPr lang="en-US" sz="1600" dirty="0"/>
+          </a:p>
+        </p:txBody>
+      </p:sp>
+      <p:sp>
+        <p:nvSpPr>
+          <p:cNvPr id="13" name="Shape 11"/>
+          <p:cNvSpPr/>
+          <p:nvPr/>
+        </p:nvSpPr>
+        <p:spPr>
+          <a:xfrm>
+            <a:off x="6515100" y="1927147"/>
+            <a:ext cx="133350" cy="133350"/>
+          </a:xfrm>
+          <a:custGeom>
+            <a:avLst/>
+            <a:gdLst/>
+            <a:ahLst/>
+            <a:cxnLst/>
+            <a:rect l="l" t="t" r="r" b="b"/>
+            <a:pathLst>
+              <a:path w="133350" h="133350">
+                <a:moveTo>
+                  <a:pt x="66675" y="133350"/>
+                </a:moveTo>
+                <a:cubicBezTo>
+                  <a:pt x="103474" y="133350"/>
+                  <a:pt x="133350" y="103474"/>
+                  <a:pt x="133350" y="66675"/>
+                </a:cubicBezTo>
+                <a:cubicBezTo>
+                  <a:pt x="133350" y="29876"/>
+                  <a:pt x="103474" y="0"/>
+                  <a:pt x="66675" y="0"/>
+                </a:cubicBezTo>
+                <a:cubicBezTo>
+                  <a:pt x="29876" y="0"/>
+                  <a:pt x="0" y="29876"/>
+                  <a:pt x="0" y="66675"/>
+                </a:cubicBezTo>
+                <a:cubicBezTo>
+                  <a:pt x="0" y="103474"/>
+                  <a:pt x="29876" y="133350"/>
+                  <a:pt x="66675" y="133350"/>
+                </a:cubicBezTo>
+                <a:close/>
+                <a:moveTo>
+                  <a:pt x="88657" y="55398"/>
+                </a:moveTo>
+                <a:lnTo>
+                  <a:pt x="67821" y="88735"/>
+                </a:lnTo>
+                <a:cubicBezTo>
+                  <a:pt x="66727" y="90480"/>
+                  <a:pt x="64852" y="91574"/>
+                  <a:pt x="62794" y="91678"/>
+                </a:cubicBezTo>
+                <a:cubicBezTo>
+                  <a:pt x="60737" y="91782"/>
+                  <a:pt x="58757" y="90845"/>
+                  <a:pt x="57533" y="89178"/>
+                </a:cubicBezTo>
+                <a:lnTo>
+                  <a:pt x="45032" y="72509"/>
+                </a:lnTo>
+                <a:cubicBezTo>
+                  <a:pt x="42948" y="69748"/>
+                  <a:pt x="43521" y="65842"/>
+                  <a:pt x="46282" y="63758"/>
+                </a:cubicBezTo>
+                <a:cubicBezTo>
+                  <a:pt x="49043" y="61674"/>
+                  <a:pt x="52949" y="62247"/>
+                  <a:pt x="55033" y="65008"/>
+                </a:cubicBezTo>
+                <a:lnTo>
+                  <a:pt x="62065" y="74384"/>
+                </a:lnTo>
+                <a:lnTo>
+                  <a:pt x="78057" y="48782"/>
+                </a:lnTo>
+                <a:cubicBezTo>
+                  <a:pt x="79880" y="45865"/>
+                  <a:pt x="83734" y="44954"/>
+                  <a:pt x="86678" y="46803"/>
+                </a:cubicBezTo>
+                <a:cubicBezTo>
+                  <a:pt x="89621" y="48652"/>
+                  <a:pt x="90506" y="52481"/>
+                  <a:pt x="88657" y="55424"/>
+                </a:cubicBezTo>
+                <a:close/>
+              </a:path>
+            </a:pathLst>
+          </a:custGeom>
+          <a:solidFill>
+            <a:srgbClr val="05DF72"/>
+          </a:solidFill>
+          <a:ln/>
+        </p:spPr>
+      </p:sp>
+      <p:sp>
+        <p:nvSpPr>
+          <p:cNvPr id="14" name="Text 12"/>
+          <p:cNvSpPr/>
+          <p:nvPr/>
+        </p:nvSpPr>
+        <p:spPr>
+          <a:xfrm>
+            <a:off x="6667500" y="1898572"/>
+            <a:ext cx="5057775" cy="190500"/>
+          </a:xfrm>
+          <a:prstGeom prst="rect">
+            <a:avLst/>
+          </a:prstGeom>
+          <a:noFill/>
+          <a:ln/>
+        </p:spPr>
+        <p:txBody>
+          <a:bodyPr wrap="square" lIns="0" tIns="0" rIns="0" bIns="0" rtlCol="0" anchor="ctr"/>
+          <a:lstStyle/>
+          <a:p>
+            <a:pPr>
+              <a:lnSpc>
+                <a:spcPct val="120000"/>
+              </a:lnSpc>
+            </a:pPr>
+            <a:r>
+              <a:rPr lang="en-US" sz="1050" b="1" dirty="0">
+                <a:solidFill>
+                  <a:srgbClr val="05DF72"/>
+                </a:solidFill>
+                <a:latin typeface="Liter" pitchFamily="34" charset="0"/>
+                <a:ea typeface="Liter" pitchFamily="34" charset="-122"/>
+                <a:cs typeface="Liter" pitchFamily="34" charset="-120"/>
+              </a:rPr>
+              <a:t>The Resolution</a:t>
+            </a:r>
+            <a:endParaRPr lang="en-US" sz="1600" dirty="0"/>
+          </a:p>
+        </p:txBody>
+      </p:sp>
+      <p:sp>
+        <p:nvSpPr>
+          <p:cNvPr id="15" name="Text 13"/>
+          <p:cNvSpPr/>
+          <p:nvPr/>
+        </p:nvSpPr>
+        <p:spPr>
+          <a:xfrm>
+            <a:off x="6496050" y="2127172"/>
+            <a:ext cx="5238750" cy="685800"/>
+          </a:xfrm>
+          <a:prstGeom prst="rect">
+            <a:avLst/>
+          </a:prstGeom>
+          <a:noFill/>
+          <a:ln/>
+        </p:spPr>
+        <p:txBody>
+          <a:bodyPr wrap="square" lIns="0" tIns="0" rIns="0" bIns="0" rtlCol="0" anchor="ctr"/>
+          <a:lstStyle/>
+          <a:p>
+            <a:pPr>
+              <a:lnSpc>
+                <a:spcPct val="130000"/>
+              </a:lnSpc>
+            </a:pPr>
+            <a:r>
+              <a:rPr lang="en-US" sz="1200" dirty="0">
+                <a:solidFill>
+                  <a:srgbClr val="E2E8F0">
+                    <a:alpha val="80000"/>
+                  </a:srgbClr>
+                </a:solidFill>
+                <a:latin typeface="Quattrocento Sans" pitchFamily="34" charset="0"/>
+                <a:ea typeface="Quattrocento Sans" pitchFamily="34" charset="-122"/>
+                <a:cs typeface="Quattrocento Sans" pitchFamily="34" charset="-120"/>
+              </a:rPr>
+              <a:t>Decoupled index regeneration into offline background script (rebuild_index.py) that builds .faiss and .pkl binaries offline; main API loads into static read-only memory</a:t>
+            </a:r>
+            <a:endParaRPr lang="en-US" sz="1600" dirty="0"/>
+          </a:p>
+        </p:txBody>
+      </p:sp>
+      <p:sp>
+        <p:nvSpPr>
+          <p:cNvPr id="16" name="Shape 14"/>
+          <p:cNvSpPr/>
+          <p:nvPr/>
+        </p:nvSpPr>
+        <p:spPr>
+          <a:xfrm>
+            <a:off x="400050" y="3111461"/>
+            <a:ext cx="11410950" cy="1628775"/>
+          </a:xfrm>
+          <a:custGeom>
+            <a:avLst/>
+            <a:gdLst/>
+            <a:ahLst/>
+            <a:cxnLst/>
+            <a:rect l="l" t="t" r="r" b="b"/>
+            <a:pathLst>
+              <a:path w="11410950" h="1628775">
+                <a:moveTo>
+                  <a:pt x="0" y="0"/>
+                </a:moveTo>
+                <a:lnTo>
+                  <a:pt x="11334750" y="0"/>
+                </a:lnTo>
+                <a:cubicBezTo>
+                  <a:pt x="11376806" y="0"/>
+                  <a:pt x="11410950" y="34144"/>
+                  <a:pt x="11410950" y="76200"/>
+                </a:cubicBezTo>
+                <a:lnTo>
+                  <a:pt x="11410950" y="1552575"/>
+                </a:lnTo>
+                <a:cubicBezTo>
+                  <a:pt x="11410950" y="1594631"/>
+                  <a:pt x="11376806" y="1628775"/>
+                  <a:pt x="11334750" y="1628775"/>
+                </a:cubicBezTo>
+                <a:lnTo>
+                  <a:pt x="0" y="1628775"/>
+                </a:lnTo>
+                <a:lnTo>
+                  <a:pt x="0" y="0"/>
+                </a:lnTo>
+                <a:close/>
+              </a:path>
+            </a:pathLst>
+          </a:custGeom>
+          <a:solidFill>
+            <a:srgbClr val="4A5568">
+              <a:alpha val="14902"/>
+            </a:srgbClr>
+          </a:solidFill>
+          <a:ln/>
+        </p:spPr>
+      </p:sp>
+      <p:sp>
+        <p:nvSpPr>
+          <p:cNvPr id="17" name="Shape 15"/>
+          <p:cNvSpPr/>
+          <p:nvPr/>
+        </p:nvSpPr>
+        <p:spPr>
+          <a:xfrm>
+            <a:off x="400050" y="3111461"/>
+            <a:ext cx="38100" cy="1628775"/>
+          </a:xfrm>
+          <a:prstGeom prst="roundRect">
+            <a:avLst>
+              <a:gd name="adj" fmla="val 0"/>
+            </a:avLst>
+          </a:prstGeom>
+          <a:solidFill>
+            <a:srgbClr val="6B7A8F"/>
+          </a:solidFill>
+          <a:ln/>
+        </p:spPr>
+      </p:sp>
+      <p:sp>
+        <p:nvSpPr>
+          <p:cNvPr id="18" name="Shape 16"/>
+          <p:cNvSpPr/>
+          <p:nvPr/>
+        </p:nvSpPr>
+        <p:spPr>
+          <a:xfrm>
+            <a:off x="571500" y="3409950"/>
+            <a:ext cx="457200" cy="457200"/>
+          </a:xfrm>
+          <a:prstGeom prst="roundRect">
+            <a:avLst>
+              <a:gd name="adj" fmla="val 16667"/>
+            </a:avLst>
+          </a:prstGeom>
+          <a:solidFill>
+            <a:srgbClr val="6B7A8F">
+              <a:alpha val="20000"/>
+            </a:srgbClr>
+          </a:solidFill>
+          <a:ln/>
+        </p:spPr>
+      </p:sp>
+      <p:sp>
+        <p:nvSpPr>
+          <p:cNvPr id="19" name="Text 17"/>
+          <p:cNvSpPr/>
+          <p:nvPr/>
+        </p:nvSpPr>
+        <p:spPr>
+          <a:xfrm>
+            <a:off x="660678" y="3486150"/>
+            <a:ext cx="390525" cy="304800"/>
+          </a:xfrm>
+          <a:prstGeom prst="rect">
+            <a:avLst/>
+          </a:prstGeom>
+          <a:noFill/>
+          <a:ln/>
+        </p:spPr>
+        <p:txBody>
+          <a:bodyPr wrap="square" lIns="0" tIns="0" rIns="0" bIns="0" rtlCol="0" anchor="ctr"/>
+          <a:lstStyle/>
+          <a:p>
+            <a:pPr>
+              <a:lnSpc>
+                <a:spcPct val="110000"/>
+              </a:lnSpc>
+            </a:pPr>
+            <a:r>
+              <a:rPr lang="en-US" sz="1800" b="1" dirty="0">
+                <a:solidFill>
+                  <a:srgbClr val="6B7A8F"/>
+                </a:solidFill>
+                <a:latin typeface="Liter" pitchFamily="34" charset="0"/>
+                <a:ea typeface="Liter" pitchFamily="34" charset="-122"/>
+                <a:cs typeface="Liter" pitchFamily="34" charset="-120"/>
+              </a:rPr>
+              <a:t>02</a:t>
+            </a:r>
+            <a:endParaRPr lang="en-US" sz="1600" dirty="0"/>
+          </a:p>
+        </p:txBody>
+      </p:sp>
+      <p:sp>
+        <p:nvSpPr>
+          <p:cNvPr id="20" name="Text 18"/>
+          <p:cNvSpPr/>
+          <p:nvPr/>
+        </p:nvSpPr>
+        <p:spPr>
+          <a:xfrm>
+            <a:off x="1181100" y="3409950"/>
+            <a:ext cx="10572750" cy="266700"/>
+          </a:xfrm>
+          <a:prstGeom prst="rect">
+            <a:avLst/>
+          </a:prstGeom>
+          <a:noFill/>
+          <a:ln/>
+        </p:spPr>
+        <p:txBody>
+          <a:bodyPr wrap="square" lIns="0" tIns="0" rIns="0" bIns="0" rtlCol="0" anchor="ctr"/>
+          <a:lstStyle/>
+          <a:p>
+            <a:pPr>
+              <a:lnSpc>
+                <a:spcPct val="120000"/>
+              </a:lnSpc>
+            </a:pPr>
+            <a:r>
+              <a:rPr lang="en-US" sz="1500" b="1" dirty="0">
+                <a:solidFill>
+                  <a:srgbClr val="E2E8F0"/>
+                </a:solidFill>
+                <a:latin typeface="Liter" pitchFamily="34" charset="0"/>
+                <a:ea typeface="Liter" pitchFamily="34" charset="-122"/>
+                <a:cs typeface="Liter" pitchFamily="34" charset="-120"/>
+              </a:rPr>
+              <a:t>Poor Ranking of Ambiguous Concepts</a:t>
+            </a:r>
+            <a:endParaRPr lang="en-US" sz="1600" dirty="0"/>
+          </a:p>
+        </p:txBody>
+      </p:sp>
+      <p:sp>
+        <p:nvSpPr>
+          <p:cNvPr id="21" name="Shape 19"/>
+          <p:cNvSpPr/>
+          <p:nvPr/>
+        </p:nvSpPr>
+        <p:spPr>
+          <a:xfrm>
+            <a:off x="1200150" y="3781425"/>
+            <a:ext cx="133350" cy="133350"/>
+          </a:xfrm>
+          <a:custGeom>
+            <a:avLst/>
+            <a:gdLst/>
+            <a:ahLst/>
+            <a:cxnLst/>
+            <a:rect l="l" t="t" r="r" b="b"/>
+            <a:pathLst>
+              <a:path w="133350" h="133350">
+                <a:moveTo>
+                  <a:pt x="66675" y="133350"/>
+                </a:moveTo>
+                <a:cubicBezTo>
+                  <a:pt x="103474" y="133350"/>
+                  <a:pt x="133350" y="103474"/>
+                  <a:pt x="133350" y="66675"/>
+                </a:cubicBezTo>
+                <a:cubicBezTo>
+                  <a:pt x="133350" y="29876"/>
+                  <a:pt x="103474" y="0"/>
+                  <a:pt x="66675" y="0"/>
+                </a:cubicBezTo>
+                <a:cubicBezTo>
+                  <a:pt x="29876" y="0"/>
+                  <a:pt x="0" y="29876"/>
+                  <a:pt x="0" y="66675"/>
+                </a:cubicBezTo>
+                <a:cubicBezTo>
+                  <a:pt x="0" y="103474"/>
+                  <a:pt x="29876" y="133350"/>
+                  <a:pt x="66675" y="133350"/>
+                </a:cubicBezTo>
+                <a:close/>
+                <a:moveTo>
+                  <a:pt x="43495" y="43495"/>
+                </a:moveTo>
+                <a:cubicBezTo>
+                  <a:pt x="45943" y="41047"/>
+                  <a:pt x="49902" y="41047"/>
+                  <a:pt x="52324" y="43495"/>
+                </a:cubicBezTo>
+                <a:lnTo>
+                  <a:pt x="66649" y="57820"/>
+                </a:lnTo>
+                <a:lnTo>
+                  <a:pt x="80974" y="43495"/>
+                </a:lnTo>
+                <a:cubicBezTo>
+                  <a:pt x="83422" y="41047"/>
+                  <a:pt x="87381" y="41047"/>
+                  <a:pt x="89803" y="43495"/>
+                </a:cubicBezTo>
+                <a:cubicBezTo>
+                  <a:pt x="92225" y="45943"/>
+                  <a:pt x="92251" y="49902"/>
+                  <a:pt x="89803" y="52324"/>
+                </a:cubicBezTo>
+                <a:lnTo>
+                  <a:pt x="75478" y="66649"/>
+                </a:lnTo>
+                <a:lnTo>
+                  <a:pt x="89803" y="80974"/>
+                </a:lnTo>
+                <a:cubicBezTo>
+                  <a:pt x="92251" y="83422"/>
+                  <a:pt x="92251" y="87381"/>
+                  <a:pt x="89803" y="89803"/>
+                </a:cubicBezTo>
+                <a:cubicBezTo>
+                  <a:pt x="87355" y="92225"/>
+                  <a:pt x="83396" y="92251"/>
+                  <a:pt x="80974" y="89803"/>
+                </a:cubicBezTo>
+                <a:lnTo>
+                  <a:pt x="66649" y="75478"/>
+                </a:lnTo>
+                <a:lnTo>
+                  <a:pt x="52324" y="89803"/>
+                </a:lnTo>
+                <a:cubicBezTo>
+                  <a:pt x="49876" y="92251"/>
+                  <a:pt x="45917" y="92251"/>
+                  <a:pt x="43495" y="89803"/>
+                </a:cubicBezTo>
+                <a:cubicBezTo>
+                  <a:pt x="41073" y="87355"/>
+                  <a:pt x="41047" y="83396"/>
+                  <a:pt x="43495" y="80974"/>
+                </a:cubicBezTo>
+                <a:lnTo>
+                  <a:pt x="57820" y="66649"/>
+                </a:lnTo>
+                <a:lnTo>
+                  <a:pt x="43495" y="52324"/>
+                </a:lnTo>
+                <a:cubicBezTo>
+                  <a:pt x="41047" y="49876"/>
+                  <a:pt x="41047" y="45917"/>
+                  <a:pt x="43495" y="43495"/>
+                </a:cubicBezTo>
+                <a:close/>
+              </a:path>
+            </a:pathLst>
+          </a:custGeom>
+          <a:solidFill>
+            <a:srgbClr val="FF6467"/>
+          </a:solidFill>
+          <a:ln/>
+        </p:spPr>
+      </p:sp>
+      <p:sp>
+        <p:nvSpPr>
+          <p:cNvPr id="22" name="Text 20"/>
+          <p:cNvSpPr/>
+          <p:nvPr/>
+        </p:nvSpPr>
+        <p:spPr>
+          <a:xfrm>
+            <a:off x="1352550" y="3752850"/>
+            <a:ext cx="5057775" cy="190500"/>
+          </a:xfrm>
+          <a:prstGeom prst="rect">
+            <a:avLst/>
+          </a:prstGeom>
+          <a:noFill/>
+          <a:ln/>
+        </p:spPr>
+        <p:txBody>
+          <a:bodyPr wrap="square" lIns="0" tIns="0" rIns="0" bIns="0" rtlCol="0" anchor="ctr"/>
+          <a:lstStyle/>
+          <a:p>
+            <a:pPr>
+              <a:lnSpc>
+                <a:spcPct val="120000"/>
+              </a:lnSpc>
+            </a:pPr>
+            <a:r>
+              <a:rPr lang="en-US" sz="1050" b="1" dirty="0">
+                <a:solidFill>
+                  <a:srgbClr val="FF6467"/>
+                </a:solidFill>
+                <a:latin typeface="Liter" pitchFamily="34" charset="0"/>
+                <a:ea typeface="Liter" pitchFamily="34" charset="-122"/>
+                <a:cs typeface="Liter" pitchFamily="34" charset="-120"/>
+              </a:rPr>
+              <a:t>The Problem</a:t>
+            </a:r>
+            <a:endParaRPr lang="en-US" sz="1600" dirty="0"/>
+          </a:p>
+        </p:txBody>
+      </p:sp>
+      <p:sp>
+        <p:nvSpPr>
+          <p:cNvPr id="23" name="Text 21"/>
+          <p:cNvSpPr/>
+          <p:nvPr/>
+        </p:nvSpPr>
+        <p:spPr>
+          <a:xfrm>
+            <a:off x="1181100" y="3981450"/>
+            <a:ext cx="5238750" cy="457200"/>
+          </a:xfrm>
+          <a:prstGeom prst="rect">
+            <a:avLst/>
+          </a:prstGeom>
+          <a:noFill/>
+          <a:ln/>
+        </p:spPr>
+        <p:txBody>
+          <a:bodyPr wrap="square" lIns="0" tIns="0" rIns="0" bIns="0" rtlCol="0" anchor="ctr"/>
+          <a:lstStyle/>
+          <a:p>
+            <a:pPr>
+              <a:lnSpc>
+                <a:spcPct val="130000"/>
+              </a:lnSpc>
+            </a:pPr>
+            <a:r>
+              <a:rPr lang="en-US" sz="1200" dirty="0">
+                <a:solidFill>
+                  <a:srgbClr val="E2E8F0">
+                    <a:alpha val="80000"/>
+                  </a:srgbClr>
+                </a:solidFill>
+                <a:latin typeface="Quattrocento Sans" pitchFamily="34" charset="0"/>
+                <a:ea typeface="Quattrocento Sans" pitchFamily="34" charset="-122"/>
+                <a:cs typeface="Quattrocento Sans" pitchFamily="34" charset="-120"/>
+              </a:rPr>
+              <a:t>Query "technology AI" returned articles mentioning "technology" 100 times before nuanced AI infrastructure discussions — pure lexical matching failed</a:t>
+            </a:r>
+            <a:endParaRPr lang="en-US" sz="1600" dirty="0"/>
+          </a:p>
+        </p:txBody>
+      </p:sp>
+      <p:sp>
+        <p:nvSpPr>
+          <p:cNvPr id="24" name="Shape 22"/>
+          <p:cNvSpPr/>
+          <p:nvPr/>
+        </p:nvSpPr>
+        <p:spPr>
+          <a:xfrm>
+            <a:off x="6515100" y="3781425"/>
+            <a:ext cx="133350" cy="133350"/>
+          </a:xfrm>
+          <a:custGeom>
+            <a:avLst/>
+            <a:gdLst/>
+            <a:ahLst/>
+            <a:cxnLst/>
+            <a:rect l="l" t="t" r="r" b="b"/>
+            <a:pathLst>
+              <a:path w="133350" h="133350">
+                <a:moveTo>
+                  <a:pt x="66675" y="133350"/>
+                </a:moveTo>
+                <a:cubicBezTo>
+                  <a:pt x="103474" y="133350"/>
+                  <a:pt x="133350" y="103474"/>
+                  <a:pt x="133350" y="66675"/>
+                </a:cubicBezTo>
+                <a:cubicBezTo>
+                  <a:pt x="133350" y="29876"/>
+                  <a:pt x="103474" y="0"/>
+                  <a:pt x="66675" y="0"/>
+                </a:cubicBezTo>
+                <a:cubicBezTo>
+                  <a:pt x="29876" y="0"/>
+                  <a:pt x="0" y="29876"/>
+                  <a:pt x="0" y="66675"/>
+                </a:cubicBezTo>
+                <a:cubicBezTo>
+                  <a:pt x="0" y="103474"/>
+                  <a:pt x="29876" y="133350"/>
+                  <a:pt x="66675" y="133350"/>
+                </a:cubicBezTo>
+                <a:close/>
+                <a:moveTo>
+                  <a:pt x="88657" y="55398"/>
+                </a:moveTo>
+                <a:lnTo>
+                  <a:pt x="67821" y="88735"/>
+                </a:lnTo>
+                <a:cubicBezTo>
+                  <a:pt x="66727" y="90480"/>
+                  <a:pt x="64852" y="91574"/>
+                  <a:pt x="62794" y="91678"/>
+                </a:cubicBezTo>
+                <a:cubicBezTo>
+                  <a:pt x="60737" y="91782"/>
+                  <a:pt x="58757" y="90845"/>
+                  <a:pt x="57533" y="89178"/>
+                </a:cubicBezTo>
+                <a:lnTo>
+                  <a:pt x="45032" y="72509"/>
+                </a:lnTo>
+                <a:cubicBezTo>
+                  <a:pt x="42948" y="69748"/>
+                  <a:pt x="43521" y="65842"/>
+                  <a:pt x="46282" y="63758"/>
+                </a:cubicBezTo>
+                <a:cubicBezTo>
+                  <a:pt x="49043" y="61674"/>
+                  <a:pt x="52949" y="62247"/>
+                  <a:pt x="55033" y="65008"/>
+                </a:cubicBezTo>
+                <a:lnTo>
+                  <a:pt x="62065" y="74384"/>
+                </a:lnTo>
+                <a:lnTo>
+                  <a:pt x="78057" y="48782"/>
+                </a:lnTo>
+                <a:cubicBezTo>
+                  <a:pt x="79880" y="45865"/>
+                  <a:pt x="83734" y="44954"/>
+                  <a:pt x="86678" y="46803"/>
+                </a:cubicBezTo>
+                <a:cubicBezTo>
+                  <a:pt x="89621" y="48652"/>
+                  <a:pt x="90506" y="52481"/>
+                  <a:pt x="88657" y="55424"/>
+                </a:cubicBezTo>
+                <a:close/>
+              </a:path>
+            </a:pathLst>
+          </a:custGeom>
+          <a:solidFill>
+            <a:srgbClr val="05DF72"/>
+          </a:solidFill>
+          <a:ln/>
+        </p:spPr>
+      </p:sp>
+      <p:sp>
+        <p:nvSpPr>
+          <p:cNvPr id="25" name="Text 23"/>
+          <p:cNvSpPr/>
+          <p:nvPr/>
+        </p:nvSpPr>
+        <p:spPr>
+          <a:xfrm>
+            <a:off x="6667500" y="3752850"/>
+            <a:ext cx="5057775" cy="190500"/>
+          </a:xfrm>
+          <a:prstGeom prst="rect">
+            <a:avLst/>
+          </a:prstGeom>
+          <a:noFill/>
+          <a:ln/>
+        </p:spPr>
+        <p:txBody>
+          <a:bodyPr wrap="square" lIns="0" tIns="0" rIns="0" bIns="0" rtlCol="0" anchor="ctr"/>
+          <a:lstStyle/>
+          <a:p>
+            <a:pPr>
+              <a:lnSpc>
+                <a:spcPct val="120000"/>
+              </a:lnSpc>
+            </a:pPr>
+            <a:r>
+              <a:rPr lang="en-US" sz="1050" b="1" dirty="0">
+                <a:solidFill>
+                  <a:srgbClr val="05DF72"/>
+                </a:solidFill>
+                <a:latin typeface="Liter" pitchFamily="34" charset="0"/>
+                <a:ea typeface="Liter" pitchFamily="34" charset="-122"/>
+                <a:cs typeface="Liter" pitchFamily="34" charset="-120"/>
+              </a:rPr>
+              <a:t>The Resolution</a:t>
+            </a:r>
+            <a:endParaRPr lang="en-US" sz="1600" dirty="0"/>
+          </a:p>
+        </p:txBody>
+      </p:sp>
+      <p:sp>
+        <p:nvSpPr>
+          <p:cNvPr id="26" name="Text 24"/>
+          <p:cNvSpPr/>
+          <p:nvPr/>
+        </p:nvSpPr>
+        <p:spPr>
+          <a:xfrm>
+            <a:off x="6496050" y="3981450"/>
+            <a:ext cx="5238750" cy="457200"/>
+          </a:xfrm>
+          <a:prstGeom prst="rect">
+            <a:avLst/>
+          </a:prstGeom>
+          <a:noFill/>
+          <a:ln/>
+        </p:spPr>
+        <p:txBody>
+          <a:bodyPr wrap="square" lIns="0" tIns="0" rIns="0" bIns="0" rtlCol="0" anchor="ctr"/>
+          <a:lstStyle/>
+          <a:p>
+            <a:pPr>
+              <a:lnSpc>
+                <a:spcPct val="130000"/>
+              </a:lnSpc>
+            </a:pPr>
+            <a:r>
+              <a:rPr lang="en-US" sz="1200" dirty="0">
+                <a:solidFill>
+                  <a:srgbClr val="E2E8F0">
+                    <a:alpha val="80000"/>
+                  </a:srgbClr>
+                </a:solidFill>
+                <a:latin typeface="Quattrocento Sans" pitchFamily="34" charset="0"/>
+                <a:ea typeface="Quattrocento Sans" pitchFamily="34" charset="-122"/>
+                <a:cs typeface="Quattrocento Sans" pitchFamily="34" charset="-120"/>
+              </a:rPr>
+              <a:t>Implemented true Hybrid Fusion — BM25 ensures target words exist, FAISS ensures context aligns. Mathematically forced 50/50 blend in standard model</a:t>
+            </a:r>
+            <a:endParaRPr lang="en-US" sz="1600" dirty="0"/>
+          </a:p>
+        </p:txBody>
+      </p:sp>
+      <p:sp>
+        <p:nvSpPr>
+          <p:cNvPr id="27" name="Shape 25"/>
+          <p:cNvSpPr/>
+          <p:nvPr/>
+        </p:nvSpPr>
+        <p:spPr>
+          <a:xfrm>
+            <a:off x="400050" y="4851439"/>
+            <a:ext cx="11410950" cy="1628775"/>
+          </a:xfrm>
+          <a:custGeom>
+            <a:avLst/>
+            <a:gdLst/>
+            <a:ahLst/>
+            <a:cxnLst/>
+            <a:rect l="l" t="t" r="r" b="b"/>
+            <a:pathLst>
+              <a:path w="11410950" h="1628775">
+                <a:moveTo>
+                  <a:pt x="0" y="0"/>
+                </a:moveTo>
+                <a:lnTo>
+                  <a:pt x="11334750" y="0"/>
+                </a:lnTo>
+                <a:cubicBezTo>
+                  <a:pt x="11376806" y="0"/>
+                  <a:pt x="11410950" y="34144"/>
+                  <a:pt x="11410950" y="76200"/>
+                </a:cubicBezTo>
+                <a:lnTo>
+                  <a:pt x="11410950" y="1552575"/>
+                </a:lnTo>
+                <a:cubicBezTo>
+                  <a:pt x="11410950" y="1594631"/>
+                  <a:pt x="11376806" y="1628775"/>
+                  <a:pt x="11334750" y="1628775"/>
+                </a:cubicBezTo>
+                <a:lnTo>
+                  <a:pt x="0" y="1628775"/>
+                </a:lnTo>
+                <a:lnTo>
+                  <a:pt x="0" y="0"/>
+                </a:lnTo>
+                <a:close/>
+              </a:path>
+            </a:pathLst>
+          </a:custGeom>
+          <a:solidFill>
+            <a:srgbClr val="4A5568">
+              <a:alpha val="14902"/>
+            </a:srgbClr>
+          </a:solidFill>
+          <a:ln/>
+        </p:spPr>
+      </p:sp>
+      <p:sp>
+        <p:nvSpPr>
+          <p:cNvPr id="28" name="Shape 26"/>
+          <p:cNvSpPr/>
+          <p:nvPr/>
+        </p:nvSpPr>
+        <p:spPr>
+          <a:xfrm>
+            <a:off x="400050" y="4851439"/>
+            <a:ext cx="38100" cy="1628775"/>
+          </a:xfrm>
+          <a:prstGeom prst="roundRect">
+            <a:avLst>
+              <a:gd name="adj" fmla="val 0"/>
+            </a:avLst>
+          </a:prstGeom>
+          <a:solidFill>
+            <a:srgbClr val="D4A26A"/>
+          </a:solidFill>
+          <a:ln/>
+        </p:spPr>
+      </p:sp>
+      <p:sp>
+        <p:nvSpPr>
+          <p:cNvPr id="29" name="Shape 27"/>
+          <p:cNvSpPr/>
+          <p:nvPr/>
+        </p:nvSpPr>
+        <p:spPr>
+          <a:xfrm>
+            <a:off x="571500" y="5035511"/>
+            <a:ext cx="457200" cy="457200"/>
+          </a:xfrm>
+          <a:prstGeom prst="roundRect">
+            <a:avLst>
+              <a:gd name="adj" fmla="val 16667"/>
+            </a:avLst>
+          </a:prstGeom>
+          <a:solidFill>
+            <a:srgbClr val="D4A26A">
+              <a:alpha val="20000"/>
+            </a:srgbClr>
+          </a:solidFill>
+          <a:ln/>
+        </p:spPr>
+      </p:sp>
+      <p:sp>
+        <p:nvSpPr>
+          <p:cNvPr id="30" name="Text 28"/>
+          <p:cNvSpPr/>
+          <p:nvPr/>
+        </p:nvSpPr>
+        <p:spPr>
+          <a:xfrm>
+            <a:off x="659725" y="5111711"/>
+            <a:ext cx="390525" cy="304800"/>
+          </a:xfrm>
+          <a:prstGeom prst="rect">
+            <a:avLst/>
+          </a:prstGeom>
+          <a:noFill/>
+          <a:ln/>
+        </p:spPr>
+        <p:txBody>
+          <a:bodyPr wrap="square" lIns="0" tIns="0" rIns="0" bIns="0" rtlCol="0" anchor="ctr"/>
+          <a:lstStyle/>
+          <a:p>
+            <a:pPr>
+              <a:lnSpc>
+                <a:spcPct val="110000"/>
+              </a:lnSpc>
+            </a:pPr>
+            <a:r>
+              <a:rPr lang="en-US" sz="1800" b="1" dirty="0">
+                <a:solidFill>
+                  <a:srgbClr val="D4A26A"/>
+                </a:solidFill>
+                <a:latin typeface="Liter" pitchFamily="34" charset="0"/>
+                <a:ea typeface="Liter" pitchFamily="34" charset="-122"/>
+                <a:cs typeface="Liter" pitchFamily="34" charset="-120"/>
+              </a:rPr>
+              <a:t>03</a:t>
+            </a:r>
+            <a:endParaRPr lang="en-US" sz="1600" dirty="0"/>
+          </a:p>
+        </p:txBody>
+      </p:sp>
+      <p:sp>
+        <p:nvSpPr>
+          <p:cNvPr id="31" name="Text 29"/>
+          <p:cNvSpPr/>
+          <p:nvPr/>
+        </p:nvSpPr>
+        <p:spPr>
+          <a:xfrm>
+            <a:off x="1181100" y="5035511"/>
+            <a:ext cx="10572750" cy="266700"/>
+          </a:xfrm>
+          <a:prstGeom prst="rect">
+            <a:avLst/>
+          </a:prstGeom>
+          <a:noFill/>
+          <a:ln/>
+        </p:spPr>
+        <p:txBody>
+          <a:bodyPr wrap="square" lIns="0" tIns="0" rIns="0" bIns="0" rtlCol="0" anchor="ctr"/>
+          <a:lstStyle/>
+          <a:p>
+            <a:pPr>
+              <a:lnSpc>
+                <a:spcPct val="120000"/>
+              </a:lnSpc>
+            </a:pPr>
+            <a:r>
+              <a:rPr lang="en-US" sz="1500" b="1" dirty="0">
+                <a:solidFill>
+                  <a:srgbClr val="E2E8F0"/>
+                </a:solidFill>
+                <a:latin typeface="Liter" pitchFamily="34" charset="0"/>
+                <a:ea typeface="Liter" pitchFamily="34" charset="-122"/>
+                <a:cs typeface="Liter" pitchFamily="34" charset="-120"/>
+              </a:rPr>
+              <a:t>Local LLM Timeout &amp; Context Window Truncation</a:t>
+            </a:r>
+            <a:endParaRPr lang="en-US" sz="1600" dirty="0"/>
+          </a:p>
+        </p:txBody>
+      </p:sp>
+      <p:sp>
+        <p:nvSpPr>
+          <p:cNvPr id="32" name="Shape 30"/>
+          <p:cNvSpPr/>
+          <p:nvPr/>
+        </p:nvSpPr>
+        <p:spPr>
+          <a:xfrm>
+            <a:off x="1200150" y="5406986"/>
+            <a:ext cx="133350" cy="133350"/>
+          </a:xfrm>
+          <a:custGeom>
+            <a:avLst/>
+            <a:gdLst/>
+            <a:ahLst/>
+            <a:cxnLst/>
+            <a:rect l="l" t="t" r="r" b="b"/>
+            <a:pathLst>
+              <a:path w="133350" h="133350">
+                <a:moveTo>
+                  <a:pt x="66675" y="133350"/>
+                </a:moveTo>
+                <a:cubicBezTo>
+                  <a:pt x="103474" y="133350"/>
+                  <a:pt x="133350" y="103474"/>
+                  <a:pt x="133350" y="66675"/>
+                </a:cubicBezTo>
+                <a:cubicBezTo>
+                  <a:pt x="133350" y="29876"/>
+                  <a:pt x="103474" y="0"/>
+                  <a:pt x="66675" y="0"/>
+                </a:cubicBezTo>
+                <a:cubicBezTo>
+                  <a:pt x="29876" y="0"/>
+                  <a:pt x="0" y="29876"/>
+                  <a:pt x="0" y="66675"/>
+                </a:cubicBezTo>
+                <a:cubicBezTo>
+                  <a:pt x="0" y="103474"/>
+                  <a:pt x="29876" y="133350"/>
+                  <a:pt x="66675" y="133350"/>
+                </a:cubicBezTo>
+                <a:close/>
+                <a:moveTo>
+                  <a:pt x="43495" y="43495"/>
+                </a:moveTo>
+                <a:cubicBezTo>
+                  <a:pt x="45943" y="41047"/>
+                  <a:pt x="49902" y="41047"/>
+                  <a:pt x="52324" y="43495"/>
+                </a:cubicBezTo>
+                <a:lnTo>
+                  <a:pt x="66649" y="57820"/>
+                </a:lnTo>
+                <a:lnTo>
+                  <a:pt x="80974" y="43495"/>
+                </a:lnTo>
+                <a:cubicBezTo>
+                  <a:pt x="83422" y="41047"/>
+                  <a:pt x="87381" y="41047"/>
+                  <a:pt x="89803" y="43495"/>
+                </a:cubicBezTo>
+                <a:cubicBezTo>
+                  <a:pt x="92225" y="45943"/>
+                  <a:pt x="92251" y="49902"/>
+                  <a:pt x="89803" y="52324"/>
+                </a:cubicBezTo>
+                <a:lnTo>
+                  <a:pt x="75478" y="66649"/>
+                </a:lnTo>
+                <a:lnTo>
+                  <a:pt x="89803" y="80974"/>
+                </a:lnTo>
+                <a:cubicBezTo>
+                  <a:pt x="92251" y="83422"/>
+                  <a:pt x="92251" y="87381"/>
+                  <a:pt x="89803" y="89803"/>
+                </a:cubicBezTo>
+                <a:cubicBezTo>
+                  <a:pt x="87355" y="92225"/>
+                  <a:pt x="83396" y="92251"/>
+                  <a:pt x="80974" y="89803"/>
+                </a:cubicBezTo>
+                <a:lnTo>
+                  <a:pt x="66649" y="75478"/>
+                </a:lnTo>
+                <a:lnTo>
+                  <a:pt x="52324" y="89803"/>
+                </a:lnTo>
+                <a:cubicBezTo>
+                  <a:pt x="49876" y="92251"/>
+                  <a:pt x="45917" y="92251"/>
+                  <a:pt x="43495" y="89803"/>
+                </a:cubicBezTo>
+                <a:cubicBezTo>
+                  <a:pt x="41073" y="87355"/>
+                  <a:pt x="41047" y="83396"/>
+                  <a:pt x="43495" y="80974"/>
+                </a:cubicBezTo>
+                <a:lnTo>
+                  <a:pt x="57820" y="66649"/>
+                </a:lnTo>
+                <a:lnTo>
+                  <a:pt x="43495" y="52324"/>
+                </a:lnTo>
+                <a:cubicBezTo>
+                  <a:pt x="41047" y="49876"/>
+                  <a:pt x="41047" y="45917"/>
+                  <a:pt x="43495" y="43495"/>
+                </a:cubicBezTo>
+                <a:close/>
+              </a:path>
+            </a:pathLst>
+          </a:custGeom>
+          <a:solidFill>
+            <a:srgbClr val="FF6467"/>
+          </a:solidFill>
+          <a:ln/>
+        </p:spPr>
+      </p:sp>
+      <p:sp>
+        <p:nvSpPr>
+          <p:cNvPr id="33" name="Text 31"/>
+          <p:cNvSpPr/>
+          <p:nvPr/>
+        </p:nvSpPr>
+        <p:spPr>
+          <a:xfrm>
+            <a:off x="1352550" y="5378411"/>
+            <a:ext cx="5057775" cy="190500"/>
+          </a:xfrm>
+          <a:prstGeom prst="rect">
+            <a:avLst/>
+          </a:prstGeom>
+          <a:noFill/>
+          <a:ln/>
+        </p:spPr>
+        <p:txBody>
+          <a:bodyPr wrap="square" lIns="0" tIns="0" rIns="0" bIns="0" rtlCol="0" anchor="ctr"/>
+          <a:lstStyle/>
+          <a:p>
+            <a:pPr>
+              <a:lnSpc>
+                <a:spcPct val="120000"/>
+              </a:lnSpc>
+            </a:pPr>
+            <a:r>
+              <a:rPr lang="en-US" sz="1050" b="1" dirty="0">
+                <a:solidFill>
+                  <a:srgbClr val="FF6467"/>
+                </a:solidFill>
+                <a:latin typeface="Liter" pitchFamily="34" charset="0"/>
+                <a:ea typeface="Liter" pitchFamily="34" charset="-122"/>
+                <a:cs typeface="Liter" pitchFamily="34" charset="-120"/>
+              </a:rPr>
+              <a:t>The Problem</a:t>
+            </a:r>
+            <a:endParaRPr lang="en-US" sz="1600" dirty="0"/>
+          </a:p>
+        </p:txBody>
+      </p:sp>
+      <p:sp>
+        <p:nvSpPr>
+          <p:cNvPr id="34" name="Text 32"/>
+          <p:cNvSpPr/>
+          <p:nvPr/>
+        </p:nvSpPr>
+        <p:spPr>
+          <a:xfrm>
+            <a:off x="1181100" y="5607011"/>
+            <a:ext cx="5238750" cy="457200"/>
+          </a:xfrm>
+          <a:prstGeom prst="rect">
+            <a:avLst/>
+          </a:prstGeom>
+          <a:noFill/>
+          <a:ln/>
+        </p:spPr>
+        <p:txBody>
+          <a:bodyPr wrap="square" lIns="0" tIns="0" rIns="0" bIns="0" rtlCol="0" anchor="ctr"/>
+          <a:lstStyle/>
+          <a:p>
+            <a:pPr>
+              <a:lnSpc>
+                <a:spcPct val="130000"/>
+              </a:lnSpc>
+            </a:pPr>
+            <a:r>
+              <a:rPr lang="en-US" sz="1200" dirty="0">
+                <a:solidFill>
+                  <a:srgbClr val="E2E8F0">
+                    <a:alpha val="80000"/>
+                  </a:srgbClr>
+                </a:solidFill>
+                <a:latin typeface="Quattrocento Sans" pitchFamily="34" charset="0"/>
+                <a:ea typeface="Quattrocento Sans" pitchFamily="34" charset="-122"/>
+                <a:cs typeface="Quattrocento Sans" pitchFamily="34" charset="-120"/>
+              </a:rPr>
+              <a:t>Summarizing 10 retrieved articles via local Mistral/Llama broke context token limits, halting server execution completely</a:t>
+            </a:r>
+            <a:endParaRPr lang="en-US" sz="1600" dirty="0"/>
+          </a:p>
+        </p:txBody>
+      </p:sp>
+      <p:sp>
+        <p:nvSpPr>
+          <p:cNvPr id="35" name="Shape 33"/>
+          <p:cNvSpPr/>
+          <p:nvPr/>
+        </p:nvSpPr>
+        <p:spPr>
+          <a:xfrm>
+            <a:off x="6515100" y="5406986"/>
+            <a:ext cx="133350" cy="133350"/>
+          </a:xfrm>
+          <a:custGeom>
+            <a:avLst/>
+            <a:gdLst/>
+            <a:ahLst/>
+            <a:cxnLst/>
+            <a:rect l="l" t="t" r="r" b="b"/>
+            <a:pathLst>
+              <a:path w="133350" h="133350">
+                <a:moveTo>
+                  <a:pt x="66675" y="133350"/>
+                </a:moveTo>
+                <a:cubicBezTo>
+                  <a:pt x="103474" y="133350"/>
+                  <a:pt x="133350" y="103474"/>
+                  <a:pt x="133350" y="66675"/>
+                </a:cubicBezTo>
+                <a:cubicBezTo>
+                  <a:pt x="133350" y="29876"/>
+                  <a:pt x="103474" y="0"/>
+                  <a:pt x="66675" y="0"/>
+                </a:cubicBezTo>
+                <a:cubicBezTo>
+                  <a:pt x="29876" y="0"/>
+                  <a:pt x="0" y="29876"/>
+                  <a:pt x="0" y="66675"/>
+                </a:cubicBezTo>
+                <a:cubicBezTo>
+                  <a:pt x="0" y="103474"/>
+                  <a:pt x="29876" y="133350"/>
+                  <a:pt x="66675" y="133350"/>
+                </a:cubicBezTo>
+                <a:close/>
+                <a:moveTo>
+                  <a:pt x="88657" y="55398"/>
+                </a:moveTo>
+                <a:lnTo>
+                  <a:pt x="67821" y="88735"/>
+                </a:lnTo>
+                <a:cubicBezTo>
+                  <a:pt x="66727" y="90480"/>
+                  <a:pt x="64852" y="91574"/>
+                  <a:pt x="62794" y="91678"/>
+                </a:cubicBezTo>
+                <a:cubicBezTo>
+                  <a:pt x="60737" y="91782"/>
+                  <a:pt x="58757" y="90845"/>
+                  <a:pt x="57533" y="89178"/>
+                </a:cubicBezTo>
+                <a:lnTo>
+                  <a:pt x="45032" y="72509"/>
+                </a:lnTo>
+                <a:cubicBezTo>
+                  <a:pt x="42948" y="69748"/>
+                  <a:pt x="43521" y="65842"/>
+                  <a:pt x="46282" y="63758"/>
+                </a:cubicBezTo>
+                <a:cubicBezTo>
+                  <a:pt x="49043" y="61674"/>
+                  <a:pt x="52949" y="62247"/>
+                  <a:pt x="55033" y="65008"/>
+                </a:cubicBezTo>
+                <a:lnTo>
+                  <a:pt x="62065" y="74384"/>
+                </a:lnTo>
+                <a:lnTo>
+                  <a:pt x="78057" y="48782"/>
+                </a:lnTo>
+                <a:cubicBezTo>
+                  <a:pt x="79880" y="45865"/>
+                  <a:pt x="83734" y="44954"/>
+                  <a:pt x="86678" y="46803"/>
+                </a:cubicBezTo>
+                <a:cubicBezTo>
+                  <a:pt x="89621" y="48652"/>
+                  <a:pt x="90506" y="52481"/>
+                  <a:pt x="88657" y="55424"/>
+                </a:cubicBezTo>
+                <a:close/>
+              </a:path>
+            </a:pathLst>
+          </a:custGeom>
+          <a:solidFill>
+            <a:srgbClr val="05DF72"/>
+          </a:solidFill>
+          <a:ln/>
+        </p:spPr>
+      </p:sp>
+      <p:sp>
+        <p:nvSpPr>
+          <p:cNvPr id="36" name="Text 34"/>
+          <p:cNvSpPr/>
+          <p:nvPr/>
+        </p:nvSpPr>
+        <p:spPr>
+          <a:xfrm>
+            <a:off x="6667500" y="5378411"/>
+            <a:ext cx="5057775" cy="190500"/>
+          </a:xfrm>
+          <a:prstGeom prst="rect">
+            <a:avLst/>
+          </a:prstGeom>
+          <a:noFill/>
+          <a:ln/>
+        </p:spPr>
+        <p:txBody>
+          <a:bodyPr wrap="square" lIns="0" tIns="0" rIns="0" bIns="0" rtlCol="0" anchor="ctr"/>
+          <a:lstStyle/>
+          <a:p>
+            <a:pPr>
+              <a:lnSpc>
+                <a:spcPct val="120000"/>
+              </a:lnSpc>
+            </a:pPr>
+            <a:r>
+              <a:rPr lang="en-US" sz="1050" b="1" dirty="0">
+                <a:solidFill>
+                  <a:srgbClr val="05DF72"/>
+                </a:solidFill>
+                <a:latin typeface="Liter" pitchFamily="34" charset="0"/>
+                <a:ea typeface="Liter" pitchFamily="34" charset="-122"/>
+                <a:cs typeface="Liter" pitchFamily="34" charset="-120"/>
+              </a:rPr>
+              <a:t>The Resolution</a:t>
+            </a:r>
+            <a:endParaRPr lang="en-US" sz="1600" dirty="0"/>
+          </a:p>
+        </p:txBody>
+      </p:sp>
+      <p:sp>
+        <p:nvSpPr>
+          <p:cNvPr id="37" name="Text 35"/>
+          <p:cNvSpPr/>
+          <p:nvPr/>
+        </p:nvSpPr>
+        <p:spPr>
+          <a:xfrm>
+            <a:off x="6496050" y="5607011"/>
+            <a:ext cx="5238750" cy="685800"/>
+          </a:xfrm>
+          <a:prstGeom prst="rect">
+            <a:avLst/>
+          </a:prstGeom>
+          <a:noFill/>
+          <a:ln/>
+        </p:spPr>
+        <p:txBody>
+          <a:bodyPr wrap="square" lIns="0" tIns="0" rIns="0" bIns="0" rtlCol="0" anchor="ctr"/>
+          <a:lstStyle/>
+          <a:p>
+            <a:pPr>
+              <a:lnSpc>
+                <a:spcPct val="130000"/>
+              </a:lnSpc>
+            </a:pPr>
+            <a:r>
+              <a:rPr lang="en-US" sz="1200" dirty="0">
+                <a:solidFill>
+                  <a:srgbClr val="E2E8F0">
+                    <a:alpha val="80000"/>
+                  </a:srgbClr>
+                </a:solidFill>
+                <a:latin typeface="Quattrocento Sans" pitchFamily="34" charset="0"/>
+                <a:ea typeface="Quattrocento Sans" pitchFamily="34" charset="-122"/>
+                <a:cs typeface="Quattrocento Sans" pitchFamily="34" charset="-120"/>
+              </a:rPr>
+              <a:t>Truncated AI input to top 5 content_excerpt fragments maximum. Implemented rigorous thread timeout boundaries so LLM failure doesn't prevent standard article population</a:t>
+            </a:r>
+            <a:endParaRPr lang="en-US" sz="1600" dirty="0"/>
+          </a:p>
+        </p:txBody>
+      </p:sp>
+    </p:spTree>
+  </p:cSld>
+  <p:clrMapOvr>
+    <a:masterClrMapping/>
+  </p:clrMapOvr>
+  <p:transition>
+    <p:fade/>
   </p:transition>
 </p:sld>
 </file>
@@ -25856,31 +23448,326 @@
         <a:srgbClr val="000000"/>
       </a:dk1>
       <a:lt1>
-        <a:srgbClr val="ffffff"/>
+        <a:srgbClr val="FFFFFF"/>
       </a:lt1>
       <a:dk2>
         <a:srgbClr val="333333"/>
       </a:dk2>
       <a:lt2>
-        <a:srgbClr val="eeeeee"/>
+        <a:srgbClr val="EEEEEE"/>
       </a:lt2>
       <a:accent1>
-        <a:srgbClr val="8daac2"/>
+        <a:srgbClr val="8DAAC2"/>
       </a:accent1>
       <a:accent2>
-        <a:srgbClr val="ed7d31"/>
+        <a:srgbClr val="ED7D31"/>
       </a:accent2>
       <a:accent3>
-        <a:srgbClr val="a5a5a5"/>
+        <a:srgbClr val="A5A5A5"/>
       </a:accent3>
       <a:accent4>
-        <a:srgbClr val="ffc000"/>
+        <a:srgbClr val="FFC000"/>
       </a:accent4>
       <a:accent5>
-        <a:srgbClr val="4472c4"/>
+        <a:srgbClr val="4472C4"/>
       </a:accent5>
       <a:accent6>
-        <a:srgbClr val="70ad47"/>
+        <a:srgbClr val="70AD47"/>
+      </a:accent6>
+      <a:hlink>
+        <a:srgbClr val="0563C1"/>
+      </a:hlink>
+      <a:folHlink>
+        <a:srgbClr val="954F72"/>
+      </a:folHlink>
+    </a:clrScheme>
+    <a:fontScheme name="Office">
+      <a:majorFont>
+        <a:latin typeface="Calibri Light" panose="020F0302020204030204"/>
+        <a:ea typeface=""/>
+        <a:cs typeface=""/>
+        <a:font script="Jpan" typeface="游ゴシック Light"/>
+        <a:font script="Hang" typeface="맑은 고딕"/>
+        <a:font script="Hans" typeface="等线 Light"/>
+        <a:font script="Hant" typeface="新細明體"/>
+        <a:font script="Arab" typeface="Times New Roman"/>
+        <a:font script="Hebr" typeface="Times New Roman"/>
+        <a:font script="Thai" typeface="Angsana New"/>
+        <a:font script="Ethi" typeface="Nyala"/>
+        <a:font script="Beng" typeface="Vrinda"/>
+        <a:font script="Gujr" typeface="Shruti"/>
+        <a:font script="Khmr" typeface="MoolBoran"/>
+        <a:font script="Knda" typeface="Tunga"/>
+        <a:font script="Guru" typeface="Raavi"/>
+        <a:font script="Cans" typeface="Euphemia"/>
+        <a:font script="Cher" typeface="Plantagenet Cherokee"/>
+        <a:font script="Yiii" typeface="Microsoft Yi Baiti"/>
+        <a:font script="Tibt" typeface="Microsoft Himalaya"/>
+        <a:font script="Thaa" typeface="MV Boli"/>
+        <a:font script="Deva" typeface="Mangal"/>
+        <a:font script="Telu" typeface="Gautami"/>
+        <a:font script="Taml" typeface="Latha"/>
+        <a:font script="Syrc" typeface="Estrangelo Edessa"/>
+        <a:font script="Orya" typeface="Kalinga"/>
+        <a:font script="Mlym" typeface="Kartika"/>
+        <a:font script="Laoo" typeface="DokChampa"/>
+        <a:font script="Sinh" typeface="Iskoola Pota"/>
+        <a:font script="Mong" typeface="Mongolian Baiti"/>
+        <a:font script="Viet" typeface="Times New Roman"/>
+        <a:font script="Uigh" typeface="Microsoft Uighur"/>
+        <a:font script="Geor" typeface="Sylfaen"/>
+        <a:font script="Armn" typeface="Arial"/>
+        <a:font script="Bugi" typeface="Leelawadee UI"/>
+        <a:font script="Bopo" typeface="Microsoft JhengHei"/>
+        <a:font script="Java" typeface="Javanese Text"/>
+        <a:font script="Lisu" typeface="Segoe UI"/>
+        <a:font script="Mymr" typeface="Myanmar Text"/>
+        <a:font script="Nkoo" typeface="Ebrima"/>
+        <a:font script="Olck" typeface="Nirmala UI"/>
+        <a:font script="Osma" typeface="Ebrima"/>
+        <a:font script="Phag" typeface="Phagspa"/>
+        <a:font script="Syrn" typeface="Estrangelo Edessa"/>
+        <a:font script="Syrj" typeface="Estrangelo Edessa"/>
+        <a:font script="Syre" typeface="Estrangelo Edessa"/>
+        <a:font script="Sora" typeface="Nirmala UI"/>
+        <a:font script="Tale" typeface="Microsoft Tai Le"/>
+        <a:font script="Talu" typeface="Microsoft New Tai Lue"/>
+        <a:font script="Tfng" typeface="Ebrima"/>
+      </a:majorFont>
+      <a:minorFont>
+        <a:latin typeface="Calibri" panose="020F0502020204030204"/>
+        <a:ea typeface=""/>
+        <a:cs typeface=""/>
+        <a:font script="Jpan" typeface="游ゴシック"/>
+        <a:font script="Hang" typeface="맑은 고딕"/>
+        <a:font script="Hans" typeface="等线"/>
+        <a:font script="Hant" typeface="新細明體"/>
+        <a:font script="Arab" typeface="Arial"/>
+        <a:font script="Hebr" typeface="Arial"/>
+        <a:font script="Thai" typeface="Cordia New"/>
+        <a:font script="Ethi" typeface="Nyala"/>
+        <a:font script="Beng" typeface="Vrinda"/>
+        <a:font script="Gujr" typeface="Shruti"/>
+        <a:font script="Khmr" typeface="DaunPenh"/>
+        <a:font script="Knda" typeface="Tunga"/>
+        <a:font script="Guru" typeface="Raavi"/>
+        <a:font script="Cans" typeface="Euphemia"/>
+        <a:font script="Cher" typeface="Plantagenet Cherokee"/>
+        <a:font script="Yiii" typeface="Microsoft Yi Baiti"/>
+        <a:font script="Tibt" typeface="Microsoft Himalaya"/>
+        <a:font script="Thaa" typeface="MV Boli"/>
+        <a:font script="Deva" typeface="Mangal"/>
+        <a:font script="Telu" typeface="Gautami"/>
+        <a:font script="Taml" typeface="Latha"/>
+        <a:font script="Syrc" typeface="Estrangelo Edessa"/>
+        <a:font script="Orya" typeface="Kalinga"/>
+        <a:font script="Mlym" typeface="Kartika"/>
+        <a:font script="Laoo" typeface="DokChampa"/>
+        <a:font script="Sinh" typeface="Iskoola Pota"/>
+        <a:font script="Mong" typeface="Mongolian Baiti"/>
+        <a:font script="Viet" typeface="Arial"/>
+        <a:font script="Uigh" typeface="Microsoft Uighur"/>
+        <a:font script="Geor" typeface="Sylfaen"/>
+        <a:font script="Armn" typeface="Arial"/>
+        <a:font script="Bugi" typeface="Leelawadee UI"/>
+        <a:font script="Bopo" typeface="Microsoft JhengHei"/>
+        <a:font script="Java" typeface="Javanese Text"/>
+        <a:font script="Lisu" typeface="Segoe UI"/>
+        <a:font script="Mymr" typeface="Myanmar Text"/>
+        <a:font script="Nkoo" typeface="Ebrima"/>
+        <a:font script="Olck" typeface="Nirmala UI"/>
+        <a:font script="Osma" typeface="Ebrima"/>
+        <a:font script="Phag" typeface="Phagspa"/>
+        <a:font script="Syrn" typeface="Estrangelo Edessa"/>
+        <a:font script="Syrj" typeface="Estrangelo Edessa"/>
+        <a:font script="Syre" typeface="Estrangelo Edessa"/>
+        <a:font script="Sora" typeface="Nirmala UI"/>
+        <a:font script="Tale" typeface="Microsoft Tai Le"/>
+        <a:font script="Talu" typeface="Microsoft New Tai Lue"/>
+        <a:font script="Tfng" typeface="Ebrima"/>
+      </a:minorFont>
+    </a:fontScheme>
+    <a:fmtScheme name="Office">
+      <a:fillStyleLst>
+        <a:solidFill>
+          <a:schemeClr val="phClr"/>
+        </a:solidFill>
+        <a:gradFill rotWithShape="1">
+          <a:gsLst>
+            <a:gs pos="0">
+              <a:schemeClr val="phClr">
+                <a:lumMod val="110000"/>
+                <a:satMod val="105000"/>
+                <a:tint val="67000"/>
+              </a:schemeClr>
+            </a:gs>
+            <a:gs pos="50000">
+              <a:schemeClr val="phClr">
+                <a:lumMod val="105000"/>
+                <a:satMod val="103000"/>
+                <a:tint val="73000"/>
+              </a:schemeClr>
+            </a:gs>
+            <a:gs pos="100000">
+              <a:schemeClr val="phClr">
+                <a:lumMod val="105000"/>
+                <a:satMod val="109000"/>
+                <a:tint val="81000"/>
+              </a:schemeClr>
+            </a:gs>
+          </a:gsLst>
+          <a:lin ang="5400000" scaled="0"/>
+        </a:gradFill>
+        <a:gradFill rotWithShape="1">
+          <a:gsLst>
+            <a:gs pos="0">
+              <a:schemeClr val="phClr">
+                <a:satMod val="103000"/>
+                <a:lumMod val="102000"/>
+                <a:tint val="94000"/>
+              </a:schemeClr>
+            </a:gs>
+            <a:gs pos="50000">
+              <a:schemeClr val="phClr">
+                <a:satMod val="110000"/>
+                <a:lumMod val="100000"/>
+                <a:shade val="100000"/>
+              </a:schemeClr>
+            </a:gs>
+            <a:gs pos="100000">
+              <a:schemeClr val="phClr">
+                <a:lumMod val="99000"/>
+                <a:satMod val="120000"/>
+                <a:shade val="78000"/>
+              </a:schemeClr>
+            </a:gs>
+          </a:gsLst>
+          <a:lin ang="5400000" scaled="0"/>
+        </a:gradFill>
+      </a:fillStyleLst>
+      <a:lnStyleLst>
+        <a:ln w="6350" cap="flat" cmpd="sng" algn="ctr">
+          <a:solidFill>
+            <a:schemeClr val="phClr"/>
+          </a:solidFill>
+          <a:prstDash val="solid"/>
+          <a:miter lim="800000"/>
+        </a:ln>
+        <a:ln w="12700" cap="flat" cmpd="sng" algn="ctr">
+          <a:solidFill>
+            <a:schemeClr val="phClr"/>
+          </a:solidFill>
+          <a:prstDash val="solid"/>
+          <a:miter lim="800000"/>
+        </a:ln>
+        <a:ln w="19050" cap="flat" cmpd="sng" algn="ctr">
+          <a:solidFill>
+            <a:schemeClr val="phClr"/>
+          </a:solidFill>
+          <a:prstDash val="solid"/>
+          <a:miter lim="800000"/>
+        </a:ln>
+      </a:lnStyleLst>
+      <a:effectStyleLst>
+        <a:effectStyle>
+          <a:effectLst/>
+        </a:effectStyle>
+        <a:effectStyle>
+          <a:effectLst/>
+        </a:effectStyle>
+        <a:effectStyle>
+          <a:effectLst>
+            <a:outerShdw blurRad="57150" dist="19050" dir="5400000" algn="ctr" rotWithShape="0">
+              <a:srgbClr val="000000">
+                <a:alpha val="63000"/>
+              </a:srgbClr>
+            </a:outerShdw>
+          </a:effectLst>
+        </a:effectStyle>
+      </a:effectStyleLst>
+      <a:bgFillStyleLst>
+        <a:solidFill>
+          <a:schemeClr val="phClr"/>
+        </a:solidFill>
+        <a:solidFill>
+          <a:schemeClr val="phClr">
+            <a:tint val="95000"/>
+            <a:satMod val="170000"/>
+          </a:schemeClr>
+        </a:solidFill>
+        <a:gradFill rotWithShape="1">
+          <a:gsLst>
+            <a:gs pos="0">
+              <a:schemeClr val="phClr">
+                <a:tint val="93000"/>
+                <a:satMod val="150000"/>
+                <a:shade val="98000"/>
+                <a:lumMod val="102000"/>
+              </a:schemeClr>
+            </a:gs>
+            <a:gs pos="50000">
+              <a:schemeClr val="phClr">
+                <a:tint val="98000"/>
+                <a:satMod val="130000"/>
+                <a:shade val="90000"/>
+                <a:lumMod val="103000"/>
+              </a:schemeClr>
+            </a:gs>
+            <a:gs pos="100000">
+              <a:schemeClr val="phClr">
+                <a:shade val="63000"/>
+                <a:satMod val="120000"/>
+              </a:schemeClr>
+            </a:gs>
+          </a:gsLst>
+          <a:lin ang="5400000" scaled="0"/>
+        </a:gradFill>
+      </a:bgFillStyleLst>
+    </a:fmtScheme>
+  </a:themeElements>
+  <a:objectDefaults/>
+  <a:extraClrSchemeLst/>
+  <a:extLst>
+    <a:ext uri="{05A4C25C-085E-4340-85A3-A5531E510DB2}">
+      <thm15:themeFamily xmlns:thm15="http://schemas.microsoft.com/office/thememl/2012/main" name="Office Theme" id="{62F939B6-93AF-4DB8-9C6B-D6C7DFDC589F}" vid="{4A3C46E8-61CC-4603-A589-7422A47A8E4A}"/>
+    </a:ext>
+  </a:extLst>
+</a:theme>
+</file>
+
+<file path=ppt/theme/theme2.xml><?xml version="1.0" encoding="utf-8"?>
+<a:theme xmlns:a="http://schemas.openxmlformats.org/drawingml/2006/main" name="Office Theme">
+  <a:themeElements>
+    <a:clrScheme name="Office">
+      <a:dk1>
+        <a:sysClr val="windowText" lastClr="000000"/>
+      </a:dk1>
+      <a:lt1>
+        <a:sysClr val="window" lastClr="FFFFFF"/>
+      </a:lt1>
+      <a:dk2>
+        <a:srgbClr val="44546A"/>
+      </a:dk2>
+      <a:lt2>
+        <a:srgbClr val="E7E6E6"/>
+      </a:lt2>
+      <a:accent1>
+        <a:srgbClr val="4472C4"/>
+      </a:accent1>
+      <a:accent2>
+        <a:srgbClr val="ED7D31"/>
+      </a:accent2>
+      <a:accent3>
+        <a:srgbClr val="A5A5A5"/>
+      </a:accent3>
+      <a:accent4>
+        <a:srgbClr val="FFC000"/>
+      </a:accent4>
+      <a:accent5>
+        <a:srgbClr val="5B9BD5"/>
+      </a:accent5>
+      <a:accent6>
+        <a:srgbClr val="70AD47"/>
       </a:accent6>
       <a:hlink>
         <a:srgbClr val="0563C1"/>
